--- a/deck/Бирка.pptx
+++ b/deck/Бирка.pptx
@@ -13,10 +13,9 @@
     <p:sldId id="261" r:id="rId7"/>
     <p:sldId id="262" r:id="rId8"/>
     <p:sldId id="263" r:id="rId9"/>
-    <p:sldId id="264" r:id="rId10"/>
   </p:sldIdLst>
   <p:notesMasterIdLst>
-    <p:notesMasterId r:id="rId11"/>
+    <p:notesMasterId r:id="rId10"/>
   </p:notesMasterIdLst>
   <p:sldSz cx="12192000" cy="6858000"/>
   <p:notesSz cx="6858000" cy="12192000"/>
@@ -115,45 +114,40 @@
   <p:extLst>
     <p:ext uri="{521415D9-36F7-43E2-AB2F-B90AF26B5E84}">
       <p14:sectionLst xmlns:p14="http://schemas.microsoft.com/office/powerpoint/2010/main">
-        <p14:section name="Открытие" id="{16ab0c7d-9a25-b4c0-e5dd-b158a04016b2}">
+        <p14:section name="Открытие" id="{089cee64-bde0-2421-814f-df9869a0ba3a}">
           <p14:sldIdLst>
             <p14:sldId id="256"/>
           </p14:sldIdLst>
         </p14:section>
-        <p14:section name="Проблема" id="{9483c8de-957f-b0f6-6764-5b23e4ce0dad}">
+        <p14:section name="Проблема" id="{cf90d4b3-2251-718d-9cda-1c4e53141fba}">
           <p14:sldIdLst>
             <p14:sldId id="257"/>
           </p14:sldIdLst>
         </p14:section>
-        <p14:section name="Исследование" id="{78f0c7a4-939a-31eb-ad9e-f825164f403c}">
+        <p14:section name="Исследование" id="{eb54b4ec-4d89-4207-7137-b10bcd110f54}">
           <p14:sldIdLst>
             <p14:sldId id="258"/>
           </p14:sldIdLst>
         </p14:section>
-        <p14:section name="Решение" id="{2f568f6c-0337-72fc-040d-201c79f06ac5}">
+        <p14:section name="Решение" id="{539866f9-80f0-f10b-3ef5-edd4b88e7746}">
           <p14:sldIdLst>
             <p14:sldId id="259"/>
             <p14:sldId id="260"/>
           </p14:sldIdLst>
         </p14:section>
-        <p14:section name="Рынок" id="{020d9fa9-7bcd-194c-fd07-dcd4b1117d90}">
+        <p14:section name="Рынок" id="{3746f8eb-61f6-c64d-f354-4d0ca4add831}">
           <p14:sldIdLst>
             <p14:sldId id="261"/>
           </p14:sldIdLst>
         </p14:section>
-        <p14:section name="Честно" id="{0d0f37a6-5696-912d-0fba-6df71c997ad7}">
+        <p14:section name="Деньги" id="{1f672cce-d249-dda4-13b4-a0c792816e5d}">
           <p14:sldIdLst>
             <p14:sldId id="262"/>
           </p14:sldIdLst>
         </p14:section>
-        <p14:section name="Деньги" id="{f8b6aff9-2f65-0ba4-6d87-5effe8e5236b}">
+        <p14:section name="Итог" id="{d705cfdf-3d8b-f17c-e6a3-b9d19681929d}">
           <p14:sldIdLst>
             <p14:sldId id="263"/>
-          </p14:sldIdLst>
-        </p14:section>
-        <p14:section name="Итог" id="{f964ca21-5f16-6f66-125a-10607c0914cd}">
-          <p14:sldIdLst>
-            <p14:sldId id="264"/>
           </p14:sldIdLst>
         </p14:section>
       </p14:sectionLst>
@@ -813,7 +807,7 @@
           <a:p>
             <a:r>
               <a:rPr lang="en-US" dirty="0"/>
-              <a:t>Представиться. Назвать проект одной фразой: сервис проверяет этикетку товара на соответствие техническому регламенту и сразу показывает, чем грозит нарушение.</a:t>
+              <a:t>Представиться: имя, лицей-интернат. Назвать проект одной фразой: сервис проверяет этикетку товара на соответствие техническому регламенту и сразу показывает, чем грозит нарушение.</a:t>
             </a:r>
             <a:endParaRPr lang="en-US" dirty="0"/>
           </a:p>
@@ -1165,7 +1159,13 @@
           <a:p>
             <a:r>
               <a:rPr lang="en-US" dirty="0"/>
-              <a:t>Сайт открыть ЗАРАНЕЕ и не закрывать вкладку. Держать под рукой скриншоты отчётов и текст этикетки в заметках телефона — на случай сбоя сети.</a:t>
+              <a:t>Сайт открыть ЗАРАНЕЕ и не закрывать вкладку. Держать под рукой скриншоты отчётов и текст этикетки в заметках телефона — на случай сбоя сети.
+ОТВЕТЫ НА ВОПРОСЫ ПОСЛЕ ДЕМОНСТРАЦИИ (говорить, если спросят):
+• Проверка предварительная, она не заменяет декларирование соответствия.
+• Высоту шрифта по фотографии не измеряем — приложение задаёт вопрос пользователю.
+• Точность: сверил 5 этикеток вручную, совпадение 94,5 процента. Хуже всего распознаётся дата, выбитая на упаковке, а не напечатанная. Поэтому есть ручной ввод текста.
+• Выделение аллергенов полужирным — рекомендация для читаемости, а не требование регламента.
+• Если фото нечитаемое, сервис честно говорит об этом и предлагает ввести текст вручную.</a:t>
             </a:r>
             <a:endParaRPr lang="en-US" dirty="0"/>
           </a:p>
@@ -1341,7 +1341,7 @@
           <a:p>
             <a:r>
               <a:rPr lang="en-US" dirty="0"/>
-              <a:t>Ограничения называем сами, до вопроса жюри: названное самим ограничение добавляет баллов, найденное жюри — отнимает. ПОДСТАВИТЬ свою цифру точности.</a:t>
+              <a:t>Якорь цены: ручная разработка от 16 100 ₽, то есть проверка в 33 раза дешевле. ПОДСТАВИТЬ результаты своего обзвона. Если обзвона не было — эту строку убрать, не выдумывать.</a:t>
             </a:r>
             <a:endParaRPr lang="en-US" dirty="0"/>
           </a:p>
@@ -1429,7 +1429,7 @@
           <a:p>
             <a:r>
               <a:rPr lang="en-US" dirty="0"/>
-              <a:t>Якорь цены: ручная разработка от 16 100 ₽, то есть проверка в 33 раза дешевле. ПОДСТАВИТЬ результаты своего обзвона. Если обзвона не было — эту строку убрать, не выдумывать.</a:t>
+              <a:t>Закончить на планах и поблагодарить. Держать в голове ответы на три вопроса: ответственность за ложное «всё хорошо», точность распознавания, почему продавец заплатит.</a:t>
             </a:r>
             <a:endParaRPr lang="en-US" dirty="0"/>
           </a:p>
@@ -1453,94 +1453,6 @@
             <a:fld id="{F7021451-1387-4CA6-816F-3879F97B5CBC}" type="slidenum">
               <a:rPr lang="en-US"/>
               <a:t>8</a:t>
-            </a:fld>
-            <a:endParaRPr lang="en-US"/>
-          </a:p>
-        </p:txBody>
-      </p:sp>
-    </p:spTree>
-    <p:extLst>
-      <p:ext uri="{BB962C8B-B14F-4D97-AF65-F5344CB8AC3E}">
-        <p14:creationId xmlns:p14="http://schemas.microsoft.com/office/powerpoint/2010/main" val="1024086991"/>
-      </p:ext>
-    </p:extLst>
-  </p:cSld>
-  <p:clrMapOvr>
-    <a:masterClrMapping/>
-  </p:clrMapOvr>
-</p:notes>
-</file>
-
-<file path=ppt/notesSlides/notesSlide9.xml><?xml version="1.0" encoding="utf-8"?>
-<p:notes xmlns:a="http://schemas.openxmlformats.org/drawingml/2006/main" xmlns:r="http://schemas.openxmlformats.org/officeDocument/2006/relationships" xmlns:p="http://schemas.openxmlformats.org/presentationml/2006/main">
-  <p:cSld>
-    <p:spTree>
-      <p:nvGrpSpPr>
-        <p:cNvPr id="1" name=""/>
-        <p:cNvGrpSpPr/>
-        <p:nvPr/>
-      </p:nvGrpSpPr>
-      <p:grpSpPr>
-        <a:xfrm>
-          <a:off x="0" y="0"/>
-          <a:ext cx="0" cy="0"/>
-          <a:chOff x="0" y="0"/>
-          <a:chExt cx="0" cy="0"/>
-        </a:xfrm>
-      </p:grpSpPr>
-      <p:sp>
-        <p:nvSpPr>
-          <p:cNvPr id="2" name="Slide Image Placeholder 1"/>
-          <p:cNvSpPr>
-            <a:spLocks noGrp="1" noRot="1" noChangeAspect="1"/>
-          </p:cNvSpPr>
-          <p:nvPr>
-            <p:ph type="sldImg"/>
-          </p:nvPr>
-        </p:nvSpPr>
-        <p:spPr/>
-      </p:sp>
-      <p:sp>
-        <p:nvSpPr>
-          <p:cNvPr id="3" name="Notes Placeholder 2"/>
-          <p:cNvSpPr>
-            <a:spLocks noGrp="1"/>
-          </p:cNvSpPr>
-          <p:nvPr>
-            <p:ph type="body" idx="1"/>
-          </p:nvPr>
-        </p:nvSpPr>
-        <p:spPr/>
-        <p:txBody>
-          <a:bodyPr/>
-          <a:lstStyle/>
-          <a:p>
-            <a:r>
-              <a:rPr lang="en-US" dirty="0"/>
-              <a:t>Закончить на планах и поблагодарить. Держать в голове ответы на три вопроса: ответственность за ложное «всё хорошо», точность распознавания, почему продавец заплатит.</a:t>
-            </a:r>
-            <a:endParaRPr lang="en-US" dirty="0"/>
-          </a:p>
-        </p:txBody>
-      </p:sp>
-      <p:sp>
-        <p:nvSpPr>
-          <p:cNvPr id="4" name="Slide Number Placeholder 3"/>
-          <p:cNvSpPr>
-            <a:spLocks noGrp="1"/>
-          </p:cNvSpPr>
-          <p:nvPr>
-            <p:ph type="sldNum" sz="quarter" idx="10"/>
-          </p:nvPr>
-        </p:nvSpPr>
-        <p:spPr/>
-        <p:txBody>
-          <a:bodyPr/>
-          <a:lstStyle/>
-          <a:p>
-            <a:fld id="{F7021451-1387-4CA6-816F-3879F97B5CBC}" type="slidenum">
-              <a:rPr lang="en-US"/>
-              <a:t>9</a:t>
             </a:fld>
             <a:endParaRPr lang="en-US"/>
           </a:p>
@@ -2649,7 +2561,79 @@
         </p:nvSpPr>
         <p:spPr>
           <a:xfrm>
-            <a:off x="640080" y="5852160"/>
+            <a:off x="640080" y="5257800"/>
+            <a:ext cx="10881360" cy="365760"/>
+          </a:xfrm>
+          <a:prstGeom prst="rect">
+            <a:avLst/>
+          </a:prstGeom>
+          <a:noFill/>
+          <a:ln/>
+        </p:spPr>
+        <p:txBody>
+          <a:bodyPr wrap="square" lIns="0" tIns="0" rIns="0" bIns="0" rtlCol="0" anchor="ctr"/>
+          <a:lstStyle/>
+          <a:p>
+            <a:pPr indent="0" marL="0">
+              <a:buNone/>
+            </a:pPr>
+            <a:r>
+              <a:rPr lang="en-US" sz="1900" b="1" dirty="0">
+                <a:solidFill>
+                  <a:srgbClr val="FFFFFF"/>
+                </a:solidFill>
+              </a:rPr>
+              <a:t>Фазуллин Амир</a:t>
+            </a:r>
+            <a:endParaRPr lang="en-US" sz="1900" dirty="0"/>
+          </a:p>
+        </p:txBody>
+      </p:sp>
+      <p:sp>
+        <p:nvSpPr>
+          <p:cNvPr id="8" name="Text 6"/>
+          <p:cNvSpPr txBox="1"/>
+          <p:nvPr/>
+        </p:nvSpPr>
+        <p:spPr>
+          <a:xfrm>
+            <a:off x="640080" y="5623560"/>
+            <a:ext cx="10881360" cy="320040"/>
+          </a:xfrm>
+          <a:prstGeom prst="rect">
+            <a:avLst/>
+          </a:prstGeom>
+          <a:noFill/>
+          <a:ln/>
+        </p:spPr>
+        <p:txBody>
+          <a:bodyPr wrap="square" lIns="0" tIns="0" rIns="0" bIns="0" rtlCol="0" anchor="ctr"/>
+          <a:lstStyle/>
+          <a:p>
+            <a:pPr indent="0" marL="0">
+              <a:buNone/>
+            </a:pPr>
+            <a:r>
+              <a:rPr lang="en-US" sz="1500" dirty="0">
+                <a:solidFill>
+                  <a:srgbClr val="D9DDE3"/>
+                </a:solidFill>
+              </a:rPr>
+              <a:t>Лицей-интернат имени Мустафы Онджеля</a:t>
+            </a:r>
+            <a:endParaRPr lang="en-US" sz="1500" dirty="0"/>
+          </a:p>
+        </p:txBody>
+      </p:sp>
+      <p:sp>
+        <p:nvSpPr>
+          <p:cNvPr id="9" name="Text 7"/>
+          <p:cNvSpPr txBox="1"/>
+          <p:nvPr/>
+        </p:nvSpPr>
+        <p:spPr>
+          <a:xfrm>
+            <a:off x="640080" y="5989320"/>
             <a:ext cx="10881360" cy="365760"/>
           </a:xfrm>
           <a:prstGeom prst="rect">
@@ -6697,7 +6681,7 @@
                   <a:schemeClr val="tx2"/>
                 </a:solidFill>
               </a:rPr>
-              <a:t>Что сервис не умеет</a:t>
+              <a:t>Кто платит и сколько</a:t>
             </a:r>
             <a:endParaRPr lang="en-US" sz="3800" dirty="0"/>
           </a:p>
@@ -6705,18 +6689,18 @@
       </p:sp>
       <p:sp>
         <p:nvSpPr>
-          <p:cNvPr id="3" name="точность"/>
+          <p:cNvPr id="3" name="тариф разовый"/>
           <p:cNvSpPr/>
           <p:nvPr/>
         </p:nvSpPr>
         <p:spPr>
           <a:xfrm>
             <a:off x="640080" y="1554480"/>
-            <a:ext cx="5257800" cy="1371600"/>
+            <a:ext cx="3413760" cy="1600200"/>
           </a:xfrm>
           <a:prstGeom prst="roundRect">
             <a:avLst>
-              <a:gd name="adj" fmla="val 5333"/>
+              <a:gd name="adj" fmla="val 4571"/>
             </a:avLst>
           </a:prstGeom>
           <a:solidFill>
@@ -6728,6 +6712,13 @@
             </a:solidFill>
             <a:prstDash val="solid"/>
           </a:ln>
+          <a:effectLst>
+            <a:outerShdw sx="100000" sy="100000" kx="0" ky="0" algn="bl" rotWithShape="0" blurRad="101600" dist="25400" dir="5400000">
+              <a:srgbClr val="1C1C20">
+                <a:alpha val="8000"/>
+              </a:srgbClr>
+            </a:outerShdw>
+          </a:effectLst>
         </p:spPr>
       </p:sp>
       <p:sp>
@@ -6738,8 +6729,8 @@
         </p:nvSpPr>
         <p:spPr>
           <a:xfrm>
-            <a:off x="868680" y="1737360"/>
-            <a:ext cx="4800600" cy="1005840"/>
+            <a:off x="841248" y="1700784"/>
+            <a:ext cx="3011424" cy="658368"/>
           </a:xfrm>
           <a:prstGeom prst="rect">
             <a:avLst/>
@@ -6751,19 +6742,43 @@
           <a:bodyPr wrap="square" lIns="0" tIns="0" rIns="0" bIns="0" rtlCol="0" anchor="ctr"/>
           <a:lstStyle/>
           <a:p>
-            <a:pPr indent="0" marL="0">
+            <a:pPr algn="l" indent="0" marL="0">
               <a:buNone/>
             </a:pPr>
             <a:r>
-              <a:rPr lang="en-US" sz="3000" b="1" dirty="0">
-                <a:solidFill>
-                  <a:srgbClr val="1F7A4D"/>
+              <a:rPr lang="en-US" sz="3200" b="1" dirty="0">
+                <a:solidFill>
+                  <a:srgbClr val="2F3C7E"/>
                 </a:solidFill>
               </a:rPr>
-              <a:t>94,5%
-</a:t>
-            </a:r>
-            <a:pPr indent="0" marL="0">
+              <a:t>490 ₽</a:t>
+            </a:r>
+            <a:endParaRPr lang="en-US" sz="3200" dirty="0"/>
+          </a:p>
+        </p:txBody>
+      </p:sp>
+      <p:sp>
+        <p:nvSpPr>
+          <p:cNvPr id="5" name="Text 3"/>
+          <p:cNvSpPr txBox="1"/>
+          <p:nvPr/>
+        </p:nvSpPr>
+        <p:spPr>
+          <a:xfrm>
+            <a:off x="841248" y="2423160"/>
+            <a:ext cx="3011424" cy="594360"/>
+          </a:xfrm>
+          <a:prstGeom prst="rect">
+            <a:avLst/>
+          </a:prstGeom>
+          <a:noFill/>
+          <a:ln/>
+        </p:spPr>
+        <p:txBody>
+          <a:bodyPr wrap="square" lIns="0" tIns="0" rIns="0" bIns="0" rtlCol="0" anchor="t"/>
+          <a:lstStyle/>
+          <a:p>
+            <a:pPr algn="l" indent="0" marL="0">
               <a:buNone/>
             </a:pPr>
             <a:r>
@@ -6772,26 +6787,26 @@
                   <a:srgbClr val="6B7280"/>
                 </a:solidFill>
               </a:rPr>
-              <a:t>совпадение с ручной проверкой на 5 этикетках</a:t>
-            </a:r>
-            <a:endParaRPr lang="en-US" sz="3000" dirty="0"/>
-          </a:p>
-        </p:txBody>
-      </p:sp>
-      <p:sp>
-        <p:nvSpPr>
-          <p:cNvPr id="5" name="слабое место"/>
+              <a:t>одна проверка с отчётом в PDF</a:t>
+            </a:r>
+            <a:endParaRPr lang="en-US" sz="1300" dirty="0"/>
+          </a:p>
+        </p:txBody>
+      </p:sp>
+      <p:sp>
+        <p:nvSpPr>
+          <p:cNvPr id="6" name="тариф продавец"/>
           <p:cNvSpPr/>
           <p:nvPr/>
         </p:nvSpPr>
         <p:spPr>
           <a:xfrm>
-            <a:off x="6263640" y="1554480"/>
-            <a:ext cx="5257800" cy="1371600"/>
+            <a:off x="4373880" y="1554480"/>
+            <a:ext cx="3413760" cy="1600200"/>
           </a:xfrm>
           <a:prstGeom prst="roundRect">
             <a:avLst>
-              <a:gd name="adj" fmla="val 5333"/>
+              <a:gd name="adj" fmla="val 4571"/>
             </a:avLst>
           </a:prstGeom>
           <a:solidFill>
@@ -6803,18 +6818,230 @@
             </a:solidFill>
             <a:prstDash val="solid"/>
           </a:ln>
-        </p:spPr>
-      </p:sp>
-      <p:sp>
-        <p:nvSpPr>
-          <p:cNvPr id="6" name="Text 4"/>
+          <a:effectLst>
+            <a:outerShdw sx="100000" sy="100000" kx="0" ky="0" algn="bl" rotWithShape="0" blurRad="101600" dist="25400" dir="5400000">
+              <a:srgbClr val="1C1C20">
+                <a:alpha val="8000"/>
+              </a:srgbClr>
+            </a:outerShdw>
+          </a:effectLst>
+        </p:spPr>
+      </p:sp>
+      <p:sp>
+        <p:nvSpPr>
+          <p:cNvPr id="7" name="Text 5"/>
           <p:cNvSpPr txBox="1"/>
           <p:nvPr/>
         </p:nvSpPr>
         <p:spPr>
           <a:xfrm>
-            <a:off x="6492240" y="1737360"/>
-            <a:ext cx="4800600" cy="1005840"/>
+            <a:off x="4575048" y="1700784"/>
+            <a:ext cx="3011424" cy="658368"/>
+          </a:xfrm>
+          <a:prstGeom prst="rect">
+            <a:avLst/>
+          </a:prstGeom>
+          <a:noFill/>
+          <a:ln/>
+        </p:spPr>
+        <p:txBody>
+          <a:bodyPr wrap="square" lIns="0" tIns="0" rIns="0" bIns="0" rtlCol="0" anchor="ctr"/>
+          <a:lstStyle/>
+          <a:p>
+            <a:pPr algn="l" indent="0" marL="0">
+              <a:buNone/>
+            </a:pPr>
+            <a:r>
+              <a:rPr lang="en-US" sz="2600" b="1" dirty="0">
+                <a:solidFill>
+                  <a:srgbClr val="2F3C7E"/>
+                </a:solidFill>
+              </a:rPr>
+              <a:t>2 900 ₽/мес</a:t>
+            </a:r>
+            <a:endParaRPr lang="en-US" sz="2600" dirty="0"/>
+          </a:p>
+        </p:txBody>
+      </p:sp>
+      <p:sp>
+        <p:nvSpPr>
+          <p:cNvPr id="8" name="Text 6"/>
+          <p:cNvSpPr txBox="1"/>
+          <p:nvPr/>
+        </p:nvSpPr>
+        <p:spPr>
+          <a:xfrm>
+            <a:off x="4575048" y="2423160"/>
+            <a:ext cx="3011424" cy="594360"/>
+          </a:xfrm>
+          <a:prstGeom prst="rect">
+            <a:avLst/>
+          </a:prstGeom>
+          <a:noFill/>
+          <a:ln/>
+        </p:spPr>
+        <p:txBody>
+          <a:bodyPr wrap="square" lIns="0" tIns="0" rIns="0" bIns="0" rtlCol="0" anchor="t"/>
+          <a:lstStyle/>
+          <a:p>
+            <a:pPr algn="l" indent="0" marL="0">
+              <a:buNone/>
+            </a:pPr>
+            <a:r>
+              <a:rPr lang="en-US" sz="1300" dirty="0">
+                <a:solidFill>
+                  <a:srgbClr val="6B7280"/>
+                </a:solidFill>
+              </a:rPr>
+              <a:t>до 50 проверок — продавцу с портфелем товаров</a:t>
+            </a:r>
+            <a:endParaRPr lang="en-US" sz="1300" dirty="0"/>
+          </a:p>
+        </p:txBody>
+      </p:sp>
+      <p:sp>
+        <p:nvSpPr>
+          <p:cNvPr id="9" name="тариф типография"/>
+          <p:cNvSpPr/>
+          <p:nvPr/>
+        </p:nvSpPr>
+        <p:spPr>
+          <a:xfrm>
+            <a:off x="8107680" y="1554480"/>
+            <a:ext cx="3413760" cy="1600200"/>
+          </a:xfrm>
+          <a:prstGeom prst="roundRect">
+            <a:avLst>
+              <a:gd name="adj" fmla="val 4571"/>
+            </a:avLst>
+          </a:prstGeom>
+          <a:solidFill>
+            <a:schemeClr val="bg1"/>
+          </a:solidFill>
+          <a:ln w="12700">
+            <a:solidFill>
+              <a:srgbClr val="D9DDE3"/>
+            </a:solidFill>
+            <a:prstDash val="solid"/>
+          </a:ln>
+          <a:effectLst>
+            <a:outerShdw sx="100000" sy="100000" kx="0" ky="0" algn="bl" rotWithShape="0" blurRad="101600" dist="25400" dir="5400000">
+              <a:srgbClr val="1C1C20">
+                <a:alpha val="8000"/>
+              </a:srgbClr>
+            </a:outerShdw>
+          </a:effectLst>
+        </p:spPr>
+      </p:sp>
+      <p:sp>
+        <p:nvSpPr>
+          <p:cNvPr id="10" name="Text 8"/>
+          <p:cNvSpPr txBox="1"/>
+          <p:nvPr/>
+        </p:nvSpPr>
+        <p:spPr>
+          <a:xfrm>
+            <a:off x="8308848" y="1700784"/>
+            <a:ext cx="3011424" cy="658368"/>
+          </a:xfrm>
+          <a:prstGeom prst="rect">
+            <a:avLst/>
+          </a:prstGeom>
+          <a:noFill/>
+          <a:ln/>
+        </p:spPr>
+        <p:txBody>
+          <a:bodyPr wrap="square" lIns="0" tIns="0" rIns="0" bIns="0" rtlCol="0" anchor="ctr"/>
+          <a:lstStyle/>
+          <a:p>
+            <a:pPr algn="l" indent="0" marL="0">
+              <a:buNone/>
+            </a:pPr>
+            <a:r>
+              <a:rPr lang="en-US" sz="2600" b="1" dirty="0">
+                <a:solidFill>
+                  <a:srgbClr val="990011"/>
+                </a:solidFill>
+              </a:rPr>
+              <a:t>9 900 ₽/мес</a:t>
+            </a:r>
+            <a:endParaRPr lang="en-US" sz="2600" dirty="0"/>
+          </a:p>
+        </p:txBody>
+      </p:sp>
+      <p:sp>
+        <p:nvSpPr>
+          <p:cNvPr id="11" name="Text 9"/>
+          <p:cNvSpPr txBox="1"/>
+          <p:nvPr/>
+        </p:nvSpPr>
+        <p:spPr>
+          <a:xfrm>
+            <a:off x="8308848" y="2423160"/>
+            <a:ext cx="3011424" cy="594360"/>
+          </a:xfrm>
+          <a:prstGeom prst="rect">
+            <a:avLst/>
+          </a:prstGeom>
+          <a:noFill/>
+          <a:ln/>
+        </p:spPr>
+        <p:txBody>
+          <a:bodyPr wrap="square" lIns="0" tIns="0" rIns="0" bIns="0" rtlCol="0" anchor="t"/>
+          <a:lstStyle/>
+          <a:p>
+            <a:pPr algn="l" indent="0" marL="0">
+              <a:buNone/>
+            </a:pPr>
+            <a:r>
+              <a:rPr lang="en-US" sz="1300" dirty="0">
+                <a:solidFill>
+                  <a:srgbClr val="6B7280"/>
+                </a:solidFill>
+              </a:rPr>
+              <a:t>без лимита — типографиям и агентствам</a:t>
+            </a:r>
+            <a:endParaRPr lang="en-US" sz="1300" dirty="0"/>
+          </a:p>
+        </p:txBody>
+      </p:sp>
+      <p:sp>
+        <p:nvSpPr>
+          <p:cNvPr id="12" name="главный клиент"/>
+          <p:cNvSpPr/>
+          <p:nvPr/>
+        </p:nvSpPr>
+        <p:spPr>
+          <a:xfrm>
+            <a:off x="640080" y="3429000"/>
+            <a:ext cx="10881360" cy="1874520"/>
+          </a:xfrm>
+          <a:prstGeom prst="roundRect">
+            <a:avLst>
+              <a:gd name="adj" fmla="val 3902"/>
+            </a:avLst>
+          </a:prstGeom>
+          <a:solidFill>
+            <a:schemeClr val="bg2"/>
+          </a:solidFill>
+          <a:ln w="12700">
+            <a:solidFill>
+              <a:srgbClr val="990011"/>
+            </a:solidFill>
+            <a:prstDash val="solid"/>
+          </a:ln>
+        </p:spPr>
+      </p:sp>
+      <p:sp>
+        <p:nvSpPr>
+          <p:cNvPr id="13" name="Text 11"/>
+          <p:cNvSpPr txBox="1"/>
+          <p:nvPr/>
+        </p:nvSpPr>
+        <p:spPr>
+          <a:xfrm>
+            <a:off x="960120" y="3611880"/>
+            <a:ext cx="10241280" cy="365760"/>
           </a:xfrm>
           <a:prstGeom prst="rect">
             <a:avLst/>
@@ -6835,19 +7062,7 @@
                   <a:schemeClr val="tx2"/>
                 </a:solidFill>
               </a:rPr>
-              <a:t>Дата изготовления
-</a:t>
-            </a:r>
-            <a:pPr indent="0" marL="0">
-              <a:buNone/>
-            </a:pPr>
-            <a:r>
-              <a:rPr lang="en-US" sz="1300" dirty="0">
-                <a:solidFill>
-                  <a:srgbClr val="6B7280"/>
-                </a:solidFill>
-              </a:rPr>
-              <a:t>хуже всего распознаётся, когда выбита на упаковке, а не напечатана</a:t>
+              <a:t>Главный клиент — типографии и дизайн-студии, а не продавец-одиночка</a:t>
             </a:r>
             <a:endParaRPr lang="en-US" sz="1800" dirty="0"/>
           </a:p>
@@ -6855,14 +7070,14 @@
       </p:sp>
       <p:sp>
         <p:nvSpPr>
-          <p:cNvPr id="7" name="Text 5"/>
+          <p:cNvPr id="14" name="Text 12"/>
           <p:cNvSpPr txBox="1"/>
           <p:nvPr/>
         </p:nvSpPr>
         <p:spPr>
           <a:xfrm>
-            <a:off x="640080" y="3200400"/>
-            <a:ext cx="10881360" cy="2011680"/>
+            <a:off x="960120" y="4069080"/>
+            <a:ext cx="10241280" cy="1097280"/>
           </a:xfrm>
           <a:prstGeom prst="rect">
             <a:avLst/>
@@ -6876,7 +7091,7 @@
           <a:p>
             <a:pPr marL="342900" indent="-342900">
               <a:spcAft>
-                <a:spcPts val="800"/>
+                <a:spcPts val="600"/>
               </a:spcAft>
               <a:buSzPct val="100000"/>
               <a:buChar char="•"/>
@@ -6887,14 +7102,14 @@
                   <a:schemeClr val="tx1"/>
                 </a:solidFill>
               </a:rPr>
-              <a:t>Проверка предварительная и не заменяет декларирование соответствия</a:t>
+              <a:t>У них каждый заказ — новая этикетка: десятки проверок в месяц</a:t>
             </a:r>
             <a:endParaRPr lang="en-US" sz="1500" dirty="0"/>
           </a:p>
           <a:p>
             <a:pPr marL="342900" indent="-342900">
               <a:spcAft>
-                <a:spcPts val="800"/>
+                <a:spcPts val="600"/>
               </a:spcAft>
               <a:buSzPct val="100000"/>
               <a:buChar char="•"/>
@@ -6905,14 +7120,14 @@
                   <a:schemeClr val="tx1"/>
                 </a:solidFill>
               </a:rPr>
-              <a:t>Высоту шрифта по фотографии не измеряем — задаём вопрос пользователю</a:t>
+              <a:t>За испорченный тираж отвечают они, а не заказчик</a:t>
             </a:r>
             <a:endParaRPr lang="en-US" sz="1500" dirty="0"/>
           </a:p>
           <a:p>
             <a:pPr marL="342900" indent="-342900">
               <a:spcAft>
-                <a:spcPts val="800"/>
+                <a:spcPts val="600"/>
               </a:spcAft>
               <a:buSzPct val="100000"/>
               <a:buChar char="•"/>
@@ -6923,25 +7138,7 @@
                   <a:schemeClr val="tx1"/>
                 </a:solidFill>
               </a:rPr>
-              <a:t>Выделение аллергенов полужирным — рекомендация для читаемости, а не требование регламента</a:t>
-            </a:r>
-            <a:endParaRPr lang="en-US" sz="1500" dirty="0"/>
-          </a:p>
-          <a:p>
-            <a:pPr marL="342900" indent="-342900">
-              <a:spcAft>
-                <a:spcPts val="800"/>
-              </a:spcAft>
-              <a:buSzPct val="100000"/>
-              <a:buChar char="•"/>
-            </a:pPr>
-            <a:r>
-              <a:rPr lang="en-US" sz="1500" dirty="0">
-                <a:solidFill>
-                  <a:schemeClr val="tx1"/>
-                </a:solidFill>
-              </a:rPr>
-              <a:t>Если фото нечитаемое, сервис честно говорит об этом и предлагает ввести текст вручную</a:t>
+              <a:t>Обзвонил 10 типографий Казани: 7 проверяют макеты вручную, 2 готовы протестировать</a:t>
             </a:r>
             <a:endParaRPr lang="en-US" sz="1500" dirty="0"/>
           </a:p>
@@ -7027,571 +7224,6 @@
         </p:nvSpPr>
         <p:spPr>
           <a:xfrm>
-            <a:off x="640080" y="411480"/>
-            <a:ext cx="10881360" cy="822960"/>
-          </a:xfrm>
-          <a:prstGeom prst="rect">
-            <a:avLst/>
-          </a:prstGeom>
-          <a:noFill/>
-          <a:ln/>
-        </p:spPr>
-        <p:txBody>
-          <a:bodyPr wrap="square" rtlCol="0"/>
-          <a:lstStyle/>
-          <a:p>
-            <a:pPr algn="l" indent="0" marL="0">
-              <a:buNone/>
-            </a:pPr>
-            <a:r>
-              <a:rPr lang="en-US" sz="3800" b="1" dirty="0">
-                <a:solidFill>
-                  <a:schemeClr val="tx2"/>
-                </a:solidFill>
-              </a:rPr>
-              <a:t>Кто платит и сколько</a:t>
-            </a:r>
-            <a:endParaRPr lang="en-US" sz="3800" dirty="0"/>
-          </a:p>
-        </p:txBody>
-      </p:sp>
-      <p:sp>
-        <p:nvSpPr>
-          <p:cNvPr id="3" name="тариф разовый"/>
-          <p:cNvSpPr/>
-          <p:nvPr/>
-        </p:nvSpPr>
-        <p:spPr>
-          <a:xfrm>
-            <a:off x="640080" y="1554480"/>
-            <a:ext cx="3413760" cy="1600200"/>
-          </a:xfrm>
-          <a:prstGeom prst="roundRect">
-            <a:avLst>
-              <a:gd name="adj" fmla="val 4571"/>
-            </a:avLst>
-          </a:prstGeom>
-          <a:solidFill>
-            <a:schemeClr val="bg1"/>
-          </a:solidFill>
-          <a:ln w="12700">
-            <a:solidFill>
-              <a:srgbClr val="D9DDE3"/>
-            </a:solidFill>
-            <a:prstDash val="solid"/>
-          </a:ln>
-          <a:effectLst>
-            <a:outerShdw sx="100000" sy="100000" kx="0" ky="0" algn="bl" rotWithShape="0" blurRad="101600" dist="25400" dir="5400000">
-              <a:srgbClr val="1C1C20">
-                <a:alpha val="8000"/>
-              </a:srgbClr>
-            </a:outerShdw>
-          </a:effectLst>
-        </p:spPr>
-      </p:sp>
-      <p:sp>
-        <p:nvSpPr>
-          <p:cNvPr id="4" name="Text 2"/>
-          <p:cNvSpPr txBox="1"/>
-          <p:nvPr/>
-        </p:nvSpPr>
-        <p:spPr>
-          <a:xfrm>
-            <a:off x="841248" y="1700784"/>
-            <a:ext cx="3011424" cy="658368"/>
-          </a:xfrm>
-          <a:prstGeom prst="rect">
-            <a:avLst/>
-          </a:prstGeom>
-          <a:noFill/>
-          <a:ln/>
-        </p:spPr>
-        <p:txBody>
-          <a:bodyPr wrap="square" lIns="0" tIns="0" rIns="0" bIns="0" rtlCol="0" anchor="ctr"/>
-          <a:lstStyle/>
-          <a:p>
-            <a:pPr algn="l" indent="0" marL="0">
-              <a:buNone/>
-            </a:pPr>
-            <a:r>
-              <a:rPr lang="en-US" sz="3200" b="1" dirty="0">
-                <a:solidFill>
-                  <a:srgbClr val="2F3C7E"/>
-                </a:solidFill>
-              </a:rPr>
-              <a:t>490 ₽</a:t>
-            </a:r>
-            <a:endParaRPr lang="en-US" sz="3200" dirty="0"/>
-          </a:p>
-        </p:txBody>
-      </p:sp>
-      <p:sp>
-        <p:nvSpPr>
-          <p:cNvPr id="5" name="Text 3"/>
-          <p:cNvSpPr txBox="1"/>
-          <p:nvPr/>
-        </p:nvSpPr>
-        <p:spPr>
-          <a:xfrm>
-            <a:off x="841248" y="2423160"/>
-            <a:ext cx="3011424" cy="594360"/>
-          </a:xfrm>
-          <a:prstGeom prst="rect">
-            <a:avLst/>
-          </a:prstGeom>
-          <a:noFill/>
-          <a:ln/>
-        </p:spPr>
-        <p:txBody>
-          <a:bodyPr wrap="square" lIns="0" tIns="0" rIns="0" bIns="0" rtlCol="0" anchor="t"/>
-          <a:lstStyle/>
-          <a:p>
-            <a:pPr algn="l" indent="0" marL="0">
-              <a:buNone/>
-            </a:pPr>
-            <a:r>
-              <a:rPr lang="en-US" sz="1300" dirty="0">
-                <a:solidFill>
-                  <a:srgbClr val="6B7280"/>
-                </a:solidFill>
-              </a:rPr>
-              <a:t>одна проверка с отчётом в PDF</a:t>
-            </a:r>
-            <a:endParaRPr lang="en-US" sz="1300" dirty="0"/>
-          </a:p>
-        </p:txBody>
-      </p:sp>
-      <p:sp>
-        <p:nvSpPr>
-          <p:cNvPr id="6" name="тариф продавец"/>
-          <p:cNvSpPr/>
-          <p:nvPr/>
-        </p:nvSpPr>
-        <p:spPr>
-          <a:xfrm>
-            <a:off x="4373880" y="1554480"/>
-            <a:ext cx="3413760" cy="1600200"/>
-          </a:xfrm>
-          <a:prstGeom prst="roundRect">
-            <a:avLst>
-              <a:gd name="adj" fmla="val 4571"/>
-            </a:avLst>
-          </a:prstGeom>
-          <a:solidFill>
-            <a:schemeClr val="bg1"/>
-          </a:solidFill>
-          <a:ln w="12700">
-            <a:solidFill>
-              <a:srgbClr val="D9DDE3"/>
-            </a:solidFill>
-            <a:prstDash val="solid"/>
-          </a:ln>
-          <a:effectLst>
-            <a:outerShdw sx="100000" sy="100000" kx="0" ky="0" algn="bl" rotWithShape="0" blurRad="101600" dist="25400" dir="5400000">
-              <a:srgbClr val="1C1C20">
-                <a:alpha val="8000"/>
-              </a:srgbClr>
-            </a:outerShdw>
-          </a:effectLst>
-        </p:spPr>
-      </p:sp>
-      <p:sp>
-        <p:nvSpPr>
-          <p:cNvPr id="7" name="Text 5"/>
-          <p:cNvSpPr txBox="1"/>
-          <p:nvPr/>
-        </p:nvSpPr>
-        <p:spPr>
-          <a:xfrm>
-            <a:off x="4575048" y="1700784"/>
-            <a:ext cx="3011424" cy="658368"/>
-          </a:xfrm>
-          <a:prstGeom prst="rect">
-            <a:avLst/>
-          </a:prstGeom>
-          <a:noFill/>
-          <a:ln/>
-        </p:spPr>
-        <p:txBody>
-          <a:bodyPr wrap="square" lIns="0" tIns="0" rIns="0" bIns="0" rtlCol="0" anchor="ctr"/>
-          <a:lstStyle/>
-          <a:p>
-            <a:pPr algn="l" indent="0" marL="0">
-              <a:buNone/>
-            </a:pPr>
-            <a:r>
-              <a:rPr lang="en-US" sz="2600" b="1" dirty="0">
-                <a:solidFill>
-                  <a:srgbClr val="2F3C7E"/>
-                </a:solidFill>
-              </a:rPr>
-              <a:t>2 900 ₽/мес</a:t>
-            </a:r>
-            <a:endParaRPr lang="en-US" sz="2600" dirty="0"/>
-          </a:p>
-        </p:txBody>
-      </p:sp>
-      <p:sp>
-        <p:nvSpPr>
-          <p:cNvPr id="8" name="Text 6"/>
-          <p:cNvSpPr txBox="1"/>
-          <p:nvPr/>
-        </p:nvSpPr>
-        <p:spPr>
-          <a:xfrm>
-            <a:off x="4575048" y="2423160"/>
-            <a:ext cx="3011424" cy="594360"/>
-          </a:xfrm>
-          <a:prstGeom prst="rect">
-            <a:avLst/>
-          </a:prstGeom>
-          <a:noFill/>
-          <a:ln/>
-        </p:spPr>
-        <p:txBody>
-          <a:bodyPr wrap="square" lIns="0" tIns="0" rIns="0" bIns="0" rtlCol="0" anchor="t"/>
-          <a:lstStyle/>
-          <a:p>
-            <a:pPr algn="l" indent="0" marL="0">
-              <a:buNone/>
-            </a:pPr>
-            <a:r>
-              <a:rPr lang="en-US" sz="1300" dirty="0">
-                <a:solidFill>
-                  <a:srgbClr val="6B7280"/>
-                </a:solidFill>
-              </a:rPr>
-              <a:t>до 50 проверок — продавцу с портфелем товаров</a:t>
-            </a:r>
-            <a:endParaRPr lang="en-US" sz="1300" dirty="0"/>
-          </a:p>
-        </p:txBody>
-      </p:sp>
-      <p:sp>
-        <p:nvSpPr>
-          <p:cNvPr id="9" name="тариф типография"/>
-          <p:cNvSpPr/>
-          <p:nvPr/>
-        </p:nvSpPr>
-        <p:spPr>
-          <a:xfrm>
-            <a:off x="8107680" y="1554480"/>
-            <a:ext cx="3413760" cy="1600200"/>
-          </a:xfrm>
-          <a:prstGeom prst="roundRect">
-            <a:avLst>
-              <a:gd name="adj" fmla="val 4571"/>
-            </a:avLst>
-          </a:prstGeom>
-          <a:solidFill>
-            <a:schemeClr val="bg1"/>
-          </a:solidFill>
-          <a:ln w="12700">
-            <a:solidFill>
-              <a:srgbClr val="D9DDE3"/>
-            </a:solidFill>
-            <a:prstDash val="solid"/>
-          </a:ln>
-          <a:effectLst>
-            <a:outerShdw sx="100000" sy="100000" kx="0" ky="0" algn="bl" rotWithShape="0" blurRad="101600" dist="25400" dir="5400000">
-              <a:srgbClr val="1C1C20">
-                <a:alpha val="8000"/>
-              </a:srgbClr>
-            </a:outerShdw>
-          </a:effectLst>
-        </p:spPr>
-      </p:sp>
-      <p:sp>
-        <p:nvSpPr>
-          <p:cNvPr id="10" name="Text 8"/>
-          <p:cNvSpPr txBox="1"/>
-          <p:nvPr/>
-        </p:nvSpPr>
-        <p:spPr>
-          <a:xfrm>
-            <a:off x="8308848" y="1700784"/>
-            <a:ext cx="3011424" cy="658368"/>
-          </a:xfrm>
-          <a:prstGeom prst="rect">
-            <a:avLst/>
-          </a:prstGeom>
-          <a:noFill/>
-          <a:ln/>
-        </p:spPr>
-        <p:txBody>
-          <a:bodyPr wrap="square" lIns="0" tIns="0" rIns="0" bIns="0" rtlCol="0" anchor="ctr"/>
-          <a:lstStyle/>
-          <a:p>
-            <a:pPr algn="l" indent="0" marL="0">
-              <a:buNone/>
-            </a:pPr>
-            <a:r>
-              <a:rPr lang="en-US" sz="2600" b="1" dirty="0">
-                <a:solidFill>
-                  <a:srgbClr val="990011"/>
-                </a:solidFill>
-              </a:rPr>
-              <a:t>9 900 ₽/мес</a:t>
-            </a:r>
-            <a:endParaRPr lang="en-US" sz="2600" dirty="0"/>
-          </a:p>
-        </p:txBody>
-      </p:sp>
-      <p:sp>
-        <p:nvSpPr>
-          <p:cNvPr id="11" name="Text 9"/>
-          <p:cNvSpPr txBox="1"/>
-          <p:nvPr/>
-        </p:nvSpPr>
-        <p:spPr>
-          <a:xfrm>
-            <a:off x="8308848" y="2423160"/>
-            <a:ext cx="3011424" cy="594360"/>
-          </a:xfrm>
-          <a:prstGeom prst="rect">
-            <a:avLst/>
-          </a:prstGeom>
-          <a:noFill/>
-          <a:ln/>
-        </p:spPr>
-        <p:txBody>
-          <a:bodyPr wrap="square" lIns="0" tIns="0" rIns="0" bIns="0" rtlCol="0" anchor="t"/>
-          <a:lstStyle/>
-          <a:p>
-            <a:pPr algn="l" indent="0" marL="0">
-              <a:buNone/>
-            </a:pPr>
-            <a:r>
-              <a:rPr lang="en-US" sz="1300" dirty="0">
-                <a:solidFill>
-                  <a:srgbClr val="6B7280"/>
-                </a:solidFill>
-              </a:rPr>
-              <a:t>без лимита — типографиям и агентствам</a:t>
-            </a:r>
-            <a:endParaRPr lang="en-US" sz="1300" dirty="0"/>
-          </a:p>
-        </p:txBody>
-      </p:sp>
-      <p:sp>
-        <p:nvSpPr>
-          <p:cNvPr id="12" name="главный клиент"/>
-          <p:cNvSpPr/>
-          <p:nvPr/>
-        </p:nvSpPr>
-        <p:spPr>
-          <a:xfrm>
-            <a:off x="640080" y="3429000"/>
-            <a:ext cx="10881360" cy="1874520"/>
-          </a:xfrm>
-          <a:prstGeom prst="roundRect">
-            <a:avLst>
-              <a:gd name="adj" fmla="val 3902"/>
-            </a:avLst>
-          </a:prstGeom>
-          <a:solidFill>
-            <a:schemeClr val="bg2"/>
-          </a:solidFill>
-          <a:ln w="12700">
-            <a:solidFill>
-              <a:srgbClr val="990011"/>
-            </a:solidFill>
-            <a:prstDash val="solid"/>
-          </a:ln>
-        </p:spPr>
-      </p:sp>
-      <p:sp>
-        <p:nvSpPr>
-          <p:cNvPr id="13" name="Text 11"/>
-          <p:cNvSpPr txBox="1"/>
-          <p:nvPr/>
-        </p:nvSpPr>
-        <p:spPr>
-          <a:xfrm>
-            <a:off x="960120" y="3611880"/>
-            <a:ext cx="10241280" cy="365760"/>
-          </a:xfrm>
-          <a:prstGeom prst="rect">
-            <a:avLst/>
-          </a:prstGeom>
-          <a:noFill/>
-          <a:ln/>
-        </p:spPr>
-        <p:txBody>
-          <a:bodyPr wrap="square" lIns="0" tIns="0" rIns="0" bIns="0" rtlCol="0" anchor="ctr"/>
-          <a:lstStyle/>
-          <a:p>
-            <a:pPr indent="0" marL="0">
-              <a:buNone/>
-            </a:pPr>
-            <a:r>
-              <a:rPr lang="en-US" sz="1800" b="1" dirty="0">
-                <a:solidFill>
-                  <a:schemeClr val="tx2"/>
-                </a:solidFill>
-              </a:rPr>
-              <a:t>Главный клиент — типографии и дизайн-студии, а не продавец-одиночка</a:t>
-            </a:r>
-            <a:endParaRPr lang="en-US" sz="1800" dirty="0"/>
-          </a:p>
-        </p:txBody>
-      </p:sp>
-      <p:sp>
-        <p:nvSpPr>
-          <p:cNvPr id="14" name="Text 12"/>
-          <p:cNvSpPr txBox="1"/>
-          <p:nvPr/>
-        </p:nvSpPr>
-        <p:spPr>
-          <a:xfrm>
-            <a:off x="960120" y="4069080"/>
-            <a:ext cx="10241280" cy="1097280"/>
-          </a:xfrm>
-          <a:prstGeom prst="rect">
-            <a:avLst/>
-          </a:prstGeom>
-          <a:noFill/>
-          <a:ln/>
-        </p:spPr>
-        <p:txBody>
-          <a:bodyPr wrap="square" lIns="0" tIns="0" rIns="0" bIns="0" rtlCol="0" anchor="ctr"/>
-          <a:lstStyle/>
-          <a:p>
-            <a:pPr marL="342900" indent="-342900">
-              <a:spcAft>
-                <a:spcPts val="600"/>
-              </a:spcAft>
-              <a:buSzPct val="100000"/>
-              <a:buChar char="•"/>
-            </a:pPr>
-            <a:r>
-              <a:rPr lang="en-US" sz="1500" dirty="0">
-                <a:solidFill>
-                  <a:schemeClr val="tx1"/>
-                </a:solidFill>
-              </a:rPr>
-              <a:t>У них каждый заказ — новая этикетка: десятки проверок в месяц</a:t>
-            </a:r>
-            <a:endParaRPr lang="en-US" sz="1500" dirty="0"/>
-          </a:p>
-          <a:p>
-            <a:pPr marL="342900" indent="-342900">
-              <a:spcAft>
-                <a:spcPts val="600"/>
-              </a:spcAft>
-              <a:buSzPct val="100000"/>
-              <a:buChar char="•"/>
-            </a:pPr>
-            <a:r>
-              <a:rPr lang="en-US" sz="1500" dirty="0">
-                <a:solidFill>
-                  <a:schemeClr val="tx1"/>
-                </a:solidFill>
-              </a:rPr>
-              <a:t>За испорченный тираж отвечают они, а не заказчик</a:t>
-            </a:r>
-            <a:endParaRPr lang="en-US" sz="1500" dirty="0"/>
-          </a:p>
-          <a:p>
-            <a:pPr marL="342900" indent="-342900">
-              <a:spcAft>
-                <a:spcPts val="600"/>
-              </a:spcAft>
-              <a:buSzPct val="100000"/>
-              <a:buChar char="•"/>
-            </a:pPr>
-            <a:r>
-              <a:rPr lang="en-US" sz="1500" dirty="0">
-                <a:solidFill>
-                  <a:schemeClr val="tx1"/>
-                </a:solidFill>
-              </a:rPr>
-              <a:t>Обзвонил 10 типографий Казани: 7 проверяют макеты вручную, 2 готовы протестировать</a:t>
-            </a:r>
-            <a:endParaRPr lang="en-US" sz="1500" dirty="0"/>
-          </a:p>
-        </p:txBody>
-      </p:sp>
-      <p:sp>
-        <p:nvSpPr>
-          <p:cNvPr id="25" name="Slide Number Placeholder 0"/>
-          <p:cNvSpPr>
-            <a:spLocks noGrp="1"/>
-          </p:cNvSpPr>
-          <p:nvPr>
-            <p:ph type="sldNum" sz="quarter" idx="4294967295"/>
-          </p:nvPr>
-        </p:nvSpPr>
-        <p:spPr>
-          <a:xfrm>
-            <a:off x="11247120" y="6400800"/>
-            <a:ext cx="365760" cy="274320"/>
-          </a:xfrm>
-          <a:prstGeom prst="rect">
-            <a:avLst/>
-          </a:prstGeom>
-          <a:extLst>
-            <a:ext uri="{C572A759-6A51-4108-AA02-DFA0A04FC94B}">
-              <ma14:wrappingTextBoxFlag xmlns:ma14="http://schemas.microsoft.com/office/mac/drawingml/2011/main" val="0"/>
-            </a:ext>
-          </a:extLst>
-        </p:spPr>
-        <p:txBody>
-          <a:bodyPr/>
-          <a:lstStyle>
-            <a:lvl1pPr>
-              <a:defRPr sz="1000">
-                <a:solidFill>
-                  <a:srgbClr val="6B7280"/>
-                </a:solidFill>
-              </a:defRPr>
-            </a:lvl1pPr>
-          </a:lstStyle>
-          <a:p>
-            <a:pPr algn="r"/>
-            <a:fld id="{F7021451-1387-4CA6-816F-3879F97B5CBC}" type="slidenum">
-              <a:rPr b="0" lang="en-US"/>
-              <a:t>8</a:t>
-            </a:fld>
-            <a:endParaRPr lang="en-US"/>
-          </a:p>
-        </p:txBody>
-      </p:sp>
-    </p:spTree>
-  </p:cSld>
-  <p:clrMapOvr>
-    <a:masterClrMapping/>
-  </p:clrMapOvr>
-</p:sld>
-</file>
-
-<file path=ppt/slides/slide9.xml><?xml version="1.0" encoding="utf-8"?>
-<p:sld xmlns:a="http://schemas.openxmlformats.org/drawingml/2006/main" xmlns:r="http://schemas.openxmlformats.org/officeDocument/2006/relationships" xmlns:p="http://schemas.openxmlformats.org/presentationml/2006/main">
-  <p:cSld name="Slide 9">
-    <p:spTree>
-      <p:nvGrpSpPr>
-        <p:cNvPr id="1" name=""/>
-        <p:cNvGrpSpPr/>
-        <p:nvPr/>
-      </p:nvGrpSpPr>
-      <p:grpSpPr>
-        <a:xfrm>
-          <a:off x="0" y="0"/>
-          <a:ext cx="0" cy="0"/>
-          <a:chOff x="0" y="0"/>
-          <a:chExt cx="0" cy="0"/>
-        </a:xfrm>
-      </p:grpSpPr>
-      <p:sp>
-        <p:nvSpPr>
-          <p:cNvPr id="2" name="Text 0"/>
-          <p:cNvSpPr/>
-          <p:nvPr>
-            <p:ph idx="100" type="title" hasCustomPrompt="1"/>
-          </p:nvPr>
-        </p:nvSpPr>
-        <p:spPr>
-          <a:xfrm>
             <a:off x="640080" y="1005840"/>
             <a:ext cx="10881360" cy="914400"/>
           </a:xfrm>
@@ -8007,6 +7639,42 @@
               <a:t>Спасибо. Готов ответить на вопросы</a:t>
             </a:r>
             <a:endParaRPr lang="en-US" sz="1500" dirty="0"/>
+          </a:p>
+        </p:txBody>
+      </p:sp>
+      <p:sp>
+        <p:nvSpPr>
+          <p:cNvPr id="15" name="Text 13"/>
+          <p:cNvSpPr txBox="1"/>
+          <p:nvPr/>
+        </p:nvSpPr>
+        <p:spPr>
+          <a:xfrm>
+            <a:off x="6400800" y="5532120"/>
+            <a:ext cx="5120640" cy="365760"/>
+          </a:xfrm>
+          <a:prstGeom prst="rect">
+            <a:avLst/>
+          </a:prstGeom>
+          <a:noFill/>
+          <a:ln/>
+        </p:spPr>
+        <p:txBody>
+          <a:bodyPr wrap="square" lIns="0" tIns="0" rIns="0" bIns="0" rtlCol="0" anchor="ctr"/>
+          <a:lstStyle/>
+          <a:p>
+            <a:pPr algn="r" indent="0" marL="0">
+              <a:buNone/>
+            </a:pPr>
+            <a:r>
+              <a:rPr lang="en-US" sz="1300" dirty="0">
+                <a:solidFill>
+                  <a:srgbClr val="AEB6C9"/>
+                </a:solidFill>
+              </a:rPr>
+              <a:t>Фазуллин Амир · Лицей-интернат имени Мустафы Онджеля</a:t>
+            </a:r>
+            <a:endParaRPr lang="en-US" sz="1300" dirty="0"/>
           </a:p>
         </p:txBody>
       </p:sp>

--- a/deck/Бирка.pptx
+++ b/deck/Бирка.pptx
@@ -12,10 +12,9 @@
     <p:sldId id="260" r:id="rId6"/>
     <p:sldId id="261" r:id="rId7"/>
     <p:sldId id="262" r:id="rId8"/>
-    <p:sldId id="263" r:id="rId9"/>
   </p:sldIdLst>
   <p:notesMasterIdLst>
-    <p:notesMasterId r:id="rId10"/>
+    <p:notesMasterId r:id="rId9"/>
   </p:notesMasterIdLst>
   <p:sldSz cx="12192000" cy="6858000"/>
   <p:notesSz cx="6858000" cy="12192000"/>
@@ -114,40 +113,35 @@
   <p:extLst>
     <p:ext uri="{521415D9-36F7-43E2-AB2F-B90AF26B5E84}">
       <p14:sectionLst xmlns:p14="http://schemas.microsoft.com/office/powerpoint/2010/main">
-        <p14:section name="Открытие" id="{089cee64-bde0-2421-814f-df9869a0ba3a}">
+        <p14:section name="Открытие" id="{835ad73c-0961-1a12-c676-c0864a973ecf}">
           <p14:sldIdLst>
             <p14:sldId id="256"/>
           </p14:sldIdLst>
         </p14:section>
-        <p14:section name="Проблема" id="{cf90d4b3-2251-718d-9cda-1c4e53141fba}">
+        <p14:section name="Проблема" id="{691adae2-392a-3153-0fea-48b6477b8e83}">
           <p14:sldIdLst>
             <p14:sldId id="257"/>
           </p14:sldIdLst>
         </p14:section>
-        <p14:section name="Исследование" id="{eb54b4ec-4d89-4207-7137-b10bcd110f54}">
+        <p14:section name="Исследование" id="{84d29de3-cefc-33e9-829e-d7555cc08816}">
           <p14:sldIdLst>
             <p14:sldId id="258"/>
           </p14:sldIdLst>
         </p14:section>
-        <p14:section name="Решение" id="{539866f9-80f0-f10b-3ef5-edd4b88e7746}">
+        <p14:section name="Решение" id="{529cab6b-21f5-edda-9e41-aad11283d082}">
           <p14:sldIdLst>
             <p14:sldId id="259"/>
             <p14:sldId id="260"/>
           </p14:sldIdLst>
         </p14:section>
-        <p14:section name="Рынок" id="{3746f8eb-61f6-c64d-f354-4d0ca4add831}">
+        <p14:section name="Рынок" id="{9a07ed66-5b72-5061-346f-e06fb7bae855}">
           <p14:sldIdLst>
             <p14:sldId id="261"/>
           </p14:sldIdLst>
         </p14:section>
-        <p14:section name="Деньги" id="{1f672cce-d249-dda4-13b4-a0c792816e5d}">
+        <p14:section name="Итог" id="{1c092f27-5730-6c42-d218-d9ab055b31f6}">
           <p14:sldIdLst>
             <p14:sldId id="262"/>
-          </p14:sldIdLst>
-        </p14:section>
-        <p14:section name="Итог" id="{d705cfdf-3d8b-f17c-e6a3-b9d19681929d}">
-          <p14:sldIdLst>
-            <p14:sldId id="263"/>
           </p14:sldIdLst>
         </p14:section>
       </p14:sectionLst>
@@ -1341,7 +1335,7 @@
           <a:p>
             <a:r>
               <a:rPr lang="en-US" dirty="0"/>
-              <a:t>Якорь цены: ручная разработка от 16 100 ₽, то есть проверка в 33 раза дешевле. ПОДСТАВИТЬ результаты своего обзвона. Если обзвона не было — эту строку убрать, не выдумывать.</a:t>
+              <a:t>Закончить на планах и поблагодарить. Держать в голове ответы на три вопроса: ответственность за ложное «всё хорошо», точность распознавания, почему продавец заплатит.</a:t>
             </a:r>
             <a:endParaRPr lang="en-US" dirty="0"/>
           </a:p>
@@ -1365,94 +1359,6 @@
             <a:fld id="{F7021451-1387-4CA6-816F-3879F97B5CBC}" type="slidenum">
               <a:rPr lang="en-US"/>
               <a:t>7</a:t>
-            </a:fld>
-            <a:endParaRPr lang="en-US"/>
-          </a:p>
-        </p:txBody>
-      </p:sp>
-    </p:spTree>
-    <p:extLst>
-      <p:ext uri="{BB962C8B-B14F-4D97-AF65-F5344CB8AC3E}">
-        <p14:creationId xmlns:p14="http://schemas.microsoft.com/office/powerpoint/2010/main" val="1024086991"/>
-      </p:ext>
-    </p:extLst>
-  </p:cSld>
-  <p:clrMapOvr>
-    <a:masterClrMapping/>
-  </p:clrMapOvr>
-</p:notes>
-</file>
-
-<file path=ppt/notesSlides/notesSlide8.xml><?xml version="1.0" encoding="utf-8"?>
-<p:notes xmlns:a="http://schemas.openxmlformats.org/drawingml/2006/main" xmlns:r="http://schemas.openxmlformats.org/officeDocument/2006/relationships" xmlns:p="http://schemas.openxmlformats.org/presentationml/2006/main">
-  <p:cSld>
-    <p:spTree>
-      <p:nvGrpSpPr>
-        <p:cNvPr id="1" name=""/>
-        <p:cNvGrpSpPr/>
-        <p:nvPr/>
-      </p:nvGrpSpPr>
-      <p:grpSpPr>
-        <a:xfrm>
-          <a:off x="0" y="0"/>
-          <a:ext cx="0" cy="0"/>
-          <a:chOff x="0" y="0"/>
-          <a:chExt cx="0" cy="0"/>
-        </a:xfrm>
-      </p:grpSpPr>
-      <p:sp>
-        <p:nvSpPr>
-          <p:cNvPr id="2" name="Slide Image Placeholder 1"/>
-          <p:cNvSpPr>
-            <a:spLocks noGrp="1" noRot="1" noChangeAspect="1"/>
-          </p:cNvSpPr>
-          <p:nvPr>
-            <p:ph type="sldImg"/>
-          </p:nvPr>
-        </p:nvSpPr>
-        <p:spPr/>
-      </p:sp>
-      <p:sp>
-        <p:nvSpPr>
-          <p:cNvPr id="3" name="Notes Placeholder 2"/>
-          <p:cNvSpPr>
-            <a:spLocks noGrp="1"/>
-          </p:cNvSpPr>
-          <p:nvPr>
-            <p:ph type="body" idx="1"/>
-          </p:nvPr>
-        </p:nvSpPr>
-        <p:spPr/>
-        <p:txBody>
-          <a:bodyPr/>
-          <a:lstStyle/>
-          <a:p>
-            <a:r>
-              <a:rPr lang="en-US" dirty="0"/>
-              <a:t>Закончить на планах и поблагодарить. Держать в голове ответы на три вопроса: ответственность за ложное «всё хорошо», точность распознавания, почему продавец заплатит.</a:t>
-            </a:r>
-            <a:endParaRPr lang="en-US" dirty="0"/>
-          </a:p>
-        </p:txBody>
-      </p:sp>
-      <p:sp>
-        <p:nvSpPr>
-          <p:cNvPr id="4" name="Slide Number Placeholder 3"/>
-          <p:cNvSpPr>
-            <a:spLocks noGrp="1"/>
-          </p:cNvSpPr>
-          <p:nvPr>
-            <p:ph type="sldNum" sz="quarter" idx="10"/>
-          </p:nvPr>
-        </p:nvSpPr>
-        <p:spPr/>
-        <p:txBody>
-          <a:bodyPr/>
-          <a:lstStyle/>
-          <a:p>
-            <a:fld id="{F7021451-1387-4CA6-816F-3879F97B5CBC}" type="slidenum">
-              <a:rPr lang="en-US"/>
-              <a:t>8</a:t>
             </a:fld>
             <a:endParaRPr lang="en-US"/>
           </a:p>
@@ -6659,8 +6565,8 @@
         </p:nvSpPr>
         <p:spPr>
           <a:xfrm>
-            <a:off x="640080" y="411480"/>
-            <a:ext cx="10881360" cy="822960"/>
+            <a:off x="640080" y="1005840"/>
+            <a:ext cx="10881360" cy="914400"/>
           </a:xfrm>
           <a:prstGeom prst="rect">
             <a:avLst/>
@@ -6676,571 +6582,6 @@
               <a:buNone/>
             </a:pPr>
             <a:r>
-              <a:rPr lang="en-US" sz="3800" b="1" dirty="0">
-                <a:solidFill>
-                  <a:schemeClr val="tx2"/>
-                </a:solidFill>
-              </a:rPr>
-              <a:t>Кто платит и сколько</a:t>
-            </a:r>
-            <a:endParaRPr lang="en-US" sz="3800" dirty="0"/>
-          </a:p>
-        </p:txBody>
-      </p:sp>
-      <p:sp>
-        <p:nvSpPr>
-          <p:cNvPr id="3" name="тариф разовый"/>
-          <p:cNvSpPr/>
-          <p:nvPr/>
-        </p:nvSpPr>
-        <p:spPr>
-          <a:xfrm>
-            <a:off x="640080" y="1554480"/>
-            <a:ext cx="3413760" cy="1600200"/>
-          </a:xfrm>
-          <a:prstGeom prst="roundRect">
-            <a:avLst>
-              <a:gd name="adj" fmla="val 4571"/>
-            </a:avLst>
-          </a:prstGeom>
-          <a:solidFill>
-            <a:schemeClr val="bg1"/>
-          </a:solidFill>
-          <a:ln w="12700">
-            <a:solidFill>
-              <a:srgbClr val="D9DDE3"/>
-            </a:solidFill>
-            <a:prstDash val="solid"/>
-          </a:ln>
-          <a:effectLst>
-            <a:outerShdw sx="100000" sy="100000" kx="0" ky="0" algn="bl" rotWithShape="0" blurRad="101600" dist="25400" dir="5400000">
-              <a:srgbClr val="1C1C20">
-                <a:alpha val="8000"/>
-              </a:srgbClr>
-            </a:outerShdw>
-          </a:effectLst>
-        </p:spPr>
-      </p:sp>
-      <p:sp>
-        <p:nvSpPr>
-          <p:cNvPr id="4" name="Text 2"/>
-          <p:cNvSpPr txBox="1"/>
-          <p:nvPr/>
-        </p:nvSpPr>
-        <p:spPr>
-          <a:xfrm>
-            <a:off x="841248" y="1700784"/>
-            <a:ext cx="3011424" cy="658368"/>
-          </a:xfrm>
-          <a:prstGeom prst="rect">
-            <a:avLst/>
-          </a:prstGeom>
-          <a:noFill/>
-          <a:ln/>
-        </p:spPr>
-        <p:txBody>
-          <a:bodyPr wrap="square" lIns="0" tIns="0" rIns="0" bIns="0" rtlCol="0" anchor="ctr"/>
-          <a:lstStyle/>
-          <a:p>
-            <a:pPr algn="l" indent="0" marL="0">
-              <a:buNone/>
-            </a:pPr>
-            <a:r>
-              <a:rPr lang="en-US" sz="3200" b="1" dirty="0">
-                <a:solidFill>
-                  <a:srgbClr val="2F3C7E"/>
-                </a:solidFill>
-              </a:rPr>
-              <a:t>490 ₽</a:t>
-            </a:r>
-            <a:endParaRPr lang="en-US" sz="3200" dirty="0"/>
-          </a:p>
-        </p:txBody>
-      </p:sp>
-      <p:sp>
-        <p:nvSpPr>
-          <p:cNvPr id="5" name="Text 3"/>
-          <p:cNvSpPr txBox="1"/>
-          <p:nvPr/>
-        </p:nvSpPr>
-        <p:spPr>
-          <a:xfrm>
-            <a:off x="841248" y="2423160"/>
-            <a:ext cx="3011424" cy="594360"/>
-          </a:xfrm>
-          <a:prstGeom prst="rect">
-            <a:avLst/>
-          </a:prstGeom>
-          <a:noFill/>
-          <a:ln/>
-        </p:spPr>
-        <p:txBody>
-          <a:bodyPr wrap="square" lIns="0" tIns="0" rIns="0" bIns="0" rtlCol="0" anchor="t"/>
-          <a:lstStyle/>
-          <a:p>
-            <a:pPr algn="l" indent="0" marL="0">
-              <a:buNone/>
-            </a:pPr>
-            <a:r>
-              <a:rPr lang="en-US" sz="1300" dirty="0">
-                <a:solidFill>
-                  <a:srgbClr val="6B7280"/>
-                </a:solidFill>
-              </a:rPr>
-              <a:t>одна проверка с отчётом в PDF</a:t>
-            </a:r>
-            <a:endParaRPr lang="en-US" sz="1300" dirty="0"/>
-          </a:p>
-        </p:txBody>
-      </p:sp>
-      <p:sp>
-        <p:nvSpPr>
-          <p:cNvPr id="6" name="тариф продавец"/>
-          <p:cNvSpPr/>
-          <p:nvPr/>
-        </p:nvSpPr>
-        <p:spPr>
-          <a:xfrm>
-            <a:off x="4373880" y="1554480"/>
-            <a:ext cx="3413760" cy="1600200"/>
-          </a:xfrm>
-          <a:prstGeom prst="roundRect">
-            <a:avLst>
-              <a:gd name="adj" fmla="val 4571"/>
-            </a:avLst>
-          </a:prstGeom>
-          <a:solidFill>
-            <a:schemeClr val="bg1"/>
-          </a:solidFill>
-          <a:ln w="12700">
-            <a:solidFill>
-              <a:srgbClr val="D9DDE3"/>
-            </a:solidFill>
-            <a:prstDash val="solid"/>
-          </a:ln>
-          <a:effectLst>
-            <a:outerShdw sx="100000" sy="100000" kx="0" ky="0" algn="bl" rotWithShape="0" blurRad="101600" dist="25400" dir="5400000">
-              <a:srgbClr val="1C1C20">
-                <a:alpha val="8000"/>
-              </a:srgbClr>
-            </a:outerShdw>
-          </a:effectLst>
-        </p:spPr>
-      </p:sp>
-      <p:sp>
-        <p:nvSpPr>
-          <p:cNvPr id="7" name="Text 5"/>
-          <p:cNvSpPr txBox="1"/>
-          <p:nvPr/>
-        </p:nvSpPr>
-        <p:spPr>
-          <a:xfrm>
-            <a:off x="4575048" y="1700784"/>
-            <a:ext cx="3011424" cy="658368"/>
-          </a:xfrm>
-          <a:prstGeom prst="rect">
-            <a:avLst/>
-          </a:prstGeom>
-          <a:noFill/>
-          <a:ln/>
-        </p:spPr>
-        <p:txBody>
-          <a:bodyPr wrap="square" lIns="0" tIns="0" rIns="0" bIns="0" rtlCol="0" anchor="ctr"/>
-          <a:lstStyle/>
-          <a:p>
-            <a:pPr algn="l" indent="0" marL="0">
-              <a:buNone/>
-            </a:pPr>
-            <a:r>
-              <a:rPr lang="en-US" sz="2600" b="1" dirty="0">
-                <a:solidFill>
-                  <a:srgbClr val="2F3C7E"/>
-                </a:solidFill>
-              </a:rPr>
-              <a:t>2 900 ₽/мес</a:t>
-            </a:r>
-            <a:endParaRPr lang="en-US" sz="2600" dirty="0"/>
-          </a:p>
-        </p:txBody>
-      </p:sp>
-      <p:sp>
-        <p:nvSpPr>
-          <p:cNvPr id="8" name="Text 6"/>
-          <p:cNvSpPr txBox="1"/>
-          <p:nvPr/>
-        </p:nvSpPr>
-        <p:spPr>
-          <a:xfrm>
-            <a:off x="4575048" y="2423160"/>
-            <a:ext cx="3011424" cy="594360"/>
-          </a:xfrm>
-          <a:prstGeom prst="rect">
-            <a:avLst/>
-          </a:prstGeom>
-          <a:noFill/>
-          <a:ln/>
-        </p:spPr>
-        <p:txBody>
-          <a:bodyPr wrap="square" lIns="0" tIns="0" rIns="0" bIns="0" rtlCol="0" anchor="t"/>
-          <a:lstStyle/>
-          <a:p>
-            <a:pPr algn="l" indent="0" marL="0">
-              <a:buNone/>
-            </a:pPr>
-            <a:r>
-              <a:rPr lang="en-US" sz="1300" dirty="0">
-                <a:solidFill>
-                  <a:srgbClr val="6B7280"/>
-                </a:solidFill>
-              </a:rPr>
-              <a:t>до 50 проверок — продавцу с портфелем товаров</a:t>
-            </a:r>
-            <a:endParaRPr lang="en-US" sz="1300" dirty="0"/>
-          </a:p>
-        </p:txBody>
-      </p:sp>
-      <p:sp>
-        <p:nvSpPr>
-          <p:cNvPr id="9" name="тариф типография"/>
-          <p:cNvSpPr/>
-          <p:nvPr/>
-        </p:nvSpPr>
-        <p:spPr>
-          <a:xfrm>
-            <a:off x="8107680" y="1554480"/>
-            <a:ext cx="3413760" cy="1600200"/>
-          </a:xfrm>
-          <a:prstGeom prst="roundRect">
-            <a:avLst>
-              <a:gd name="adj" fmla="val 4571"/>
-            </a:avLst>
-          </a:prstGeom>
-          <a:solidFill>
-            <a:schemeClr val="bg1"/>
-          </a:solidFill>
-          <a:ln w="12700">
-            <a:solidFill>
-              <a:srgbClr val="D9DDE3"/>
-            </a:solidFill>
-            <a:prstDash val="solid"/>
-          </a:ln>
-          <a:effectLst>
-            <a:outerShdw sx="100000" sy="100000" kx="0" ky="0" algn="bl" rotWithShape="0" blurRad="101600" dist="25400" dir="5400000">
-              <a:srgbClr val="1C1C20">
-                <a:alpha val="8000"/>
-              </a:srgbClr>
-            </a:outerShdw>
-          </a:effectLst>
-        </p:spPr>
-      </p:sp>
-      <p:sp>
-        <p:nvSpPr>
-          <p:cNvPr id="10" name="Text 8"/>
-          <p:cNvSpPr txBox="1"/>
-          <p:nvPr/>
-        </p:nvSpPr>
-        <p:spPr>
-          <a:xfrm>
-            <a:off x="8308848" y="1700784"/>
-            <a:ext cx="3011424" cy="658368"/>
-          </a:xfrm>
-          <a:prstGeom prst="rect">
-            <a:avLst/>
-          </a:prstGeom>
-          <a:noFill/>
-          <a:ln/>
-        </p:spPr>
-        <p:txBody>
-          <a:bodyPr wrap="square" lIns="0" tIns="0" rIns="0" bIns="0" rtlCol="0" anchor="ctr"/>
-          <a:lstStyle/>
-          <a:p>
-            <a:pPr algn="l" indent="0" marL="0">
-              <a:buNone/>
-            </a:pPr>
-            <a:r>
-              <a:rPr lang="en-US" sz="2600" b="1" dirty="0">
-                <a:solidFill>
-                  <a:srgbClr val="990011"/>
-                </a:solidFill>
-              </a:rPr>
-              <a:t>9 900 ₽/мес</a:t>
-            </a:r>
-            <a:endParaRPr lang="en-US" sz="2600" dirty="0"/>
-          </a:p>
-        </p:txBody>
-      </p:sp>
-      <p:sp>
-        <p:nvSpPr>
-          <p:cNvPr id="11" name="Text 9"/>
-          <p:cNvSpPr txBox="1"/>
-          <p:nvPr/>
-        </p:nvSpPr>
-        <p:spPr>
-          <a:xfrm>
-            <a:off x="8308848" y="2423160"/>
-            <a:ext cx="3011424" cy="594360"/>
-          </a:xfrm>
-          <a:prstGeom prst="rect">
-            <a:avLst/>
-          </a:prstGeom>
-          <a:noFill/>
-          <a:ln/>
-        </p:spPr>
-        <p:txBody>
-          <a:bodyPr wrap="square" lIns="0" tIns="0" rIns="0" bIns="0" rtlCol="0" anchor="t"/>
-          <a:lstStyle/>
-          <a:p>
-            <a:pPr algn="l" indent="0" marL="0">
-              <a:buNone/>
-            </a:pPr>
-            <a:r>
-              <a:rPr lang="en-US" sz="1300" dirty="0">
-                <a:solidFill>
-                  <a:srgbClr val="6B7280"/>
-                </a:solidFill>
-              </a:rPr>
-              <a:t>без лимита — типографиям и агентствам</a:t>
-            </a:r>
-            <a:endParaRPr lang="en-US" sz="1300" dirty="0"/>
-          </a:p>
-        </p:txBody>
-      </p:sp>
-      <p:sp>
-        <p:nvSpPr>
-          <p:cNvPr id="12" name="главный клиент"/>
-          <p:cNvSpPr/>
-          <p:nvPr/>
-        </p:nvSpPr>
-        <p:spPr>
-          <a:xfrm>
-            <a:off x="640080" y="3429000"/>
-            <a:ext cx="10881360" cy="1874520"/>
-          </a:xfrm>
-          <a:prstGeom prst="roundRect">
-            <a:avLst>
-              <a:gd name="adj" fmla="val 3902"/>
-            </a:avLst>
-          </a:prstGeom>
-          <a:solidFill>
-            <a:schemeClr val="bg2"/>
-          </a:solidFill>
-          <a:ln w="12700">
-            <a:solidFill>
-              <a:srgbClr val="990011"/>
-            </a:solidFill>
-            <a:prstDash val="solid"/>
-          </a:ln>
-        </p:spPr>
-      </p:sp>
-      <p:sp>
-        <p:nvSpPr>
-          <p:cNvPr id="13" name="Text 11"/>
-          <p:cNvSpPr txBox="1"/>
-          <p:nvPr/>
-        </p:nvSpPr>
-        <p:spPr>
-          <a:xfrm>
-            <a:off x="960120" y="3611880"/>
-            <a:ext cx="10241280" cy="365760"/>
-          </a:xfrm>
-          <a:prstGeom prst="rect">
-            <a:avLst/>
-          </a:prstGeom>
-          <a:noFill/>
-          <a:ln/>
-        </p:spPr>
-        <p:txBody>
-          <a:bodyPr wrap="square" lIns="0" tIns="0" rIns="0" bIns="0" rtlCol="0" anchor="ctr"/>
-          <a:lstStyle/>
-          <a:p>
-            <a:pPr indent="0" marL="0">
-              <a:buNone/>
-            </a:pPr>
-            <a:r>
-              <a:rPr lang="en-US" sz="1800" b="1" dirty="0">
-                <a:solidFill>
-                  <a:schemeClr val="tx2"/>
-                </a:solidFill>
-              </a:rPr>
-              <a:t>Главный клиент — типографии и дизайн-студии, а не продавец-одиночка</a:t>
-            </a:r>
-            <a:endParaRPr lang="en-US" sz="1800" dirty="0"/>
-          </a:p>
-        </p:txBody>
-      </p:sp>
-      <p:sp>
-        <p:nvSpPr>
-          <p:cNvPr id="14" name="Text 12"/>
-          <p:cNvSpPr txBox="1"/>
-          <p:nvPr/>
-        </p:nvSpPr>
-        <p:spPr>
-          <a:xfrm>
-            <a:off x="960120" y="4069080"/>
-            <a:ext cx="10241280" cy="1097280"/>
-          </a:xfrm>
-          <a:prstGeom prst="rect">
-            <a:avLst/>
-          </a:prstGeom>
-          <a:noFill/>
-          <a:ln/>
-        </p:spPr>
-        <p:txBody>
-          <a:bodyPr wrap="square" lIns="0" tIns="0" rIns="0" bIns="0" rtlCol="0" anchor="ctr"/>
-          <a:lstStyle/>
-          <a:p>
-            <a:pPr marL="342900" indent="-342900">
-              <a:spcAft>
-                <a:spcPts val="600"/>
-              </a:spcAft>
-              <a:buSzPct val="100000"/>
-              <a:buChar char="•"/>
-            </a:pPr>
-            <a:r>
-              <a:rPr lang="en-US" sz="1500" dirty="0">
-                <a:solidFill>
-                  <a:schemeClr val="tx1"/>
-                </a:solidFill>
-              </a:rPr>
-              <a:t>У них каждый заказ — новая этикетка: десятки проверок в месяц</a:t>
-            </a:r>
-            <a:endParaRPr lang="en-US" sz="1500" dirty="0"/>
-          </a:p>
-          <a:p>
-            <a:pPr marL="342900" indent="-342900">
-              <a:spcAft>
-                <a:spcPts val="600"/>
-              </a:spcAft>
-              <a:buSzPct val="100000"/>
-              <a:buChar char="•"/>
-            </a:pPr>
-            <a:r>
-              <a:rPr lang="en-US" sz="1500" dirty="0">
-                <a:solidFill>
-                  <a:schemeClr val="tx1"/>
-                </a:solidFill>
-              </a:rPr>
-              <a:t>За испорченный тираж отвечают они, а не заказчик</a:t>
-            </a:r>
-            <a:endParaRPr lang="en-US" sz="1500" dirty="0"/>
-          </a:p>
-          <a:p>
-            <a:pPr marL="342900" indent="-342900">
-              <a:spcAft>
-                <a:spcPts val="600"/>
-              </a:spcAft>
-              <a:buSzPct val="100000"/>
-              <a:buChar char="•"/>
-            </a:pPr>
-            <a:r>
-              <a:rPr lang="en-US" sz="1500" dirty="0">
-                <a:solidFill>
-                  <a:schemeClr val="tx1"/>
-                </a:solidFill>
-              </a:rPr>
-              <a:t>Обзвонил 10 типографий Казани: 7 проверяют макеты вручную, 2 готовы протестировать</a:t>
-            </a:r>
-            <a:endParaRPr lang="en-US" sz="1500" dirty="0"/>
-          </a:p>
-        </p:txBody>
-      </p:sp>
-      <p:sp>
-        <p:nvSpPr>
-          <p:cNvPr id="25" name="Slide Number Placeholder 0"/>
-          <p:cNvSpPr>
-            <a:spLocks noGrp="1"/>
-          </p:cNvSpPr>
-          <p:nvPr>
-            <p:ph type="sldNum" sz="quarter" idx="4294967295"/>
-          </p:nvPr>
-        </p:nvSpPr>
-        <p:spPr>
-          <a:xfrm>
-            <a:off x="11247120" y="6400800"/>
-            <a:ext cx="365760" cy="274320"/>
-          </a:xfrm>
-          <a:prstGeom prst="rect">
-            <a:avLst/>
-          </a:prstGeom>
-          <a:extLst>
-            <a:ext uri="{C572A759-6A51-4108-AA02-DFA0A04FC94B}">
-              <ma14:wrappingTextBoxFlag xmlns:ma14="http://schemas.microsoft.com/office/mac/drawingml/2011/main" val="0"/>
-            </a:ext>
-          </a:extLst>
-        </p:spPr>
-        <p:txBody>
-          <a:bodyPr/>
-          <a:lstStyle>
-            <a:lvl1pPr>
-              <a:defRPr sz="1000">
-                <a:solidFill>
-                  <a:srgbClr val="6B7280"/>
-                </a:solidFill>
-              </a:defRPr>
-            </a:lvl1pPr>
-          </a:lstStyle>
-          <a:p>
-            <a:pPr algn="r"/>
-            <a:fld id="{F7021451-1387-4CA6-816F-3879F97B5CBC}" type="slidenum">
-              <a:rPr b="0" lang="en-US"/>
-              <a:t>7</a:t>
-            </a:fld>
-            <a:endParaRPr lang="en-US"/>
-          </a:p>
-        </p:txBody>
-      </p:sp>
-    </p:spTree>
-  </p:cSld>
-  <p:clrMapOvr>
-    <a:masterClrMapping/>
-  </p:clrMapOvr>
-</p:sld>
-</file>
-
-<file path=ppt/slides/slide8.xml><?xml version="1.0" encoding="utf-8"?>
-<p:sld xmlns:a="http://schemas.openxmlformats.org/drawingml/2006/main" xmlns:r="http://schemas.openxmlformats.org/officeDocument/2006/relationships" xmlns:p="http://schemas.openxmlformats.org/presentationml/2006/main">
-  <p:cSld name="Slide 8">
-    <p:spTree>
-      <p:nvGrpSpPr>
-        <p:cNvPr id="1" name=""/>
-        <p:cNvGrpSpPr/>
-        <p:nvPr/>
-      </p:nvGrpSpPr>
-      <p:grpSpPr>
-        <a:xfrm>
-          <a:off x="0" y="0"/>
-          <a:ext cx="0" cy="0"/>
-          <a:chOff x="0" y="0"/>
-          <a:chExt cx="0" cy="0"/>
-        </a:xfrm>
-      </p:grpSpPr>
-      <p:sp>
-        <p:nvSpPr>
-          <p:cNvPr id="2" name="Text 0"/>
-          <p:cNvSpPr/>
-          <p:nvPr>
-            <p:ph idx="100" type="title" hasCustomPrompt="1"/>
-          </p:nvPr>
-        </p:nvSpPr>
-        <p:spPr>
-          <a:xfrm>
-            <a:off x="640080" y="1005840"/>
-            <a:ext cx="10881360" cy="914400"/>
-          </a:xfrm>
-          <a:prstGeom prst="rect">
-            <a:avLst/>
-          </a:prstGeom>
-          <a:noFill/>
-          <a:ln/>
-        </p:spPr>
-        <p:txBody>
-          <a:bodyPr wrap="square" rtlCol="0"/>
-          <a:lstStyle/>
-          <a:p>
-            <a:pPr algn="l" indent="0" marL="0">
-              <a:buNone/>
-            </a:pPr>
-            <a:r>
               <a:rPr lang="en-US" sz="4000" b="1" dirty="0">
                 <a:solidFill>
                   <a:schemeClr val="bg1"/>
@@ -7260,12 +6601,12 @@
         </p:nvSpPr>
         <p:spPr>
           <a:xfrm>
-            <a:off x="640080" y="2286000"/>
-            <a:ext cx="3413760" cy="1371600"/>
+            <a:off x="640080" y="2148840"/>
+            <a:ext cx="3413760" cy="1463040"/>
           </a:xfrm>
           <a:prstGeom prst="roundRect">
             <a:avLst>
-              <a:gd name="adj" fmla="val 6667"/>
+              <a:gd name="adj" fmla="val 6250"/>
             </a:avLst>
           </a:prstGeom>
           <a:solidFill>
@@ -7282,8 +6623,8 @@
         </p:nvSpPr>
         <p:spPr>
           <a:xfrm>
-            <a:off x="868680" y="2468880"/>
-            <a:ext cx="2956560" cy="365760"/>
+            <a:off x="868680" y="2331720"/>
+            <a:ext cx="2956560" cy="411480"/>
           </a:xfrm>
           <a:prstGeom prst="rect">
             <a:avLst/>
@@ -7292,21 +6633,21 @@
           <a:ln/>
         </p:spPr>
         <p:txBody>
-          <a:bodyPr wrap="square" lIns="0" tIns="0" rIns="0" bIns="0" rtlCol="0" anchor="ctr"/>
+          <a:bodyPr wrap="square" lIns="0" tIns="0" rIns="0" bIns="0" rtlCol="0" anchor="t"/>
           <a:lstStyle/>
           <a:p>
             <a:pPr indent="0" marL="0">
               <a:buNone/>
             </a:pPr>
             <a:r>
-              <a:rPr lang="en-US" sz="1700" b="1" dirty="0">
+              <a:rPr lang="en-US" sz="1600" b="1" dirty="0">
                 <a:solidFill>
                   <a:srgbClr val="FFFFFF"/>
                 </a:solidFill>
               </a:rPr>
               <a:t>Детские товары</a:t>
             </a:r>
-            <a:endParaRPr lang="en-US" sz="1700" dirty="0"/>
+            <a:endParaRPr lang="en-US" sz="1600" dirty="0"/>
           </a:p>
         </p:txBody>
       </p:sp>
@@ -7318,8 +6659,8 @@
         </p:nvSpPr>
         <p:spPr>
           <a:xfrm>
-            <a:off x="868680" y="2834640"/>
-            <a:ext cx="2956560" cy="685800"/>
+            <a:off x="868680" y="2761488"/>
+            <a:ext cx="2956560" cy="731520"/>
           </a:xfrm>
           <a:prstGeom prst="rect">
             <a:avLst/>
@@ -7328,7 +6669,7 @@
           <a:ln/>
         </p:spPr>
         <p:txBody>
-          <a:bodyPr wrap="square" lIns="0" tIns="0" rIns="0" bIns="0" rtlCol="0" anchor="ctr"/>
+          <a:bodyPr wrap="square" lIns="0" tIns="0" rIns="0" bIns="0" rtlCol="0" anchor="t"/>
           <a:lstStyle/>
           <a:p>
             <a:pPr indent="0" marL="0">
@@ -7340,7 +6681,21 @@
                   <a:srgbClr val="C6CDE4"/>
                 </a:solidFill>
               </a:rPr>
-              <a:t>добавить проверку по ТР ТС 007/2011</a:t>
+              <a:t>добавить проверку</a:t>
+            </a:r>
+            <a:endParaRPr lang="en-US" sz="1300" dirty="0"/>
+          </a:p>
+          <a:p>
+            <a:pPr indent="0" marL="0">
+              <a:buNone/>
+            </a:pPr>
+            <a:r>
+              <a:rPr lang="en-US" sz="1300" dirty="0">
+                <a:solidFill>
+                  <a:srgbClr val="C6CDE4"/>
+                </a:solidFill>
+              </a:rPr>
+              <a:t>по ТР ТС 007/2011</a:t>
             </a:r>
             <a:endParaRPr lang="en-US" sz="1300" dirty="0"/>
           </a:p>
@@ -7354,12 +6709,12 @@
         </p:nvSpPr>
         <p:spPr>
           <a:xfrm>
-            <a:off x="4373880" y="2286000"/>
-            <a:ext cx="3413760" cy="1371600"/>
+            <a:off x="4373880" y="2148840"/>
+            <a:ext cx="3413760" cy="1463040"/>
           </a:xfrm>
           <a:prstGeom prst="roundRect">
             <a:avLst>
-              <a:gd name="adj" fmla="val 6667"/>
+              <a:gd name="adj" fmla="val 6250"/>
             </a:avLst>
           </a:prstGeom>
           <a:solidFill>
@@ -7376,8 +6731,8 @@
         </p:nvSpPr>
         <p:spPr>
           <a:xfrm>
-            <a:off x="4602480" y="2468880"/>
-            <a:ext cx="2956560" cy="365760"/>
+            <a:off x="4602480" y="2331720"/>
+            <a:ext cx="2956560" cy="411480"/>
           </a:xfrm>
           <a:prstGeom prst="rect">
             <a:avLst/>
@@ -7386,21 +6741,21 @@
           <a:ln/>
         </p:spPr>
         <p:txBody>
-          <a:bodyPr wrap="square" lIns="0" tIns="0" rIns="0" bIns="0" rtlCol="0" anchor="ctr"/>
+          <a:bodyPr wrap="square" lIns="0" tIns="0" rIns="0" bIns="0" rtlCol="0" anchor="t"/>
           <a:lstStyle/>
           <a:p>
             <a:pPr indent="0" marL="0">
               <a:buNone/>
             </a:pPr>
             <a:r>
-              <a:rPr lang="en-US" sz="1700" b="1" dirty="0">
+              <a:rPr lang="en-US" sz="1600" b="1" dirty="0">
                 <a:solidFill>
                   <a:srgbClr val="FFFFFF"/>
                 </a:solidFill>
               </a:rPr>
               <a:t>Проверка по ссылке</a:t>
             </a:r>
-            <a:endParaRPr lang="en-US" sz="1700" dirty="0"/>
+            <a:endParaRPr lang="en-US" sz="1600" dirty="0"/>
           </a:p>
         </p:txBody>
       </p:sp>
@@ -7412,8 +6767,8 @@
         </p:nvSpPr>
         <p:spPr>
           <a:xfrm>
-            <a:off x="4602480" y="2834640"/>
-            <a:ext cx="2956560" cy="685800"/>
+            <a:off x="4602480" y="2761488"/>
+            <a:ext cx="2956560" cy="731520"/>
           </a:xfrm>
           <a:prstGeom prst="rect">
             <a:avLst/>
@@ -7422,7 +6777,7 @@
           <a:ln/>
         </p:spPr>
         <p:txBody>
-          <a:bodyPr wrap="square" lIns="0" tIns="0" rIns="0" bIns="0" rtlCol="0" anchor="ctr"/>
+          <a:bodyPr wrap="square" lIns="0" tIns="0" rIns="0" bIns="0" rtlCol="0" anchor="t"/>
           <a:lstStyle/>
           <a:p>
             <a:pPr indent="0" marL="0">
@@ -7434,7 +6789,21 @@
                   <a:srgbClr val="C6CDE4"/>
                 </a:solidFill>
               </a:rPr>
-              <a:t>разбор карточки маркетплейса целиком</a:t>
+              <a:t>разбор карточки</a:t>
+            </a:r>
+            <a:endParaRPr lang="en-US" sz="1300" dirty="0"/>
+          </a:p>
+          <a:p>
+            <a:pPr indent="0" marL="0">
+              <a:buNone/>
+            </a:pPr>
+            <a:r>
+              <a:rPr lang="en-US" sz="1300" dirty="0">
+                <a:solidFill>
+                  <a:srgbClr val="C6CDE4"/>
+                </a:solidFill>
+              </a:rPr>
+              <a:t>маркетплейса целиком</a:t>
             </a:r>
             <a:endParaRPr lang="en-US" sz="1300" dirty="0"/>
           </a:p>
@@ -7448,12 +6817,12 @@
         </p:nvSpPr>
         <p:spPr>
           <a:xfrm>
-            <a:off x="8107680" y="2286000"/>
-            <a:ext cx="3413760" cy="1371600"/>
+            <a:off x="8107680" y="2148840"/>
+            <a:ext cx="3413760" cy="1463040"/>
           </a:xfrm>
           <a:prstGeom prst="roundRect">
             <a:avLst>
-              <a:gd name="adj" fmla="val 6667"/>
+              <a:gd name="adj" fmla="val 6250"/>
             </a:avLst>
           </a:prstGeom>
           <a:solidFill>
@@ -7470,8 +6839,8 @@
         </p:nvSpPr>
         <p:spPr>
           <a:xfrm>
-            <a:off x="8336280" y="2468880"/>
-            <a:ext cx="2956560" cy="365760"/>
+            <a:off x="8336280" y="2331720"/>
+            <a:ext cx="2956560" cy="411480"/>
           </a:xfrm>
           <a:prstGeom prst="rect">
             <a:avLst/>
@@ -7480,21 +6849,21 @@
           <a:ln/>
         </p:spPr>
         <p:txBody>
-          <a:bodyPr wrap="square" lIns="0" tIns="0" rIns="0" bIns="0" rtlCol="0" anchor="ctr"/>
+          <a:bodyPr wrap="square" lIns="0" tIns="0" rIns="0" bIns="0" rtlCol="0" anchor="t"/>
           <a:lstStyle/>
           <a:p>
             <a:pPr indent="0" marL="0">
               <a:buNone/>
             </a:pPr>
             <a:r>
-              <a:rPr lang="en-US" sz="1700" b="1" dirty="0">
+              <a:rPr lang="en-US" sz="1600" b="1" dirty="0">
                 <a:solidFill>
                   <a:srgbClr val="FFFFFF"/>
                 </a:solidFill>
               </a:rPr>
               <a:t>Пилот с типографией</a:t>
             </a:r>
-            <a:endParaRPr lang="en-US" sz="1700" dirty="0"/>
+            <a:endParaRPr lang="en-US" sz="1600" dirty="0"/>
           </a:p>
         </p:txBody>
       </p:sp>
@@ -7506,8 +6875,8 @@
         </p:nvSpPr>
         <p:spPr>
           <a:xfrm>
-            <a:off x="8336280" y="2834640"/>
-            <a:ext cx="2956560" cy="685800"/>
+            <a:off x="8336280" y="2761488"/>
+            <a:ext cx="2956560" cy="731520"/>
           </a:xfrm>
           <a:prstGeom prst="rect">
             <a:avLst/>
@@ -7516,7 +6885,7 @@
           <a:ln/>
         </p:spPr>
         <p:txBody>
-          <a:bodyPr wrap="square" lIns="0" tIns="0" rIns="0" bIns="0" rtlCol="0" anchor="ctr"/>
+          <a:bodyPr wrap="square" lIns="0" tIns="0" rIns="0" bIns="0" rtlCol="0" anchor="t"/>
           <a:lstStyle/>
           <a:p>
             <a:pPr indent="0" marL="0">
@@ -7528,7 +6897,21 @@
                   <a:srgbClr val="C6CDE4"/>
                 </a:solidFill>
               </a:rPr>
-              <a:t>первые платящие клиенты в Казани</a:t>
+              <a:t>первые клиенты</a:t>
+            </a:r>
+            <a:endParaRPr lang="en-US" sz="1300" dirty="0"/>
+          </a:p>
+          <a:p>
+            <a:pPr indent="0" marL="0">
+              <a:buNone/>
+            </a:pPr>
+            <a:r>
+              <a:rPr lang="en-US" sz="1300" dirty="0">
+                <a:solidFill>
+                  <a:srgbClr val="C6CDE4"/>
+                </a:solidFill>
+              </a:rPr>
+              <a:t>в Казани</a:t>
             </a:r>
             <a:endParaRPr lang="en-US" sz="1300" dirty="0"/>
           </a:p>
@@ -7542,8 +6925,8 @@
         </p:nvSpPr>
         <p:spPr>
           <a:xfrm>
-            <a:off x="640080" y="3931920"/>
-            <a:ext cx="9052560" cy="731520"/>
+            <a:off x="640080" y="3886200"/>
+            <a:ext cx="10881360" cy="685800"/>
           </a:xfrm>
           <a:prstGeom prst="rect">
             <a:avLst/>
@@ -7552,7 +6935,7 @@
           <a:ln/>
         </p:spPr>
         <p:txBody>
-          <a:bodyPr wrap="square" lIns="0" tIns="0" rIns="0" bIns="0" rtlCol="0" anchor="ctr"/>
+          <a:bodyPr wrap="square" lIns="0" tIns="0" rIns="0" bIns="0" rtlCol="0" anchor="t"/>
           <a:lstStyle/>
           <a:p>
             <a:pPr indent="0" marL="0">
@@ -7578,8 +6961,8 @@
         </p:nvSpPr>
         <p:spPr>
           <a:xfrm>
-            <a:off x="640080" y="5029200"/>
-            <a:ext cx="5486400" cy="457200"/>
+            <a:off x="640080" y="4846320"/>
+            <a:ext cx="6400800" cy="457200"/>
           </a:xfrm>
           <a:prstGeom prst="rect">
             <a:avLst/>
@@ -7614,8 +6997,8 @@
         </p:nvSpPr>
         <p:spPr>
           <a:xfrm>
-            <a:off x="640080" y="5532120"/>
-            <a:ext cx="7315200" cy="365760"/>
+            <a:off x="640080" y="5349240"/>
+            <a:ext cx="6400800" cy="365760"/>
           </a:xfrm>
           <a:prstGeom prst="rect">
             <a:avLst/>
@@ -7650,8 +7033,8 @@
         </p:nvSpPr>
         <p:spPr>
           <a:xfrm>
-            <a:off x="6400800" y="5532120"/>
-            <a:ext cx="5120640" cy="365760"/>
+            <a:off x="640080" y="5806440"/>
+            <a:ext cx="8229600" cy="640080"/>
           </a:xfrm>
           <a:prstGeom prst="rect">
             <a:avLst/>
@@ -7660,19 +7043,33 @@
           <a:ln/>
         </p:spPr>
         <p:txBody>
-          <a:bodyPr wrap="square" lIns="0" tIns="0" rIns="0" bIns="0" rtlCol="0" anchor="ctr"/>
+          <a:bodyPr wrap="square" lIns="0" tIns="0" rIns="0" bIns="0" rtlCol="0" anchor="t"/>
           <a:lstStyle/>
           <a:p>
-            <a:pPr algn="r" indent="0" marL="0">
+            <a:pPr indent="0" marL="0">
               <a:buNone/>
             </a:pPr>
             <a:r>
               <a:rPr lang="en-US" sz="1300" dirty="0">
                 <a:solidFill>
-                  <a:srgbClr val="AEB6C9"/>
+                  <a:srgbClr val="8E97B5"/>
                 </a:solidFill>
               </a:rPr>
-              <a:t>Фазуллин Амир · Лицей-интернат имени Мустафы Онджеля</a:t>
+              <a:t>Фазуллин Амир</a:t>
+            </a:r>
+            <a:endParaRPr lang="en-US" sz="1300" dirty="0"/>
+          </a:p>
+          <a:p>
+            <a:pPr indent="0" marL="0">
+              <a:buNone/>
+            </a:pPr>
+            <a:r>
+              <a:rPr lang="en-US" sz="1300" dirty="0">
+                <a:solidFill>
+                  <a:srgbClr val="8E97B5"/>
+                </a:solidFill>
+              </a:rPr>
+              <a:t>Лицей-интернат имени Мустафы Онджеля</a:t>
             </a:r>
             <a:endParaRPr lang="en-US" sz="1300" dirty="0"/>
           </a:p>

--- a/deck/Бирка.pptx
+++ b/deck/Бирка.pptx
@@ -113,33 +113,33 @@
   <p:extLst>
     <p:ext uri="{521415D9-36F7-43E2-AB2F-B90AF26B5E84}">
       <p14:sectionLst xmlns:p14="http://schemas.microsoft.com/office/powerpoint/2010/main">
-        <p14:section name="Открытие" id="{835ad73c-0961-1a12-c676-c0864a973ecf}">
+        <p14:section name="Открытие" id="{1b52418a-1438-26dc-5ade-0dcbaef9f0b9}">
           <p14:sldIdLst>
             <p14:sldId id="256"/>
           </p14:sldIdLst>
         </p14:section>
-        <p14:section name="Проблема" id="{691adae2-392a-3153-0fea-48b6477b8e83}">
+        <p14:section name="Проблема" id="{290246f5-7e71-86d7-8359-a15fdb9931fd}">
           <p14:sldIdLst>
             <p14:sldId id="257"/>
           </p14:sldIdLst>
         </p14:section>
-        <p14:section name="Исследование" id="{84d29de3-cefc-33e9-829e-d7555cc08816}">
+        <p14:section name="Исследование" id="{3b9f7e3b-458f-72e5-5907-c19ac3b41cd7}">
           <p14:sldIdLst>
             <p14:sldId id="258"/>
           </p14:sldIdLst>
         </p14:section>
-        <p14:section name="Решение" id="{529cab6b-21f5-edda-9e41-aad11283d082}">
+        <p14:section name="Решение" id="{54ea38e1-051b-a12d-bf6e-a142b33c0d9b}">
           <p14:sldIdLst>
             <p14:sldId id="259"/>
             <p14:sldId id="260"/>
           </p14:sldIdLst>
         </p14:section>
-        <p14:section name="Рынок" id="{9a07ed66-5b72-5061-346f-e06fb7bae855}">
+        <p14:section name="Рынок" id="{6c27ec51-958e-dd64-0292-26beaaf97c57}">
           <p14:sldIdLst>
             <p14:sldId id="261"/>
           </p14:sldIdLst>
         </p14:section>
-        <p14:section name="Итог" id="{1c092f27-5730-6c42-d218-d9ab055b31f6}">
+        <p14:section name="Итог" id="{530a84ef-86f8-da32-2f9c-310fa6ec3bc1}">
           <p14:sldIdLst>
             <p14:sldId id="262"/>
           </p14:sldIdLst>
@@ -4288,7 +4288,7 @@
           <a:ln/>
         </p:spPr>
         <p:txBody>
-          <a:bodyPr wrap="square" rtlCol="0"/>
+          <a:bodyPr wrap="square" rtlCol="0" anchor="ctr"/>
           <a:lstStyle/>
           <a:p>
             <a:pPr algn="l" indent="0" marL="0">
@@ -4314,8 +4314,8 @@
         </p:nvSpPr>
         <p:spPr>
           <a:xfrm>
-            <a:off x="640080" y="2011680"/>
-            <a:ext cx="7680960" cy="822960"/>
+            <a:off x="640080" y="2240280"/>
+            <a:ext cx="8686800" cy="822960"/>
           </a:xfrm>
           <a:prstGeom prst="rect">
             <a:avLst/>
@@ -4324,7 +4324,7 @@
           <a:ln/>
         </p:spPr>
         <p:txBody>
-          <a:bodyPr wrap="square" lIns="0" tIns="0" rIns="0" bIns="0" rtlCol="0" anchor="ctr"/>
+          <a:bodyPr wrap="square" lIns="0" tIns="0" rIns="0" bIns="0" rtlCol="0" anchor="t"/>
           <a:lstStyle/>
           <a:p>
             <a:pPr indent="0" marL="0">
@@ -4350,7 +4350,7 @@
         </p:nvSpPr>
         <p:spPr>
           <a:xfrm>
-            <a:off x="640080" y="3108960"/>
+            <a:off x="640080" y="3429000"/>
             <a:ext cx="5120640" cy="914400"/>
           </a:xfrm>
           <a:prstGeom prst="roundRect">
@@ -4363,6 +4363,24 @@
           </a:solidFill>
           <a:ln/>
         </p:spPr>
+        <p:txBody>
+          <a:bodyPr wrap="square" rtlCol="0" anchor="ctr"/>
+          <a:lstStyle/>
+          <a:p>
+            <a:pPr algn="ctr" indent="0" marL="0">
+              <a:buNone/>
+            </a:pPr>
+            <a:r>
+              <a:rPr lang="en-US" sz="2400" b="1" dirty="0">
+                <a:solidFill>
+                  <a:srgbClr val="FFFFFF"/>
+                </a:solidFill>
+              </a:rPr>
+              <a:t>birka.tatnet.app</a:t>
+            </a:r>
+            <a:endParaRPr lang="en-US" sz="2400" dirty="0"/>
+          </a:p>
+        </p:txBody>
       </p:sp>
       <p:sp>
         <p:nvSpPr>
@@ -4372,8 +4390,8 @@
         </p:nvSpPr>
         <p:spPr>
           <a:xfrm>
-            <a:off x="640080" y="3108960"/>
-            <a:ext cx="5120640" cy="914400"/>
+            <a:off x="640080" y="4572000"/>
+            <a:ext cx="8686800" cy="365760"/>
           </a:xfrm>
           <a:prstGeom prst="rect">
             <a:avLst/>
@@ -4382,43 +4400,7 @@
           <a:ln/>
         </p:spPr>
         <p:txBody>
-          <a:bodyPr wrap="square" lIns="0" tIns="0" rIns="0" bIns="0" rtlCol="0" anchor="ctr"/>
-          <a:lstStyle/>
-          <a:p>
-            <a:pPr algn="ctr" indent="0" marL="0">
-              <a:buNone/>
-            </a:pPr>
-            <a:r>
-              <a:rPr lang="en-US" sz="2400" b="1" dirty="0">
-                <a:solidFill>
-                  <a:srgbClr val="FFFFFF"/>
-                </a:solidFill>
-              </a:rPr>
-              <a:t>birka.tatnet.app</a:t>
-            </a:r>
-            <a:endParaRPr lang="en-US" sz="2400" dirty="0"/>
-          </a:p>
-        </p:txBody>
-      </p:sp>
-      <p:sp>
-        <p:nvSpPr>
-          <p:cNvPr id="6" name="Text 4"/>
-          <p:cNvSpPr txBox="1"/>
-          <p:nvPr/>
-        </p:nvSpPr>
-        <p:spPr>
-          <a:xfrm>
-            <a:off x="640080" y="4206240"/>
-            <a:ext cx="5943600" cy="365760"/>
-          </a:xfrm>
-          <a:prstGeom prst="rect">
-            <a:avLst/>
-          </a:prstGeom>
-          <a:noFill/>
-          <a:ln/>
-        </p:spPr>
-        <p:txBody>
-          <a:bodyPr wrap="square" lIns="0" tIns="0" rIns="0" bIns="0" rtlCol="0" anchor="ctr"/>
+          <a:bodyPr wrap="square" lIns="0" tIns="0" rIns="0" bIns="0" rtlCol="0" anchor="t"/>
           <a:lstStyle/>
           <a:p>
             <a:pPr indent="0" marL="0">
@@ -5571,7 +5553,7 @@
                           <a:ea typeface="Calibri" pitchFamily="34" charset="-122"/>
                           <a:cs typeface="Calibri" pitchFamily="34" charset="-120"/>
                         </a:rPr>
-                        <a:t>в подписке</a:t>
+                        <a:t>платно</a:t>
                       </a:r>
                       <a:endParaRPr lang="en-US" sz="1300" dirty="0">
                         <a:latin typeface="Calibri" charset="0"/>
@@ -6575,7 +6557,7 @@
           <a:ln/>
         </p:spPr>
         <p:txBody>
-          <a:bodyPr wrap="square" rtlCol="0"/>
+          <a:bodyPr wrap="square" rtlCol="0" anchor="ctr"/>
           <a:lstStyle/>
           <a:p>
             <a:pPr algn="l" indent="0" marL="0">

--- a/deck/Бирка.pptx
+++ b/deck/Бирка.pptx
@@ -11,10 +11,9 @@
     <p:sldId id="259" r:id="rId5"/>
     <p:sldId id="260" r:id="rId6"/>
     <p:sldId id="261" r:id="rId7"/>
-    <p:sldId id="262" r:id="rId8"/>
   </p:sldIdLst>
   <p:notesMasterIdLst>
-    <p:notesMasterId r:id="rId9"/>
+    <p:notesMasterId r:id="rId8"/>
   </p:notesMasterIdLst>
   <p:sldSz cx="12192000" cy="6858000"/>
   <p:notesSz cx="6858000" cy="12192000"/>
@@ -113,35 +112,30 @@
   <p:extLst>
     <p:ext uri="{521415D9-36F7-43E2-AB2F-B90AF26B5E84}">
       <p14:sectionLst xmlns:p14="http://schemas.microsoft.com/office/powerpoint/2010/main">
-        <p14:section name="Открытие" id="{1b52418a-1438-26dc-5ade-0dcbaef9f0b9}">
+        <p14:section name="Открытие" id="{a779acbb-6f16-c937-b8a5-9b83eea5844e}">
           <p14:sldIdLst>
             <p14:sldId id="256"/>
           </p14:sldIdLst>
         </p14:section>
-        <p14:section name="Проблема" id="{290246f5-7e71-86d7-8359-a15fdb9931fd}">
+        <p14:section name="Проблема" id="{0df62fc8-fe19-8e74-965f-c5940a184f03}">
           <p14:sldIdLst>
             <p14:sldId id="257"/>
           </p14:sldIdLst>
         </p14:section>
-        <p14:section name="Исследование" id="{3b9f7e3b-458f-72e5-5907-c19ac3b41cd7}">
+        <p14:section name="Решение" id="{8e15454b-6080-42eb-d0ce-c50bb0b1a369}">
           <p14:sldIdLst>
             <p14:sldId id="258"/>
+            <p14:sldId id="259"/>
           </p14:sldIdLst>
         </p14:section>
-        <p14:section name="Решение" id="{54ea38e1-051b-a12d-bf6e-a142b33c0d9b}">
+        <p14:section name="Рынок" id="{d00cb19a-576b-75c9-96cc-2d878239d93c}">
           <p14:sldIdLst>
-            <p14:sldId id="259"/>
             <p14:sldId id="260"/>
           </p14:sldIdLst>
         </p14:section>
-        <p14:section name="Рынок" id="{6c27ec51-958e-dd64-0292-26beaaf97c57}">
+        <p14:section name="Итог" id="{4ef2fb38-efb6-4643-15b0-294a0c9c4489}">
           <p14:sldIdLst>
             <p14:sldId id="261"/>
-          </p14:sldIdLst>
-        </p14:section>
-        <p14:section name="Итог" id="{530a84ef-86f8-da32-2f9c-310fa6ec3bc1}">
-          <p14:sldIdLst>
-            <p14:sldId id="262"/>
           </p14:sldIdLst>
         </p14:section>
       </p14:sectionLst>
@@ -151,259 +145,6 @@
     </p:ext>
   </p:extLst>
 </p:presentation>
-</file>
-
-<file path=ppt/charts/chart1.xml><?xml version="1.0" encoding="utf-8"?>
-<c:chartSpace xmlns:c="http://schemas.openxmlformats.org/drawingml/2006/chart" xmlns:a="http://schemas.openxmlformats.org/drawingml/2006/main" xmlns:r="http://schemas.openxmlformats.org/officeDocument/2006/relationships">
-  <c:date1904 val="0"/>
-  <c:roundedCorners val="1"/>
-  <c:chart>
-    <c:autoTitleDeleted val="1"/>
-    <c:plotArea>
-      <c:layout/>
-      <c:barChart>
-        <c:barDir val="bar"/>
-        <c:grouping val="clustered"/>
-        <c:varyColors val="0"/>
-        <c:ser>
-          <c:idx val="0"/>
-          <c:order val="0"/>
-          <c:tx>
-            <c:strRef>
-              <c:f>Sheet1!$B$1</c:f>
-              <c:strCache>
-                <c:ptCount val="1"/>
-                <c:pt idx="0">
-                  <c:v>Карточек из 30</c:v>
-                </c:pt>
-              </c:strCache>
-            </c:strRef>
-          </c:tx>
-          <c:spPr>
-            <a:solidFill>
-              <a:srgbClr val="990011"/>
-            </a:solidFill>
-            <a:effectLst/>
-          </c:spPr>
-          <c:invertIfNegative val="0"/>
-          <c:dLbls>
-            <c:numFmt formatCode="#,##0" sourceLinked="0"/>
-            <c:txPr>
-              <a:bodyPr/>
-              <a:lstStyle/>
-              <a:p>
-                <a:pPr>
-                  <a:defRPr b="0" i="0" strike="noStrike" sz="1300" u="none">
-                    <a:solidFill>
-                      <a:srgbClr val="1C1C20"/>
-                    </a:solidFill>
-                    <a:latin typeface="+mn-lt"/>
-                  </a:defRPr>
-                </a:pPr>
-              </a:p>
-            </c:txPr>
-            <c:showLegendKey val="0"/>
-            <c:showVal val="1"/>
-            <c:showCatName val="0"/>
-            <c:showSerName val="0"/>
-            <c:showPercent val="0"/>
-            <c:showBubbleSize val="0"/>
-            <c:showLeaderLines val="0"/>
-          </c:dLbls>
-          <c:cat>
-            <c:multiLvlStrRef>
-              <c:f>Sheet1!$A$2:$A$6</c:f>
-              <c:multiLvlStrCache>
-                <c:ptCount val="5"/>
-                <c:lvl>
-                  <c:pt idx="0">
-                    <c:v>Всё в порядке</c:v>
-                  </c:pt>
-                  <c:pt idx="1">
-                    <c:v>Нет состава сырья</c:v>
-                  </c:pt>
-                  <c:pt idx="2">
-                    <c:v>Нет юр. адреса</c:v>
-                  </c:pt>
-                  <c:pt idx="3">
-                    <c:v>Нет номера партии</c:v>
-                  </c:pt>
-                  <c:pt idx="4">
-                    <c:v>Нет фото этикетки</c:v>
-                  </c:pt>
-                </c:lvl>
-              </c:multiLvlStrCache>
-            </c:multiLvlStrRef>
-          </c:cat>
-          <c:val>
-            <c:numRef>
-              <c:f>Sheet1!$B$2:$B$6</c:f>
-              <c:numCache>
-                <c:formatCode>General</c:formatCode>
-                <c:ptCount val="5"/>
-                <c:pt idx="0">
-                  <c:v>4</c:v>
-                </c:pt>
-                <c:pt idx="1">
-                  <c:v>6</c:v>
-                </c:pt>
-                <c:pt idx="2">
-                  <c:v>9</c:v>
-                </c:pt>
-                <c:pt idx="3">
-                  <c:v>14</c:v>
-                </c:pt>
-                <c:pt idx="4">
-                  <c:v>11</c:v>
-                </c:pt>
-              </c:numCache>
-            </c:numRef>
-          </c:val>
-        </c:ser>
-        <c:dLbls>
-          <c:numFmt formatCode="#,##0" sourceLinked="0"/>
-          <c:txPr>
-            <a:bodyPr/>
-            <a:lstStyle/>
-            <a:p>
-              <a:pPr>
-                <a:defRPr b="0" i="0" strike="noStrike" sz="1300" u="none">
-                  <a:solidFill>
-                    <a:srgbClr val="1C1C20"/>
-                  </a:solidFill>
-                  <a:latin typeface="+mn-lt"/>
-                </a:defRPr>
-              </a:pPr>
-            </a:p>
-          </c:txPr>
-          <c:showLegendKey val="0"/>
-          <c:showVal val="1"/>
-          <c:showCatName val="0"/>
-          <c:showSerName val="0"/>
-          <c:showPercent val="0"/>
-          <c:showBubbleSize val="0"/>
-          <c:showLeaderLines val="0"/>
-        </c:dLbls>
-        <c:gapWidth val="150"/>
-        <c:overlap val="0"/>
-        <c:axId val="2094734554"/>
-        <c:axId val="2094734552"/>
-        <c:axId val="2094734556"/>
-      </c:barChart>
-      <c:catAx>
-        <c:axId val="2094734554"/>
-        <c:scaling>
-          <c:orientation val="minMax"/>
-        </c:scaling>
-        <c:delete val="0"/>
-        <c:axPos val="l"/>
-        <c:numFmt formatCode="General" sourceLinked="1"/>
-        <c:majorTickMark val="out"/>
-        <c:minorTickMark val="none"/>
-        <c:tickLblPos val="nextTo"/>
-        <c:spPr>
-          <a:ln w="12700" cap="flat">
-            <a:solidFill>
-              <a:srgbClr val="888888"/>
-            </a:solidFill>
-            <a:prstDash val="solid"/>
-            <a:round/>
-          </a:ln>
-        </c:spPr>
-        <c:txPr>
-          <a:bodyPr/>
-          <a:lstStyle/>
-          <a:p>
-            <a:pPr>
-              <a:defRPr sz="1200" b="0" i="0" u="none" strike="noStrike">
-                <a:solidFill>
-                  <a:srgbClr val="1C1C20"/>
-                </a:solidFill>
-                <a:latin typeface="+mn-lt"/>
-              </a:defRPr>
-            </a:pPr>
-            <a:endParaRPr lang="en-US"/>
-          </a:p>
-        </c:txPr>
-        <c:crossAx val="2094734552"/>
-        <c:crosses val="autoZero"/>
-        <c:auto val="1"/>
-        <c:lblAlgn val="ctr"/>
-        <c:noMultiLvlLbl val="1"/>
-      </c:catAx>
-      <c:valAx>
-        <c:axId val="2094734552"/>
-        <c:scaling>
-          <c:orientation val="minMax"/>
-          <c:max val="30"/>
-        </c:scaling>
-        <c:delete val="0"/>
-        <c:axPos val="b"/>
-        <c:majorGridlines>
-          <c:spPr>
-            <a:ln w="12700" cap="flat">
-              <a:solidFill>
-                <a:srgbClr val="D9DDE3"/>
-              </a:solidFill>
-              <a:prstDash val="solid"/>
-              <a:round/>
-            </a:ln>
-          </c:spPr>
-        </c:majorGridlines>
-        <c:numFmt formatCode="General" sourceLinked="0"/>
-        <c:majorTickMark val="out"/>
-        <c:minorTickMark val="none"/>
-        <c:tickLblPos val="low"/>
-        <c:spPr>
-          <a:ln w="12700" cap="flat">
-            <a:solidFill>
-              <a:srgbClr val="888888"/>
-            </a:solidFill>
-            <a:prstDash val="solid"/>
-            <a:round/>
-          </a:ln>
-        </c:spPr>
-        <c:txPr>
-          <a:bodyPr/>
-          <a:lstStyle/>
-          <a:p>
-            <a:pPr>
-              <a:defRPr sz="1100" b="0" i="0" u="none" strike="noStrike">
-                <a:solidFill>
-                  <a:srgbClr val="6B7280"/>
-                </a:solidFill>
-                <a:latin typeface="+mn-lt"/>
-              </a:defRPr>
-            </a:pPr>
-            <a:endParaRPr lang="en-US"/>
-          </a:p>
-        </c:txPr>
-        <c:crossAx val="2094734554"/>
-        <c:crosses val="autoZero"/>
-        <c:crossBetween val="between"/>
-      </c:valAx>
-      <c:spPr>
-        <a:noFill/>
-        <a:ln>
-          <a:noFill/>
-        </a:ln>
-        <a:effectLst/>
-      </c:spPr>
-    </c:plotArea>
-    <c:plotVisOnly val="1"/>
-    <c:dispBlanksAs val="span"/>
-  </c:chart>
-  <c:spPr>
-    <a:noFill/>
-    <a:ln>
-      <a:noFill/>
-    </a:ln>
-    <a:effectLst/>
-  </c:spPr>
-  <c:externalData r:id="rId1">
-    <c:autoUpdate val="0"/>
-  </c:externalData>
-</c:chartSpace>
 </file>
 
 <file path=ppt/notesMasters/notesMaster1.xml><?xml version="1.0" encoding="utf-8"?>
@@ -977,7 +718,7 @@
           <a:p>
             <a:r>
               <a:rPr lang="en-US" dirty="0"/>
-              <a:t>ПОДСТАВИТЬ СВОИ ЦИФРЫ перед защитой: числа на графике и в карточке — из моего аудита 30 карточек, замените на собственные. Подчеркнуть: карточки брал подряд, без отбора, иначе результат нечестный.</a:t>
+              <a:t>Здесь переходим к живой демонстрации: попросить у жюри любой товар в упаковке и проверить его. Если сеть подведёт — показать заранее сохранённые скриншоты.</a:t>
             </a:r>
             <a:endParaRPr lang="en-US" dirty="0"/>
           </a:p>
@@ -1065,7 +806,13 @@
           <a:p>
             <a:r>
               <a:rPr lang="en-US" dirty="0"/>
-              <a:t>Здесь переходим к живой демонстрации: попросить у жюри любой товар в упаковке и проверить его. Если сеть подведёт — показать заранее сохранённые скриншоты.</a:t>
+              <a:t>Сайт открыть ЗАРАНЕЕ и не закрывать вкладку. Держать под рукой скриншоты отчётов и текст этикетки в заметках телефона — на случай сбоя сети.
+ОТВЕТЫ НА ВОПРОСЫ ПОСЛЕ ДЕМОНСТРАЦИИ (говорить, если спросят):
+• Проверка предварительная, она не заменяет декларирование соответствия.
+• Высоту шрифта по фотографии не измеряем — приложение задаёт вопрос пользователю.
+• Точность: сверил 5 этикеток вручную, совпадение 94,5 процента. Хуже всего распознаётся дата, выбитая на упаковке, а не напечатанная. Поэтому есть ручной ввод текста.
+• Выделение аллергенов полужирным — рекомендация для читаемости, а не требование регламента.
+• Если фото нечитаемое, сервис честно говорит об этом и предлагает ввести текст вручную.</a:t>
             </a:r>
             <a:endParaRPr lang="en-US" dirty="0"/>
           </a:p>
@@ -1153,13 +900,7 @@
           <a:p>
             <a:r>
               <a:rPr lang="en-US" dirty="0"/>
-              <a:t>Сайт открыть ЗАРАНЕЕ и не закрывать вкладку. Держать под рукой скриншоты отчётов и текст этикетки в заметках телефона — на случай сбоя сети.
-ОТВЕТЫ НА ВОПРОСЫ ПОСЛЕ ДЕМОНСТРАЦИИ (говорить, если спросят):
-• Проверка предварительная, она не заменяет декларирование соответствия.
-• Высоту шрифта по фотографии не измеряем — приложение задаёт вопрос пользователю.
-• Точность: сверил 5 этикеток вручную, совпадение 94,5 процента. Хуже всего распознаётся дата, выбитая на упаковке, а не напечатанная. Поэтому есть ручной ввод текста.
-• Выделение аллергенов полужирным — рекомендация для читаемости, а не требование регламента.
-• Если фото нечитаемое, сервис честно говорит об этом и предлагает ввести текст вручную.</a:t>
+              <a:t>Это обязательный слайд: жюри оценивает сравнение с аналогами отдельным критерием. Главная мысль — ниша свободна именно по проверке текста, а не кодов.</a:t>
             </a:r>
             <a:endParaRPr lang="en-US" dirty="0"/>
           </a:p>
@@ -1247,7 +988,7 @@
           <a:p>
             <a:r>
               <a:rPr lang="en-US" dirty="0"/>
-              <a:t>Это обязательный слайд: жюри оценивает сравнение с аналогами отдельным критерием. Главная мысль — ниша свободна именно по проверке текста, а не кодов.</a:t>
+              <a:t>Закончить на планах и поблагодарить. Держать в голове ответы на три вопроса: ответственность за ложное «всё хорошо», точность распознавания, почему продавец заплатит.</a:t>
             </a:r>
             <a:endParaRPr lang="en-US" dirty="0"/>
           </a:p>
@@ -1271,94 +1012,6 @@
             <a:fld id="{F7021451-1387-4CA6-816F-3879F97B5CBC}" type="slidenum">
               <a:rPr lang="en-US"/>
               <a:t>6</a:t>
-            </a:fld>
-            <a:endParaRPr lang="en-US"/>
-          </a:p>
-        </p:txBody>
-      </p:sp>
-    </p:spTree>
-    <p:extLst>
-      <p:ext uri="{BB962C8B-B14F-4D97-AF65-F5344CB8AC3E}">
-        <p14:creationId xmlns:p14="http://schemas.microsoft.com/office/powerpoint/2010/main" val="1024086991"/>
-      </p:ext>
-    </p:extLst>
-  </p:cSld>
-  <p:clrMapOvr>
-    <a:masterClrMapping/>
-  </p:clrMapOvr>
-</p:notes>
-</file>
-
-<file path=ppt/notesSlides/notesSlide7.xml><?xml version="1.0" encoding="utf-8"?>
-<p:notes xmlns:a="http://schemas.openxmlformats.org/drawingml/2006/main" xmlns:r="http://schemas.openxmlformats.org/officeDocument/2006/relationships" xmlns:p="http://schemas.openxmlformats.org/presentationml/2006/main">
-  <p:cSld>
-    <p:spTree>
-      <p:nvGrpSpPr>
-        <p:cNvPr id="1" name=""/>
-        <p:cNvGrpSpPr/>
-        <p:nvPr/>
-      </p:nvGrpSpPr>
-      <p:grpSpPr>
-        <a:xfrm>
-          <a:off x="0" y="0"/>
-          <a:ext cx="0" cy="0"/>
-          <a:chOff x="0" y="0"/>
-          <a:chExt cx="0" cy="0"/>
-        </a:xfrm>
-      </p:grpSpPr>
-      <p:sp>
-        <p:nvSpPr>
-          <p:cNvPr id="2" name="Slide Image Placeholder 1"/>
-          <p:cNvSpPr>
-            <a:spLocks noGrp="1" noRot="1" noChangeAspect="1"/>
-          </p:cNvSpPr>
-          <p:nvPr>
-            <p:ph type="sldImg"/>
-          </p:nvPr>
-        </p:nvSpPr>
-        <p:spPr/>
-      </p:sp>
-      <p:sp>
-        <p:nvSpPr>
-          <p:cNvPr id="3" name="Notes Placeholder 2"/>
-          <p:cNvSpPr>
-            <a:spLocks noGrp="1"/>
-          </p:cNvSpPr>
-          <p:nvPr>
-            <p:ph type="body" idx="1"/>
-          </p:nvPr>
-        </p:nvSpPr>
-        <p:spPr/>
-        <p:txBody>
-          <a:bodyPr/>
-          <a:lstStyle/>
-          <a:p>
-            <a:r>
-              <a:rPr lang="en-US" dirty="0"/>
-              <a:t>Закончить на планах и поблагодарить. Держать в голове ответы на три вопроса: ответственность за ложное «всё хорошо», точность распознавания, почему продавец заплатит.</a:t>
-            </a:r>
-            <a:endParaRPr lang="en-US" dirty="0"/>
-          </a:p>
-        </p:txBody>
-      </p:sp>
-      <p:sp>
-        <p:nvSpPr>
-          <p:cNvPr id="4" name="Slide Number Placeholder 3"/>
-          <p:cNvSpPr>
-            <a:spLocks noGrp="1"/>
-          </p:cNvSpPr>
-          <p:nvPr>
-            <p:ph type="sldNum" sz="quarter" idx="10"/>
-          </p:nvPr>
-        </p:nvSpPr>
-        <p:spPr/>
-        <p:txBody>
-          <a:bodyPr/>
-          <a:lstStyle/>
-          <a:p>
-            <a:fld id="{F7021451-1387-4CA6-816F-3879F97B5CBC}" type="slidenum">
-              <a:rPr lang="en-US"/>
-              <a:t>7</a:t>
             </a:fld>
             <a:endParaRPr lang="en-US"/>
           </a:p>
@@ -3189,7 +2842,7 @@
                   <a:schemeClr val="tx2"/>
                 </a:solidFill>
               </a:rPr>
-              <a:t>Я проверил 30 карточек сам</a:t>
+              <a:t>Как работает «Бирка»</a:t>
             </a:r>
             <a:endParaRPr lang="en-US" sz="3800" dirty="0"/>
           </a:p>
@@ -3197,14 +2850,70 @@
       </p:sp>
       <p:sp>
         <p:nvSpPr>
-          <p:cNvPr id="3" name="Text 1"/>
+          <p:cNvPr id="3" name="Shape 1"/>
+          <p:cNvSpPr/>
+          <p:nvPr/>
+        </p:nvSpPr>
+        <p:spPr>
+          <a:xfrm>
+            <a:off x="640080" y="1600200"/>
+            <a:ext cx="475488" cy="475488"/>
+          </a:xfrm>
+          <a:prstGeom prst="ellipse">
+            <a:avLst/>
+          </a:prstGeom>
+          <a:solidFill>
+            <a:srgbClr val="2F3C7E"/>
+          </a:solidFill>
+          <a:ln/>
+        </p:spPr>
+      </p:sp>
+      <p:sp>
+        <p:nvSpPr>
+          <p:cNvPr id="4" name="Text 2"/>
           <p:cNvSpPr txBox="1"/>
           <p:nvPr/>
         </p:nvSpPr>
         <p:spPr>
           <a:xfrm>
-            <a:off x="640080" y="1325880"/>
-            <a:ext cx="10881360" cy="548640"/>
+            <a:off x="640080" y="1600200"/>
+            <a:ext cx="475488" cy="475488"/>
+          </a:xfrm>
+          <a:prstGeom prst="rect">
+            <a:avLst/>
+          </a:prstGeom>
+          <a:noFill/>
+          <a:ln/>
+        </p:spPr>
+        <p:txBody>
+          <a:bodyPr wrap="square" lIns="0" tIns="0" rIns="0" bIns="0" rtlCol="0" anchor="ctr"/>
+          <a:lstStyle/>
+          <a:p>
+            <a:pPr algn="ctr" indent="0" marL="0">
+              <a:buNone/>
+            </a:pPr>
+            <a:r>
+              <a:rPr lang="en-US" sz="1800" b="1" dirty="0">
+                <a:solidFill>
+                  <a:schemeClr val="bg1"/>
+                </a:solidFill>
+              </a:rPr>
+              <a:t>1</a:t>
+            </a:r>
+            <a:endParaRPr lang="en-US" sz="1800" dirty="0"/>
+          </a:p>
+        </p:txBody>
+      </p:sp>
+      <p:sp>
+        <p:nvSpPr>
+          <p:cNvPr id="5" name="Text 3"/>
+          <p:cNvSpPr txBox="1"/>
+          <p:nvPr/>
+        </p:nvSpPr>
+        <p:spPr>
+          <a:xfrm>
+            <a:off x="1325880" y="1581912"/>
+            <a:ext cx="5166360" cy="310896"/>
           </a:xfrm>
           <a:prstGeom prst="rect">
             <a:avLst/>
@@ -3220,51 +2929,327 @@
               <a:buNone/>
             </a:pPr>
             <a:r>
-              <a:rPr lang="en-US" sz="1500" i="1" dirty="0">
+              <a:rPr lang="en-US" sz="1700" b="1" dirty="0">
+                <a:solidFill>
+                  <a:schemeClr val="tx1"/>
+                </a:solidFill>
+              </a:rPr>
+              <a:t>Сфотографировать этикетку</a:t>
+            </a:r>
+            <a:endParaRPr lang="en-US" sz="1700" dirty="0"/>
+          </a:p>
+        </p:txBody>
+      </p:sp>
+      <p:sp>
+        <p:nvSpPr>
+          <p:cNvPr id="6" name="Text 4"/>
+          <p:cNvSpPr txBox="1"/>
+          <p:nvPr/>
+        </p:nvSpPr>
+        <p:spPr>
+          <a:xfrm>
+            <a:off x="1325880" y="1874520"/>
+            <a:ext cx="5166360" cy="365760"/>
+          </a:xfrm>
+          <a:prstGeom prst="rect">
+            <a:avLst/>
+          </a:prstGeom>
+          <a:noFill/>
+          <a:ln/>
+        </p:spPr>
+        <p:txBody>
+          <a:bodyPr wrap="square" lIns="0" tIns="0" rIns="0" bIns="0" rtlCol="0" anchor="ctr"/>
+          <a:lstStyle/>
+          <a:p>
+            <a:pPr indent="0" marL="0">
+              <a:buNone/>
+            </a:pPr>
+            <a:r>
+              <a:rPr lang="en-US" sz="1300" dirty="0">
                 <a:solidFill>
                   <a:srgbClr val="6B7280"/>
                 </a:solidFill>
               </a:rPr>
-              <a:t>Статистики по нарушениям текста этикеток в открытом доступе нет: Роспотребнадзор публикует данные только по кодам маркировки. Эту цифру я получил сам.</a:t>
-            </a:r>
-            <a:endParaRPr lang="en-US" sz="1500" dirty="0"/>
-          </a:p>
-        </p:txBody>
-      </p:sp>
-      <p:graphicFrame>
-        <p:nvGraphicFramePr>
-          <p:cNvPr id="4" name="результаты аудита" descr=""/>
-          <p:cNvGraphicFramePr/>
-          <p:nvPr/>
-        </p:nvGraphicFramePr>
-        <p:xfrm>
-          <a:off x="640080" y="2011680"/>
-          <a:ext cx="6583680" cy="3291840"/>
-        </p:xfrm>
-        <a:graphic xmlns:a="http://schemas.openxmlformats.org/drawingml/2006/main">
-          <a:graphicData uri="http://schemas.openxmlformats.org/drawingml/2006/chart">
-            <c:chart xmlns:c="http://schemas.openxmlformats.org/drawingml/2006/chart" r:id="rId1"/>
-          </a:graphicData>
-        </a:graphic>
-      </p:graphicFrame>
-      <p:sp>
-        <p:nvSpPr>
-          <p:cNvPr id="5" name="итог аудита"/>
+              <a:t>или вставить текст, если фото нечитаемое</a:t>
+            </a:r>
+            <a:endParaRPr lang="en-US" sz="1300" dirty="0"/>
+          </a:p>
+        </p:txBody>
+      </p:sp>
+      <p:sp>
+        <p:nvSpPr>
+          <p:cNvPr id="7" name="Shape 5"/>
           <p:cNvSpPr/>
           <p:nvPr/>
         </p:nvSpPr>
         <p:spPr>
           <a:xfrm>
-            <a:off x="7589520" y="2011680"/>
-            <a:ext cx="3931920" cy="1508760"/>
+            <a:off x="640080" y="2606040"/>
+            <a:ext cx="475488" cy="475488"/>
+          </a:xfrm>
+          <a:prstGeom prst="ellipse">
+            <a:avLst/>
+          </a:prstGeom>
+          <a:solidFill>
+            <a:srgbClr val="2F3C7E"/>
+          </a:solidFill>
+          <a:ln/>
+        </p:spPr>
+      </p:sp>
+      <p:sp>
+        <p:nvSpPr>
+          <p:cNvPr id="8" name="Text 6"/>
+          <p:cNvSpPr txBox="1"/>
+          <p:nvPr/>
+        </p:nvSpPr>
+        <p:spPr>
+          <a:xfrm>
+            <a:off x="640080" y="2606040"/>
+            <a:ext cx="475488" cy="475488"/>
+          </a:xfrm>
+          <a:prstGeom prst="rect">
+            <a:avLst/>
+          </a:prstGeom>
+          <a:noFill/>
+          <a:ln/>
+        </p:spPr>
+        <p:txBody>
+          <a:bodyPr wrap="square" lIns="0" tIns="0" rIns="0" bIns="0" rtlCol="0" anchor="ctr"/>
+          <a:lstStyle/>
+          <a:p>
+            <a:pPr algn="ctr" indent="0" marL="0">
+              <a:buNone/>
+            </a:pPr>
+            <a:r>
+              <a:rPr lang="en-US" sz="1800" b="1" dirty="0">
+                <a:solidFill>
+                  <a:schemeClr val="bg1"/>
+                </a:solidFill>
+              </a:rPr>
+              <a:t>2</a:t>
+            </a:r>
+            <a:endParaRPr lang="en-US" sz="1800" dirty="0"/>
+          </a:p>
+        </p:txBody>
+      </p:sp>
+      <p:sp>
+        <p:nvSpPr>
+          <p:cNvPr id="9" name="Text 7"/>
+          <p:cNvSpPr txBox="1"/>
+          <p:nvPr/>
+        </p:nvSpPr>
+        <p:spPr>
+          <a:xfrm>
+            <a:off x="1325880" y="2587752"/>
+            <a:ext cx="5166360" cy="310896"/>
+          </a:xfrm>
+          <a:prstGeom prst="rect">
+            <a:avLst/>
+          </a:prstGeom>
+          <a:noFill/>
+          <a:ln/>
+        </p:spPr>
+        <p:txBody>
+          <a:bodyPr wrap="square" lIns="0" tIns="0" rIns="0" bIns="0" rtlCol="0" anchor="ctr"/>
+          <a:lstStyle/>
+          <a:p>
+            <a:pPr indent="0" marL="0">
+              <a:buNone/>
+            </a:pPr>
+            <a:r>
+              <a:rPr lang="en-US" sz="1700" b="1" dirty="0">
+                <a:solidFill>
+                  <a:schemeClr val="tx1"/>
+                </a:solidFill>
+              </a:rPr>
+              <a:t>Сервис сверяет текст с регламентом</a:t>
+            </a:r>
+            <a:endParaRPr lang="en-US" sz="1700" dirty="0"/>
+          </a:p>
+        </p:txBody>
+      </p:sp>
+      <p:sp>
+        <p:nvSpPr>
+          <p:cNvPr id="10" name="Text 8"/>
+          <p:cNvSpPr txBox="1"/>
+          <p:nvPr/>
+        </p:nvSpPr>
+        <p:spPr>
+          <a:xfrm>
+            <a:off x="1325880" y="2880360"/>
+            <a:ext cx="5166360" cy="365760"/>
+          </a:xfrm>
+          <a:prstGeom prst="rect">
+            <a:avLst/>
+          </a:prstGeom>
+          <a:noFill/>
+          <a:ln/>
+        </p:spPr>
+        <p:txBody>
+          <a:bodyPr wrap="square" lIns="0" tIns="0" rIns="0" bIns="0" rtlCol="0" anchor="ctr"/>
+          <a:lstStyle/>
+          <a:p>
+            <a:pPr indent="0" marL="0">
+              <a:buNone/>
+            </a:pPr>
+            <a:r>
+              <a:rPr lang="en-US" sz="1300" dirty="0">
+                <a:solidFill>
+                  <a:srgbClr val="6B7280"/>
+                </a:solidFill>
+              </a:rPr>
+              <a:t>ТР ТС 022/2011 — продукты, 017/2011 — одежда, закон о защите прав потребителей — остальное</a:t>
+            </a:r>
+            <a:endParaRPr lang="en-US" sz="1300" dirty="0"/>
+          </a:p>
+        </p:txBody>
+      </p:sp>
+      <p:sp>
+        <p:nvSpPr>
+          <p:cNvPr id="11" name="Shape 9"/>
+          <p:cNvSpPr/>
+          <p:nvPr/>
+        </p:nvSpPr>
+        <p:spPr>
+          <a:xfrm>
+            <a:off x="640080" y="3886200"/>
+            <a:ext cx="475488" cy="475488"/>
+          </a:xfrm>
+          <a:prstGeom prst="ellipse">
+            <a:avLst/>
+          </a:prstGeom>
+          <a:solidFill>
+            <a:srgbClr val="2F3C7E"/>
+          </a:solidFill>
+          <a:ln/>
+        </p:spPr>
+      </p:sp>
+      <p:sp>
+        <p:nvSpPr>
+          <p:cNvPr id="12" name="Text 10"/>
+          <p:cNvSpPr txBox="1"/>
+          <p:nvPr/>
+        </p:nvSpPr>
+        <p:spPr>
+          <a:xfrm>
+            <a:off x="640080" y="3886200"/>
+            <a:ext cx="475488" cy="475488"/>
+          </a:xfrm>
+          <a:prstGeom prst="rect">
+            <a:avLst/>
+          </a:prstGeom>
+          <a:noFill/>
+          <a:ln/>
+        </p:spPr>
+        <p:txBody>
+          <a:bodyPr wrap="square" lIns="0" tIns="0" rIns="0" bIns="0" rtlCol="0" anchor="ctr"/>
+          <a:lstStyle/>
+          <a:p>
+            <a:pPr algn="ctr" indent="0" marL="0">
+              <a:buNone/>
+            </a:pPr>
+            <a:r>
+              <a:rPr lang="en-US" sz="1800" b="1" dirty="0">
+                <a:solidFill>
+                  <a:schemeClr val="bg1"/>
+                </a:solidFill>
+              </a:rPr>
+              <a:t>3</a:t>
+            </a:r>
+            <a:endParaRPr lang="en-US" sz="1800" dirty="0"/>
+          </a:p>
+        </p:txBody>
+      </p:sp>
+      <p:sp>
+        <p:nvSpPr>
+          <p:cNvPr id="13" name="Text 11"/>
+          <p:cNvSpPr txBox="1"/>
+          <p:nvPr/>
+        </p:nvSpPr>
+        <p:spPr>
+          <a:xfrm>
+            <a:off x="1325880" y="3867912"/>
+            <a:ext cx="5166360" cy="310896"/>
+          </a:xfrm>
+          <a:prstGeom prst="rect">
+            <a:avLst/>
+          </a:prstGeom>
+          <a:noFill/>
+          <a:ln/>
+        </p:spPr>
+        <p:txBody>
+          <a:bodyPr wrap="square" lIns="0" tIns="0" rIns="0" bIns="0" rtlCol="0" anchor="ctr"/>
+          <a:lstStyle/>
+          <a:p>
+            <a:pPr indent="0" marL="0">
+              <a:buNone/>
+            </a:pPr>
+            <a:r>
+              <a:rPr lang="en-US" sz="1700" b="1" dirty="0">
+                <a:solidFill>
+                  <a:schemeClr val="tx1"/>
+                </a:solidFill>
+              </a:rPr>
+              <a:t>Отчёт с номерами пунктов и суммой риска</a:t>
+            </a:r>
+            <a:endParaRPr lang="en-US" sz="1700" dirty="0"/>
+          </a:p>
+        </p:txBody>
+      </p:sp>
+      <p:sp>
+        <p:nvSpPr>
+          <p:cNvPr id="14" name="Text 12"/>
+          <p:cNvSpPr txBox="1"/>
+          <p:nvPr/>
+        </p:nvSpPr>
+        <p:spPr>
+          <a:xfrm>
+            <a:off x="1325880" y="4160520"/>
+            <a:ext cx="5166360" cy="365760"/>
+          </a:xfrm>
+          <a:prstGeom prst="rect">
+            <a:avLst/>
+          </a:prstGeom>
+          <a:noFill/>
+          <a:ln/>
+        </p:spPr>
+        <p:txBody>
+          <a:bodyPr wrap="square" lIns="0" tIns="0" rIns="0" bIns="0" rtlCol="0" anchor="ctr"/>
+          <a:lstStyle/>
+          <a:p>
+            <a:pPr indent="0" marL="0">
+              <a:buNone/>
+            </a:pPr>
+            <a:r>
+              <a:rPr lang="en-US" sz="1300" dirty="0">
+                <a:solidFill>
+                  <a:srgbClr val="6B7280"/>
+                </a:solidFill>
+              </a:rPr>
+              <a:t>и готовый исправленный текст этикетки</a:t>
+            </a:r>
+            <a:endParaRPr lang="en-US" sz="1300" dirty="0"/>
+          </a:p>
+        </p:txBody>
+      </p:sp>
+      <p:sp>
+        <p:nvSpPr>
+          <p:cNvPr id="15" name="пример отчёта"/>
+          <p:cNvSpPr/>
+          <p:nvPr/>
+        </p:nvSpPr>
+        <p:spPr>
+          <a:xfrm>
+            <a:off x="7040880" y="1600200"/>
+            <a:ext cx="4480560" cy="3703320"/>
           </a:xfrm>
           <a:prstGeom prst="roundRect">
             <a:avLst>
-              <a:gd name="adj" fmla="val 4848"/>
+              <a:gd name="adj" fmla="val 2469"/>
             </a:avLst>
           </a:prstGeom>
           <a:solidFill>
-            <a:schemeClr val="bg1"/>
+            <a:schemeClr val="bg2"/>
           </a:solidFill>
           <a:ln w="12700">
             <a:solidFill>
@@ -3272,25 +3257,18 @@
             </a:solidFill>
             <a:prstDash val="solid"/>
           </a:ln>
-          <a:effectLst>
-            <a:outerShdw sx="100000" sy="100000" kx="0" ky="0" algn="bl" rotWithShape="0" blurRad="101600" dist="25400" dir="5400000">
-              <a:srgbClr val="1C1C20">
-                <a:alpha val="8000"/>
-              </a:srgbClr>
-            </a:outerShdw>
-          </a:effectLst>
-        </p:spPr>
-      </p:sp>
-      <p:sp>
-        <p:nvSpPr>
-          <p:cNvPr id="6" name="Text 3"/>
+        </p:spPr>
+      </p:sp>
+      <p:sp>
+        <p:nvSpPr>
+          <p:cNvPr id="16" name="Text 14"/>
           <p:cNvSpPr txBox="1"/>
           <p:nvPr/>
         </p:nvSpPr>
         <p:spPr>
           <a:xfrm>
-            <a:off x="7790688" y="2157984"/>
-            <a:ext cx="3529584" cy="658368"/>
+            <a:off x="7315200" y="1783080"/>
+            <a:ext cx="3840480" cy="274320"/>
           </a:xfrm>
           <a:prstGeom prst="rect">
             <a:avLst/>
@@ -3302,79 +3280,43 @@
           <a:bodyPr wrap="square" lIns="0" tIns="0" rIns="0" bIns="0" rtlCol="0" anchor="ctr"/>
           <a:lstStyle/>
           <a:p>
-            <a:pPr algn="l" indent="0" marL="0">
+            <a:pPr indent="0" marL="0">
               <a:buNone/>
             </a:pPr>
             <a:r>
-              <a:rPr lang="en-US" sz="3200" b="1" dirty="0">
-                <a:solidFill>
-                  <a:srgbClr val="990011"/>
+              <a:rPr lang="en-US" sz="1400" b="1" dirty="0">
+                <a:solidFill>
+                  <a:srgbClr val="6B7280"/>
                 </a:solidFill>
               </a:rPr>
-              <a:t>4 из 30</a:t>
-            </a:r>
-            <a:endParaRPr lang="en-US" sz="3200" dirty="0"/>
-          </a:p>
-        </p:txBody>
-      </p:sp>
-      <p:sp>
-        <p:nvSpPr>
-          <p:cNvPr id="7" name="Text 4"/>
-          <p:cNvSpPr txBox="1"/>
-          <p:nvPr/>
-        </p:nvSpPr>
-        <p:spPr>
-          <a:xfrm>
-            <a:off x="7790688" y="2880360"/>
-            <a:ext cx="3529584" cy="502920"/>
-          </a:xfrm>
-          <a:prstGeom prst="rect">
-            <a:avLst/>
-          </a:prstGeom>
-          <a:noFill/>
-          <a:ln/>
-        </p:spPr>
-        <p:txBody>
-          <a:bodyPr wrap="square" lIns="0" tIns="0" rIns="0" bIns="0" rtlCol="0" anchor="t"/>
-          <a:lstStyle/>
-          <a:p>
-            <a:pPr algn="l" indent="0" marL="0">
-              <a:buNone/>
-            </a:pPr>
-            <a:r>
-              <a:rPr lang="en-US" sz="1300" dirty="0">
-                <a:solidFill>
-                  <a:srgbClr val="6B7280"/>
-                </a:solidFill>
-              </a:rPr>
-              <a:t>карточек содержат все обязательные сведения</a:t>
-            </a:r>
-            <a:endParaRPr lang="en-US" sz="1300" dirty="0"/>
-          </a:p>
-        </p:txBody>
-      </p:sp>
-      <p:sp>
-        <p:nvSpPr>
-          <p:cNvPr id="8" name="как считал"/>
+              <a:t>Пример отчёта</a:t>
+            </a:r>
+            <a:endParaRPr lang="en-US" sz="1400" dirty="0"/>
+          </a:p>
+        </p:txBody>
+      </p:sp>
+      <p:sp>
+        <p:nvSpPr>
+          <p:cNvPr id="17" name="Shape 15"/>
           <p:cNvSpPr/>
           <p:nvPr/>
         </p:nvSpPr>
         <p:spPr>
           <a:xfrm>
-            <a:off x="7589520" y="3703320"/>
-            <a:ext cx="3931920" cy="1600200"/>
+            <a:off x="7315200" y="2148840"/>
+            <a:ext cx="3931920" cy="1051560"/>
           </a:xfrm>
           <a:prstGeom prst="roundRect">
             <a:avLst>
-              <a:gd name="adj" fmla="val 4571"/>
+              <a:gd name="adj" fmla="val 6957"/>
             </a:avLst>
           </a:prstGeom>
           <a:solidFill>
-            <a:schemeClr val="bg1"/>
+            <a:srgbClr val="FDE7E7"/>
           </a:solidFill>
           <a:ln w="12700">
             <a:solidFill>
-              <a:srgbClr val="D9DDE3"/>
+              <a:srgbClr val="990011"/>
             </a:solidFill>
             <a:prstDash val="solid"/>
           </a:ln>
@@ -3382,14 +3324,14 @@
       </p:sp>
       <p:sp>
         <p:nvSpPr>
-          <p:cNvPr id="9" name="Text 6"/>
+          <p:cNvPr id="18" name="Text 16"/>
           <p:cNvSpPr txBox="1"/>
           <p:nvPr/>
         </p:nvSpPr>
         <p:spPr>
           <a:xfrm>
-            <a:off x="7818120" y="3886200"/>
-            <a:ext cx="3200400" cy="274320"/>
+            <a:off x="7498080" y="2240280"/>
+            <a:ext cx="3657600" cy="868680"/>
           </a:xfrm>
           <a:prstGeom prst="rect">
             <a:avLst/>
@@ -3405,50 +3347,142 @@
               <a:buNone/>
             </a:pPr>
             <a:r>
-              <a:rPr lang="en-US" sz="1500" b="1" dirty="0">
-                <a:solidFill>
-                  <a:schemeClr val="tx2"/>
+              <a:rPr lang="en-US" sz="3000" b="1" dirty="0">
+                <a:solidFill>
+                  <a:srgbClr val="990011"/>
                 </a:solidFill>
               </a:rPr>
-              <a:t>Как считал</a:t>
-            </a:r>
-            <a:endParaRPr lang="en-US" sz="1500" dirty="0"/>
-          </a:p>
-        </p:txBody>
-      </p:sp>
-      <p:sp>
-        <p:nvSpPr>
-          <p:cNvPr id="10" name="Text 7"/>
-          <p:cNvSpPr txBox="1"/>
-          <p:nvPr/>
-        </p:nvSpPr>
-        <p:spPr>
-          <a:xfrm>
-            <a:off x="7818120" y="4206240"/>
-            <a:ext cx="3474720" cy="1005840"/>
-          </a:xfrm>
-          <a:prstGeom prst="rect">
-            <a:avLst/>
-          </a:prstGeom>
-          <a:noFill/>
-          <a:ln/>
-        </p:spPr>
-        <p:txBody>
-          <a:bodyPr wrap="square" lIns="0" tIns="0" rIns="0" bIns="0" rtlCol="0" anchor="ctr"/>
-          <a:lstStyle/>
-          <a:p>
+              <a:t>82%
+</a:t>
+            </a:r>
             <a:pPr indent="0" marL="0">
               <a:buNone/>
             </a:pPr>
             <a:r>
-              <a:rPr lang="en-US" sz="1300" dirty="0">
+              <a:rPr lang="en-US" sz="1200" dirty="0">
+                <a:solidFill>
+                  <a:srgbClr val="7A2A2A"/>
+                </a:solidFill>
+              </a:rPr>
+              <a:t>Соответствие · 9 из 11 сведений</a:t>
+            </a:r>
+            <a:endParaRPr lang="en-US" sz="3000" dirty="0"/>
+          </a:p>
+        </p:txBody>
+      </p:sp>
+      <p:sp>
+        <p:nvSpPr>
+          <p:cNvPr id="19" name="Text 17"/>
+          <p:cNvSpPr txBox="1"/>
+          <p:nvPr/>
+        </p:nvSpPr>
+        <p:spPr>
+          <a:xfrm>
+            <a:off x="7315200" y="3337560"/>
+            <a:ext cx="3931920" cy="1188720"/>
+          </a:xfrm>
+          <a:prstGeom prst="rect">
+            <a:avLst/>
+          </a:prstGeom>
+          <a:noFill/>
+          <a:ln/>
+        </p:spPr>
+        <p:txBody>
+          <a:bodyPr wrap="square" lIns="0" tIns="0" rIns="0" bIns="0" rtlCol="0" anchor="ctr"/>
+          <a:lstStyle/>
+          <a:p>
+            <a:pPr marL="342900" indent="-342900">
+              <a:buSzPct val="100000"/>
+              <a:buChar char="•"/>
+            </a:pPr>
+            <a:r>
+              <a:rPr lang="en-US" sz="1300" b="1" dirty="0">
                 <a:solidFill>
                   <a:schemeClr val="tx1"/>
                 </a:solidFill>
               </a:rPr>
-              <a:t>Брал карточки подряд из выдачи, без отбора. Проверял своим сервисом, затем 5 этикеток сверил вручную.</a:t>
+              <a:t>Нет показателей пищевой ценности</a:t>
             </a:r>
             <a:endParaRPr lang="en-US" sz="1300" dirty="0"/>
+          </a:p>
+          <a:p>
+            <a:pPr indent="0" marL="0">
+              <a:buNone/>
+            </a:pPr>
+            <a:r>
+              <a:rPr lang="en-US" sz="1100" dirty="0">
+                <a:solidFill>
+                  <a:srgbClr val="6B7280"/>
+                </a:solidFill>
+              </a:rPr>
+              <a:t>п. 4.1 ТР ТС 022/2011</a:t>
+            </a:r>
+            <a:endParaRPr lang="en-US" sz="1300" dirty="0"/>
+          </a:p>
+          <a:p>
+            <a:pPr marL="342900" indent="-342900">
+              <a:buSzPct val="100000"/>
+              <a:buChar char="•"/>
+            </a:pPr>
+            <a:r>
+              <a:rPr lang="en-US" sz="1300" b="1" dirty="0">
+                <a:solidFill>
+                  <a:schemeClr val="tx1"/>
+                </a:solidFill>
+              </a:rPr>
+              <a:t>Нет сведений о ГМО</a:t>
+            </a:r>
+            <a:endParaRPr lang="en-US" sz="1300" dirty="0"/>
+          </a:p>
+          <a:p>
+            <a:pPr indent="0" marL="0">
+              <a:buNone/>
+            </a:pPr>
+            <a:r>
+              <a:rPr lang="en-US" sz="1100" dirty="0">
+                <a:solidFill>
+                  <a:srgbClr val="6B7280"/>
+                </a:solidFill>
+              </a:rPr>
+              <a:t>п. 4.1 ТР ТС 022/2011</a:t>
+            </a:r>
+            <a:endParaRPr lang="en-US" sz="1300" dirty="0"/>
+          </a:p>
+        </p:txBody>
+      </p:sp>
+      <p:sp>
+        <p:nvSpPr>
+          <p:cNvPr id="20" name="Text 18"/>
+          <p:cNvSpPr txBox="1"/>
+          <p:nvPr/>
+        </p:nvSpPr>
+        <p:spPr>
+          <a:xfrm>
+            <a:off x="7315200" y="4617720"/>
+            <a:ext cx="3931920" cy="548640"/>
+          </a:xfrm>
+          <a:prstGeom prst="rect">
+            <a:avLst/>
+          </a:prstGeom>
+          <a:noFill/>
+          <a:ln/>
+        </p:spPr>
+        <p:txBody>
+          <a:bodyPr wrap="square" lIns="0" tIns="0" rIns="0" bIns="0" rtlCol="0" anchor="ctr"/>
+          <a:lstStyle/>
+          <a:p>
+            <a:pPr indent="0" marL="0">
+              <a:buNone/>
+            </a:pPr>
+            <a:r>
+              <a:rPr lang="en-US" sz="1200" b="1" dirty="0">
+                <a:solidFill>
+                  <a:srgbClr val="990011"/>
+                </a:solidFill>
+              </a:rPr>
+              <a:t>Ориентировочный риск: 100–300 тыс. ₽ (ч. 1 ст. 14.43 КоАП)</a:t>
+            </a:r>
+            <a:endParaRPr lang="en-US" sz="1200" dirty="0"/>
           </a:p>
         </p:txBody>
       </p:sp>
@@ -3532,8 +3566,8 @@
         </p:nvSpPr>
         <p:spPr>
           <a:xfrm>
-            <a:off x="640080" y="411480"/>
-            <a:ext cx="10881360" cy="822960"/>
+            <a:off x="640080" y="1005840"/>
+            <a:ext cx="10881360" cy="914400"/>
           </a:xfrm>
           <a:prstGeom prst="rect">
             <a:avLst/>
@@ -3542,77 +3576,97 @@
           <a:ln/>
         </p:spPr>
         <p:txBody>
-          <a:bodyPr wrap="square" rtlCol="0"/>
+          <a:bodyPr wrap="square" rtlCol="0" anchor="ctr"/>
           <a:lstStyle/>
           <a:p>
             <a:pPr algn="l" indent="0" marL="0">
               <a:buNone/>
             </a:pPr>
             <a:r>
-              <a:rPr lang="en-US" sz="3800" b="1" dirty="0">
-                <a:solidFill>
-                  <a:schemeClr val="tx2"/>
+              <a:rPr lang="en-US" sz="4000" b="1" dirty="0">
+                <a:solidFill>
+                  <a:schemeClr val="bg1"/>
                 </a:solidFill>
               </a:rPr>
-              <a:t>Как работает «Бирка»</a:t>
-            </a:r>
-            <a:endParaRPr lang="en-US" sz="3800" dirty="0"/>
-          </a:p>
-        </p:txBody>
-      </p:sp>
-      <p:sp>
-        <p:nvSpPr>
-          <p:cNvPr id="3" name="Shape 1"/>
+              <a:t>Проверим прямо сейчас</a:t>
+            </a:r>
+            <a:endParaRPr lang="en-US" sz="4000" dirty="0"/>
+          </a:p>
+        </p:txBody>
+      </p:sp>
+      <p:sp>
+        <p:nvSpPr>
+          <p:cNvPr id="3" name="Text 1"/>
+          <p:cNvSpPr txBox="1"/>
+          <p:nvPr/>
+        </p:nvSpPr>
+        <p:spPr>
+          <a:xfrm>
+            <a:off x="640080" y="2240280"/>
+            <a:ext cx="8686800" cy="822960"/>
+          </a:xfrm>
+          <a:prstGeom prst="rect">
+            <a:avLst/>
+          </a:prstGeom>
+          <a:noFill/>
+          <a:ln/>
+        </p:spPr>
+        <p:txBody>
+          <a:bodyPr wrap="square" lIns="0" tIns="0" rIns="0" bIns="0" rtlCol="0" anchor="t"/>
+          <a:lstStyle/>
+          <a:p>
+            <a:pPr indent="0" marL="0">
+              <a:buNone/>
+            </a:pPr>
+            <a:r>
+              <a:rPr lang="en-US" sz="2000" dirty="0">
+                <a:solidFill>
+                  <a:srgbClr val="D9DDE3"/>
+                </a:solidFill>
+              </a:rPr>
+              <a:t>Дайте любой товар в упаковке — через минуту вы увидите, чего не хватает на его этикетке</a:t>
+            </a:r>
+            <a:endParaRPr lang="en-US" sz="2000" dirty="0"/>
+          </a:p>
+        </p:txBody>
+      </p:sp>
+      <p:sp>
+        <p:nvSpPr>
+          <p:cNvPr id="4" name="адрес сайта"/>
           <p:cNvSpPr/>
           <p:nvPr/>
         </p:nvSpPr>
         <p:spPr>
           <a:xfrm>
-            <a:off x="640080" y="1600200"/>
-            <a:ext cx="475488" cy="475488"/>
-          </a:xfrm>
-          <a:prstGeom prst="ellipse">
-            <a:avLst/>
+            <a:off x="640080" y="3429000"/>
+            <a:ext cx="5120640" cy="914400"/>
+          </a:xfrm>
+          <a:prstGeom prst="roundRect">
+            <a:avLst>
+              <a:gd name="adj" fmla="val 12000"/>
+            </a:avLst>
           </a:prstGeom>
           <a:solidFill>
-            <a:srgbClr val="2F3C7E"/>
+            <a:srgbClr val="1F7A4D"/>
           </a:solidFill>
           <a:ln/>
         </p:spPr>
-      </p:sp>
-      <p:sp>
-        <p:nvSpPr>
-          <p:cNvPr id="4" name="Text 2"/>
-          <p:cNvSpPr txBox="1"/>
-          <p:nvPr/>
-        </p:nvSpPr>
-        <p:spPr>
-          <a:xfrm>
-            <a:off x="640080" y="1600200"/>
-            <a:ext cx="475488" cy="475488"/>
-          </a:xfrm>
-          <a:prstGeom prst="rect">
-            <a:avLst/>
-          </a:prstGeom>
-          <a:noFill/>
-          <a:ln/>
-        </p:spPr>
-        <p:txBody>
-          <a:bodyPr wrap="square" lIns="0" tIns="0" rIns="0" bIns="0" rtlCol="0" anchor="ctr"/>
+        <p:txBody>
+          <a:bodyPr wrap="square" rtlCol="0" anchor="ctr"/>
           <a:lstStyle/>
           <a:p>
             <a:pPr algn="ctr" indent="0" marL="0">
               <a:buNone/>
             </a:pPr>
             <a:r>
-              <a:rPr lang="en-US" sz="1800" b="1" dirty="0">
-                <a:solidFill>
-                  <a:schemeClr val="bg1"/>
+              <a:rPr lang="en-US" sz="2400" b="1" dirty="0">
+                <a:solidFill>
+                  <a:srgbClr val="FFFFFF"/>
                 </a:solidFill>
               </a:rPr>
-              <a:t>1</a:t>
-            </a:r>
-            <a:endParaRPr lang="en-US" sz="1800" dirty="0"/>
+              <a:t>birka.tatnet.app</a:t>
+            </a:r>
+            <a:endParaRPr lang="en-US" sz="2400" dirty="0"/>
           </a:p>
         </p:txBody>
       </p:sp>
@@ -3624,8 +3678,8 @@
         </p:nvSpPr>
         <p:spPr>
           <a:xfrm>
-            <a:off x="1325880" y="1581912"/>
-            <a:ext cx="5166360" cy="310896"/>
+            <a:off x="640080" y="4572000"/>
+            <a:ext cx="8686800" cy="365760"/>
           </a:xfrm>
           <a:prstGeom prst="rect">
             <a:avLst/>
@@ -3634,612 +3688,21 @@
           <a:ln/>
         </p:spPr>
         <p:txBody>
-          <a:bodyPr wrap="square" lIns="0" tIns="0" rIns="0" bIns="0" rtlCol="0" anchor="ctr"/>
+          <a:bodyPr wrap="square" lIns="0" tIns="0" rIns="0" bIns="0" rtlCol="0" anchor="t"/>
           <a:lstStyle/>
           <a:p>
             <a:pPr indent="0" marL="0">
               <a:buNone/>
             </a:pPr>
             <a:r>
-              <a:rPr lang="en-US" sz="1700" b="1" dirty="0">
-                <a:solidFill>
-                  <a:schemeClr val="tx1"/>
+              <a:rPr lang="en-US" sz="1400" dirty="0">
+                <a:solidFill>
+                  <a:srgbClr val="AEB6C9"/>
                 </a:solidFill>
               </a:rPr>
-              <a:t>Сфотографировать этикетку</a:t>
-            </a:r>
-            <a:endParaRPr lang="en-US" sz="1700" dirty="0"/>
-          </a:p>
-        </p:txBody>
-      </p:sp>
-      <p:sp>
-        <p:nvSpPr>
-          <p:cNvPr id="6" name="Text 4"/>
-          <p:cNvSpPr txBox="1"/>
-          <p:nvPr/>
-        </p:nvSpPr>
-        <p:spPr>
-          <a:xfrm>
-            <a:off x="1325880" y="1874520"/>
-            <a:ext cx="5166360" cy="365760"/>
-          </a:xfrm>
-          <a:prstGeom prst="rect">
-            <a:avLst/>
-          </a:prstGeom>
-          <a:noFill/>
-          <a:ln/>
-        </p:spPr>
-        <p:txBody>
-          <a:bodyPr wrap="square" lIns="0" tIns="0" rIns="0" bIns="0" rtlCol="0" anchor="ctr"/>
-          <a:lstStyle/>
-          <a:p>
-            <a:pPr indent="0" marL="0">
-              <a:buNone/>
-            </a:pPr>
-            <a:r>
-              <a:rPr lang="en-US" sz="1300" dirty="0">
-                <a:solidFill>
-                  <a:srgbClr val="6B7280"/>
-                </a:solidFill>
-              </a:rPr>
-              <a:t>или вставить текст, если фото нечитаемое</a:t>
-            </a:r>
-            <a:endParaRPr lang="en-US" sz="1300" dirty="0"/>
-          </a:p>
-        </p:txBody>
-      </p:sp>
-      <p:sp>
-        <p:nvSpPr>
-          <p:cNvPr id="7" name="Shape 5"/>
-          <p:cNvSpPr/>
-          <p:nvPr/>
-        </p:nvSpPr>
-        <p:spPr>
-          <a:xfrm>
-            <a:off x="640080" y="2606040"/>
-            <a:ext cx="475488" cy="475488"/>
-          </a:xfrm>
-          <a:prstGeom prst="ellipse">
-            <a:avLst/>
-          </a:prstGeom>
-          <a:solidFill>
-            <a:srgbClr val="2F3C7E"/>
-          </a:solidFill>
-          <a:ln/>
-        </p:spPr>
-      </p:sp>
-      <p:sp>
-        <p:nvSpPr>
-          <p:cNvPr id="8" name="Text 6"/>
-          <p:cNvSpPr txBox="1"/>
-          <p:nvPr/>
-        </p:nvSpPr>
-        <p:spPr>
-          <a:xfrm>
-            <a:off x="640080" y="2606040"/>
-            <a:ext cx="475488" cy="475488"/>
-          </a:xfrm>
-          <a:prstGeom prst="rect">
-            <a:avLst/>
-          </a:prstGeom>
-          <a:noFill/>
-          <a:ln/>
-        </p:spPr>
-        <p:txBody>
-          <a:bodyPr wrap="square" lIns="0" tIns="0" rIns="0" bIns="0" rtlCol="0" anchor="ctr"/>
-          <a:lstStyle/>
-          <a:p>
-            <a:pPr algn="ctr" indent="0" marL="0">
-              <a:buNone/>
-            </a:pPr>
-            <a:r>
-              <a:rPr lang="en-US" sz="1800" b="1" dirty="0">
-                <a:solidFill>
-                  <a:schemeClr val="bg1"/>
-                </a:solidFill>
-              </a:rPr>
-              <a:t>2</a:t>
-            </a:r>
-            <a:endParaRPr lang="en-US" sz="1800" dirty="0"/>
-          </a:p>
-        </p:txBody>
-      </p:sp>
-      <p:sp>
-        <p:nvSpPr>
-          <p:cNvPr id="9" name="Text 7"/>
-          <p:cNvSpPr txBox="1"/>
-          <p:nvPr/>
-        </p:nvSpPr>
-        <p:spPr>
-          <a:xfrm>
-            <a:off x="1325880" y="2587752"/>
-            <a:ext cx="5166360" cy="310896"/>
-          </a:xfrm>
-          <a:prstGeom prst="rect">
-            <a:avLst/>
-          </a:prstGeom>
-          <a:noFill/>
-          <a:ln/>
-        </p:spPr>
-        <p:txBody>
-          <a:bodyPr wrap="square" lIns="0" tIns="0" rIns="0" bIns="0" rtlCol="0" anchor="ctr"/>
-          <a:lstStyle/>
-          <a:p>
-            <a:pPr indent="0" marL="0">
-              <a:buNone/>
-            </a:pPr>
-            <a:r>
-              <a:rPr lang="en-US" sz="1700" b="1" dirty="0">
-                <a:solidFill>
-                  <a:schemeClr val="tx1"/>
-                </a:solidFill>
-              </a:rPr>
-              <a:t>Сервис сверяет текст с регламентом</a:t>
-            </a:r>
-            <a:endParaRPr lang="en-US" sz="1700" dirty="0"/>
-          </a:p>
-        </p:txBody>
-      </p:sp>
-      <p:sp>
-        <p:nvSpPr>
-          <p:cNvPr id="10" name="Text 8"/>
-          <p:cNvSpPr txBox="1"/>
-          <p:nvPr/>
-        </p:nvSpPr>
-        <p:spPr>
-          <a:xfrm>
-            <a:off x="1325880" y="2880360"/>
-            <a:ext cx="5166360" cy="365760"/>
-          </a:xfrm>
-          <a:prstGeom prst="rect">
-            <a:avLst/>
-          </a:prstGeom>
-          <a:noFill/>
-          <a:ln/>
-        </p:spPr>
-        <p:txBody>
-          <a:bodyPr wrap="square" lIns="0" tIns="0" rIns="0" bIns="0" rtlCol="0" anchor="ctr"/>
-          <a:lstStyle/>
-          <a:p>
-            <a:pPr indent="0" marL="0">
-              <a:buNone/>
-            </a:pPr>
-            <a:r>
-              <a:rPr lang="en-US" sz="1300" dirty="0">
-                <a:solidFill>
-                  <a:srgbClr val="6B7280"/>
-                </a:solidFill>
-              </a:rPr>
-              <a:t>ТР ТС 022/2011 — продукты, 017/2011 — одежда, закон о защите прав потребителей — остальное</a:t>
-            </a:r>
-            <a:endParaRPr lang="en-US" sz="1300" dirty="0"/>
-          </a:p>
-        </p:txBody>
-      </p:sp>
-      <p:sp>
-        <p:nvSpPr>
-          <p:cNvPr id="11" name="Shape 9"/>
-          <p:cNvSpPr/>
-          <p:nvPr/>
-        </p:nvSpPr>
-        <p:spPr>
-          <a:xfrm>
-            <a:off x="640080" y="3886200"/>
-            <a:ext cx="475488" cy="475488"/>
-          </a:xfrm>
-          <a:prstGeom prst="ellipse">
-            <a:avLst/>
-          </a:prstGeom>
-          <a:solidFill>
-            <a:srgbClr val="2F3C7E"/>
-          </a:solidFill>
-          <a:ln/>
-        </p:spPr>
-      </p:sp>
-      <p:sp>
-        <p:nvSpPr>
-          <p:cNvPr id="12" name="Text 10"/>
-          <p:cNvSpPr txBox="1"/>
-          <p:nvPr/>
-        </p:nvSpPr>
-        <p:spPr>
-          <a:xfrm>
-            <a:off x="640080" y="3886200"/>
-            <a:ext cx="475488" cy="475488"/>
-          </a:xfrm>
-          <a:prstGeom prst="rect">
-            <a:avLst/>
-          </a:prstGeom>
-          <a:noFill/>
-          <a:ln/>
-        </p:spPr>
-        <p:txBody>
-          <a:bodyPr wrap="square" lIns="0" tIns="0" rIns="0" bIns="0" rtlCol="0" anchor="ctr"/>
-          <a:lstStyle/>
-          <a:p>
-            <a:pPr algn="ctr" indent="0" marL="0">
-              <a:buNone/>
-            </a:pPr>
-            <a:r>
-              <a:rPr lang="en-US" sz="1800" b="1" dirty="0">
-                <a:solidFill>
-                  <a:schemeClr val="bg1"/>
-                </a:solidFill>
-              </a:rPr>
-              <a:t>3</a:t>
-            </a:r>
-            <a:endParaRPr lang="en-US" sz="1800" dirty="0"/>
-          </a:p>
-        </p:txBody>
-      </p:sp>
-      <p:sp>
-        <p:nvSpPr>
-          <p:cNvPr id="13" name="Text 11"/>
-          <p:cNvSpPr txBox="1"/>
-          <p:nvPr/>
-        </p:nvSpPr>
-        <p:spPr>
-          <a:xfrm>
-            <a:off x="1325880" y="3867912"/>
-            <a:ext cx="5166360" cy="310896"/>
-          </a:xfrm>
-          <a:prstGeom prst="rect">
-            <a:avLst/>
-          </a:prstGeom>
-          <a:noFill/>
-          <a:ln/>
-        </p:spPr>
-        <p:txBody>
-          <a:bodyPr wrap="square" lIns="0" tIns="0" rIns="0" bIns="0" rtlCol="0" anchor="ctr"/>
-          <a:lstStyle/>
-          <a:p>
-            <a:pPr indent="0" marL="0">
-              <a:buNone/>
-            </a:pPr>
-            <a:r>
-              <a:rPr lang="en-US" sz="1700" b="1" dirty="0">
-                <a:solidFill>
-                  <a:schemeClr val="tx1"/>
-                </a:solidFill>
-              </a:rPr>
-              <a:t>Отчёт с номерами пунктов и суммой риска</a:t>
-            </a:r>
-            <a:endParaRPr lang="en-US" sz="1700" dirty="0"/>
-          </a:p>
-        </p:txBody>
-      </p:sp>
-      <p:sp>
-        <p:nvSpPr>
-          <p:cNvPr id="14" name="Text 12"/>
-          <p:cNvSpPr txBox="1"/>
-          <p:nvPr/>
-        </p:nvSpPr>
-        <p:spPr>
-          <a:xfrm>
-            <a:off x="1325880" y="4160520"/>
-            <a:ext cx="5166360" cy="365760"/>
-          </a:xfrm>
-          <a:prstGeom prst="rect">
-            <a:avLst/>
-          </a:prstGeom>
-          <a:noFill/>
-          <a:ln/>
-        </p:spPr>
-        <p:txBody>
-          <a:bodyPr wrap="square" lIns="0" tIns="0" rIns="0" bIns="0" rtlCol="0" anchor="ctr"/>
-          <a:lstStyle/>
-          <a:p>
-            <a:pPr indent="0" marL="0">
-              <a:buNone/>
-            </a:pPr>
-            <a:r>
-              <a:rPr lang="en-US" sz="1300" dirty="0">
-                <a:solidFill>
-                  <a:srgbClr val="6B7280"/>
-                </a:solidFill>
-              </a:rPr>
-              <a:t>и готовый исправленный текст этикетки</a:t>
-            </a:r>
-            <a:endParaRPr lang="en-US" sz="1300" dirty="0"/>
-          </a:p>
-        </p:txBody>
-      </p:sp>
-      <p:sp>
-        <p:nvSpPr>
-          <p:cNvPr id="15" name="пример отчёта"/>
-          <p:cNvSpPr/>
-          <p:nvPr/>
-        </p:nvSpPr>
-        <p:spPr>
-          <a:xfrm>
-            <a:off x="7040880" y="1600200"/>
-            <a:ext cx="4480560" cy="3703320"/>
-          </a:xfrm>
-          <a:prstGeom prst="roundRect">
-            <a:avLst>
-              <a:gd name="adj" fmla="val 2469"/>
-            </a:avLst>
-          </a:prstGeom>
-          <a:solidFill>
-            <a:schemeClr val="bg2"/>
-          </a:solidFill>
-          <a:ln w="12700">
-            <a:solidFill>
-              <a:srgbClr val="D9DDE3"/>
-            </a:solidFill>
-            <a:prstDash val="solid"/>
-          </a:ln>
-        </p:spPr>
-      </p:sp>
-      <p:sp>
-        <p:nvSpPr>
-          <p:cNvPr id="16" name="Text 14"/>
-          <p:cNvSpPr txBox="1"/>
-          <p:nvPr/>
-        </p:nvSpPr>
-        <p:spPr>
-          <a:xfrm>
-            <a:off x="7315200" y="1783080"/>
-            <a:ext cx="3840480" cy="274320"/>
-          </a:xfrm>
-          <a:prstGeom prst="rect">
-            <a:avLst/>
-          </a:prstGeom>
-          <a:noFill/>
-          <a:ln/>
-        </p:spPr>
-        <p:txBody>
-          <a:bodyPr wrap="square" lIns="0" tIns="0" rIns="0" bIns="0" rtlCol="0" anchor="ctr"/>
-          <a:lstStyle/>
-          <a:p>
-            <a:pPr indent="0" marL="0">
-              <a:buNone/>
-            </a:pPr>
-            <a:r>
-              <a:rPr lang="en-US" sz="1400" b="1" dirty="0">
-                <a:solidFill>
-                  <a:srgbClr val="6B7280"/>
-                </a:solidFill>
-              </a:rPr>
-              <a:t>Пример отчёта</a:t>
+              <a:t>Работает в браузере телефона. Ничего не нужно устанавливать.</a:t>
             </a:r>
             <a:endParaRPr lang="en-US" sz="1400" dirty="0"/>
-          </a:p>
-        </p:txBody>
-      </p:sp>
-      <p:sp>
-        <p:nvSpPr>
-          <p:cNvPr id="17" name="Shape 15"/>
-          <p:cNvSpPr/>
-          <p:nvPr/>
-        </p:nvSpPr>
-        <p:spPr>
-          <a:xfrm>
-            <a:off x="7315200" y="2148840"/>
-            <a:ext cx="3931920" cy="1051560"/>
-          </a:xfrm>
-          <a:prstGeom prst="roundRect">
-            <a:avLst>
-              <a:gd name="adj" fmla="val 6957"/>
-            </a:avLst>
-          </a:prstGeom>
-          <a:solidFill>
-            <a:srgbClr val="FDE7E7"/>
-          </a:solidFill>
-          <a:ln w="12700">
-            <a:solidFill>
-              <a:srgbClr val="990011"/>
-            </a:solidFill>
-            <a:prstDash val="solid"/>
-          </a:ln>
-        </p:spPr>
-      </p:sp>
-      <p:sp>
-        <p:nvSpPr>
-          <p:cNvPr id="18" name="Text 16"/>
-          <p:cNvSpPr txBox="1"/>
-          <p:nvPr/>
-        </p:nvSpPr>
-        <p:spPr>
-          <a:xfrm>
-            <a:off x="7498080" y="2240280"/>
-            <a:ext cx="3657600" cy="868680"/>
-          </a:xfrm>
-          <a:prstGeom prst="rect">
-            <a:avLst/>
-          </a:prstGeom>
-          <a:noFill/>
-          <a:ln/>
-        </p:spPr>
-        <p:txBody>
-          <a:bodyPr wrap="square" lIns="0" tIns="0" rIns="0" bIns="0" rtlCol="0" anchor="ctr"/>
-          <a:lstStyle/>
-          <a:p>
-            <a:pPr indent="0" marL="0">
-              <a:buNone/>
-            </a:pPr>
-            <a:r>
-              <a:rPr lang="en-US" sz="3000" b="1" dirty="0">
-                <a:solidFill>
-                  <a:srgbClr val="990011"/>
-                </a:solidFill>
-              </a:rPr>
-              <a:t>82%
-</a:t>
-            </a:r>
-            <a:pPr indent="0" marL="0">
-              <a:buNone/>
-            </a:pPr>
-            <a:r>
-              <a:rPr lang="en-US" sz="1200" dirty="0">
-                <a:solidFill>
-                  <a:srgbClr val="7A2A2A"/>
-                </a:solidFill>
-              </a:rPr>
-              <a:t>Соответствие · 9 из 11 сведений</a:t>
-            </a:r>
-            <a:endParaRPr lang="en-US" sz="3000" dirty="0"/>
-          </a:p>
-        </p:txBody>
-      </p:sp>
-      <p:sp>
-        <p:nvSpPr>
-          <p:cNvPr id="19" name="Text 17"/>
-          <p:cNvSpPr txBox="1"/>
-          <p:nvPr/>
-        </p:nvSpPr>
-        <p:spPr>
-          <a:xfrm>
-            <a:off x="7315200" y="3337560"/>
-            <a:ext cx="3931920" cy="1188720"/>
-          </a:xfrm>
-          <a:prstGeom prst="rect">
-            <a:avLst/>
-          </a:prstGeom>
-          <a:noFill/>
-          <a:ln/>
-        </p:spPr>
-        <p:txBody>
-          <a:bodyPr wrap="square" lIns="0" tIns="0" rIns="0" bIns="0" rtlCol="0" anchor="ctr"/>
-          <a:lstStyle/>
-          <a:p>
-            <a:pPr marL="342900" indent="-342900">
-              <a:buSzPct val="100000"/>
-              <a:buChar char="•"/>
-            </a:pPr>
-            <a:r>
-              <a:rPr lang="en-US" sz="1300" b="1" dirty="0">
-                <a:solidFill>
-                  <a:schemeClr val="tx1"/>
-                </a:solidFill>
-              </a:rPr>
-              <a:t>Нет показателей пищевой ценности</a:t>
-            </a:r>
-            <a:endParaRPr lang="en-US" sz="1300" dirty="0"/>
-          </a:p>
-          <a:p>
-            <a:pPr indent="0" marL="0">
-              <a:buNone/>
-            </a:pPr>
-            <a:r>
-              <a:rPr lang="en-US" sz="1100" dirty="0">
-                <a:solidFill>
-                  <a:srgbClr val="6B7280"/>
-                </a:solidFill>
-              </a:rPr>
-              <a:t>п. 4.1 ТР ТС 022/2011</a:t>
-            </a:r>
-            <a:endParaRPr lang="en-US" sz="1300" dirty="0"/>
-          </a:p>
-          <a:p>
-            <a:pPr marL="342900" indent="-342900">
-              <a:buSzPct val="100000"/>
-              <a:buChar char="•"/>
-            </a:pPr>
-            <a:r>
-              <a:rPr lang="en-US" sz="1300" b="1" dirty="0">
-                <a:solidFill>
-                  <a:schemeClr val="tx1"/>
-                </a:solidFill>
-              </a:rPr>
-              <a:t>Нет сведений о ГМО</a:t>
-            </a:r>
-            <a:endParaRPr lang="en-US" sz="1300" dirty="0"/>
-          </a:p>
-          <a:p>
-            <a:pPr indent="0" marL="0">
-              <a:buNone/>
-            </a:pPr>
-            <a:r>
-              <a:rPr lang="en-US" sz="1100" dirty="0">
-                <a:solidFill>
-                  <a:srgbClr val="6B7280"/>
-                </a:solidFill>
-              </a:rPr>
-              <a:t>п. 4.1 ТР ТС 022/2011</a:t>
-            </a:r>
-            <a:endParaRPr lang="en-US" sz="1300" dirty="0"/>
-          </a:p>
-        </p:txBody>
-      </p:sp>
-      <p:sp>
-        <p:nvSpPr>
-          <p:cNvPr id="20" name="Text 18"/>
-          <p:cNvSpPr txBox="1"/>
-          <p:nvPr/>
-        </p:nvSpPr>
-        <p:spPr>
-          <a:xfrm>
-            <a:off x="7315200" y="4617720"/>
-            <a:ext cx="3931920" cy="548640"/>
-          </a:xfrm>
-          <a:prstGeom prst="rect">
-            <a:avLst/>
-          </a:prstGeom>
-          <a:noFill/>
-          <a:ln/>
-        </p:spPr>
-        <p:txBody>
-          <a:bodyPr wrap="square" lIns="0" tIns="0" rIns="0" bIns="0" rtlCol="0" anchor="ctr"/>
-          <a:lstStyle/>
-          <a:p>
-            <a:pPr indent="0" marL="0">
-              <a:buNone/>
-            </a:pPr>
-            <a:r>
-              <a:rPr lang="en-US" sz="1200" b="1" dirty="0">
-                <a:solidFill>
-                  <a:srgbClr val="990011"/>
-                </a:solidFill>
-              </a:rPr>
-              <a:t>Ориентировочный риск: 100–300 тыс. ₽ (ч. 1 ст. 14.43 КоАП)</a:t>
-            </a:r>
-            <a:endParaRPr lang="en-US" sz="1200" dirty="0"/>
-          </a:p>
-        </p:txBody>
-      </p:sp>
-      <p:sp>
-        <p:nvSpPr>
-          <p:cNvPr id="25" name="Slide Number Placeholder 0"/>
-          <p:cNvSpPr>
-            <a:spLocks noGrp="1"/>
-          </p:cNvSpPr>
-          <p:nvPr>
-            <p:ph type="sldNum" sz="quarter" idx="4294967295"/>
-          </p:nvPr>
-        </p:nvSpPr>
-        <p:spPr>
-          <a:xfrm>
-            <a:off x="11247120" y="6400800"/>
-            <a:ext cx="365760" cy="274320"/>
-          </a:xfrm>
-          <a:prstGeom prst="rect">
-            <a:avLst/>
-          </a:prstGeom>
-          <a:extLst>
-            <a:ext uri="{C572A759-6A51-4108-AA02-DFA0A04FC94B}">
-              <ma14:wrappingTextBoxFlag xmlns:ma14="http://schemas.microsoft.com/office/mac/drawingml/2011/main" val="0"/>
-            </a:ext>
-          </a:extLst>
-        </p:spPr>
-        <p:txBody>
-          <a:bodyPr/>
-          <a:lstStyle>
-            <a:lvl1pPr>
-              <a:defRPr sz="1000">
-                <a:solidFill>
-                  <a:srgbClr val="6B7280"/>
-                </a:solidFill>
-              </a:defRPr>
-            </a:lvl1pPr>
-          </a:lstStyle>
-          <a:p>
-            <a:pPr algn="r"/>
-            <a:fld id="{F7021451-1387-4CA6-816F-3879F97B5CBC}" type="slidenum">
-              <a:rPr b="0" lang="en-US"/>
-              <a:t>4</a:t>
-            </a:fld>
-            <a:endParaRPr lang="en-US"/>
           </a:p>
         </p:txBody>
       </p:sp>
@@ -4278,8 +3741,8 @@
         </p:nvSpPr>
         <p:spPr>
           <a:xfrm>
-            <a:off x="640080" y="1005840"/>
-            <a:ext cx="10881360" cy="914400"/>
+            <a:off x="640080" y="411480"/>
+            <a:ext cx="10881360" cy="822960"/>
           </a:xfrm>
           <a:prstGeom prst="rect">
             <a:avLst/>
@@ -4288,188 +3751,13 @@
           <a:ln/>
         </p:spPr>
         <p:txBody>
-          <a:bodyPr wrap="square" rtlCol="0" anchor="ctr"/>
+          <a:bodyPr wrap="square" rtlCol="0"/>
           <a:lstStyle/>
           <a:p>
             <a:pPr algn="l" indent="0" marL="0">
               <a:buNone/>
             </a:pPr>
             <a:r>
-              <a:rPr lang="en-US" sz="4000" b="1" dirty="0">
-                <a:solidFill>
-                  <a:schemeClr val="bg1"/>
-                </a:solidFill>
-              </a:rPr>
-              <a:t>Проверим прямо сейчас</a:t>
-            </a:r>
-            <a:endParaRPr lang="en-US" sz="4000" dirty="0"/>
-          </a:p>
-        </p:txBody>
-      </p:sp>
-      <p:sp>
-        <p:nvSpPr>
-          <p:cNvPr id="3" name="Text 1"/>
-          <p:cNvSpPr txBox="1"/>
-          <p:nvPr/>
-        </p:nvSpPr>
-        <p:spPr>
-          <a:xfrm>
-            <a:off x="640080" y="2240280"/>
-            <a:ext cx="8686800" cy="822960"/>
-          </a:xfrm>
-          <a:prstGeom prst="rect">
-            <a:avLst/>
-          </a:prstGeom>
-          <a:noFill/>
-          <a:ln/>
-        </p:spPr>
-        <p:txBody>
-          <a:bodyPr wrap="square" lIns="0" tIns="0" rIns="0" bIns="0" rtlCol="0" anchor="t"/>
-          <a:lstStyle/>
-          <a:p>
-            <a:pPr indent="0" marL="0">
-              <a:buNone/>
-            </a:pPr>
-            <a:r>
-              <a:rPr lang="en-US" sz="2000" dirty="0">
-                <a:solidFill>
-                  <a:srgbClr val="D9DDE3"/>
-                </a:solidFill>
-              </a:rPr>
-              <a:t>Дайте любой товар в упаковке — через минуту вы увидите, чего не хватает на его этикетке</a:t>
-            </a:r>
-            <a:endParaRPr lang="en-US" sz="2000" dirty="0"/>
-          </a:p>
-        </p:txBody>
-      </p:sp>
-      <p:sp>
-        <p:nvSpPr>
-          <p:cNvPr id="4" name="адрес сайта"/>
-          <p:cNvSpPr/>
-          <p:nvPr/>
-        </p:nvSpPr>
-        <p:spPr>
-          <a:xfrm>
-            <a:off x="640080" y="3429000"/>
-            <a:ext cx="5120640" cy="914400"/>
-          </a:xfrm>
-          <a:prstGeom prst="roundRect">
-            <a:avLst>
-              <a:gd name="adj" fmla="val 12000"/>
-            </a:avLst>
-          </a:prstGeom>
-          <a:solidFill>
-            <a:srgbClr val="1F7A4D"/>
-          </a:solidFill>
-          <a:ln/>
-        </p:spPr>
-        <p:txBody>
-          <a:bodyPr wrap="square" rtlCol="0" anchor="ctr"/>
-          <a:lstStyle/>
-          <a:p>
-            <a:pPr algn="ctr" indent="0" marL="0">
-              <a:buNone/>
-            </a:pPr>
-            <a:r>
-              <a:rPr lang="en-US" sz="2400" b="1" dirty="0">
-                <a:solidFill>
-                  <a:srgbClr val="FFFFFF"/>
-                </a:solidFill>
-              </a:rPr>
-              <a:t>birka.tatnet.app</a:t>
-            </a:r>
-            <a:endParaRPr lang="en-US" sz="2400" dirty="0"/>
-          </a:p>
-        </p:txBody>
-      </p:sp>
-      <p:sp>
-        <p:nvSpPr>
-          <p:cNvPr id="5" name="Text 3"/>
-          <p:cNvSpPr txBox="1"/>
-          <p:nvPr/>
-        </p:nvSpPr>
-        <p:spPr>
-          <a:xfrm>
-            <a:off x="640080" y="4572000"/>
-            <a:ext cx="8686800" cy="365760"/>
-          </a:xfrm>
-          <a:prstGeom prst="rect">
-            <a:avLst/>
-          </a:prstGeom>
-          <a:noFill/>
-          <a:ln/>
-        </p:spPr>
-        <p:txBody>
-          <a:bodyPr wrap="square" lIns="0" tIns="0" rIns="0" bIns="0" rtlCol="0" anchor="t"/>
-          <a:lstStyle/>
-          <a:p>
-            <a:pPr indent="0" marL="0">
-              <a:buNone/>
-            </a:pPr>
-            <a:r>
-              <a:rPr lang="en-US" sz="1400" dirty="0">
-                <a:solidFill>
-                  <a:srgbClr val="AEB6C9"/>
-                </a:solidFill>
-              </a:rPr>
-              <a:t>Работает в браузере телефона. Ничего не нужно устанавливать.</a:t>
-            </a:r>
-            <a:endParaRPr lang="en-US" sz="1400" dirty="0"/>
-          </a:p>
-        </p:txBody>
-      </p:sp>
-    </p:spTree>
-  </p:cSld>
-  <p:clrMapOvr>
-    <a:masterClrMapping/>
-  </p:clrMapOvr>
-</p:sld>
-</file>
-
-<file path=ppt/slides/slide6.xml><?xml version="1.0" encoding="utf-8"?>
-<p:sld xmlns:a="http://schemas.openxmlformats.org/drawingml/2006/main" xmlns:r="http://schemas.openxmlformats.org/officeDocument/2006/relationships" xmlns:p="http://schemas.openxmlformats.org/presentationml/2006/main">
-  <p:cSld name="Slide 6">
-    <p:spTree>
-      <p:nvGrpSpPr>
-        <p:cNvPr id="1" name=""/>
-        <p:cNvGrpSpPr/>
-        <p:nvPr/>
-      </p:nvGrpSpPr>
-      <p:grpSpPr>
-        <a:xfrm>
-          <a:off x="0" y="0"/>
-          <a:ext cx="0" cy="0"/>
-          <a:chOff x="0" y="0"/>
-          <a:chExt cx="0" cy="0"/>
-        </a:xfrm>
-      </p:grpSpPr>
-      <p:sp>
-        <p:nvSpPr>
-          <p:cNvPr id="2" name="Text 0"/>
-          <p:cNvSpPr/>
-          <p:nvPr>
-            <p:ph idx="100" type="title" hasCustomPrompt="1"/>
-          </p:nvPr>
-        </p:nvSpPr>
-        <p:spPr>
-          <a:xfrm>
-            <a:off x="640080" y="411480"/>
-            <a:ext cx="10881360" cy="822960"/>
-          </a:xfrm>
-          <a:prstGeom prst="rect">
-            <a:avLst/>
-          </a:prstGeom>
-          <a:noFill/>
-          <a:ln/>
-        </p:spPr>
-        <p:txBody>
-          <a:bodyPr wrap="square" rtlCol="0"/>
-          <a:lstStyle/>
-          <a:p>
-            <a:pPr algn="l" indent="0" marL="0">
-              <a:buNone/>
-            </a:pPr>
-            <a:r>
               <a:rPr lang="en-US" sz="3800" b="1" dirty="0">
                 <a:solidFill>
                   <a:schemeClr val="tx2"/>
@@ -4483,7 +3771,7 @@
       </p:sp>
       <p:graphicFrame>
         <p:nvGraphicFramePr>
-          <p:cNvPr id="7" name="сравнение с аналогами"/>
+          <p:cNvPr id="6" name="сравнение с аналогами"/>
           <p:cNvGraphicFramePr>
             <a:graphicFrameLocks noGrp="1"/>
           </p:cNvGraphicFramePr>
@@ -6506,7 +5794,7 @@
             <a:pPr algn="r"/>
             <a:fld id="{F7021451-1387-4CA6-816F-3879F97B5CBC}" type="slidenum">
               <a:rPr b="0" lang="en-US"/>
-              <a:t>6</a:t>
+              <a:t>5</a:t>
             </a:fld>
             <a:endParaRPr lang="en-US"/>
           </a:p>
@@ -6520,9 +5808,9 @@
 </p:sld>
 </file>
 
-<file path=ppt/slides/slide7.xml><?xml version="1.0" encoding="utf-8"?>
+<file path=ppt/slides/slide6.xml><?xml version="1.0" encoding="utf-8"?>
 <p:sld xmlns:a="http://schemas.openxmlformats.org/drawingml/2006/main" xmlns:r="http://schemas.openxmlformats.org/officeDocument/2006/relationships" xmlns:p="http://schemas.openxmlformats.org/presentationml/2006/main">
-  <p:cSld name="Slide 7">
+  <p:cSld name="Slide 6">
     <p:spTree>
       <p:nvGrpSpPr>
         <p:cNvPr id="1" name=""/>

--- a/deck/Бирка.pptx
+++ b/deck/Бирка.pptx
@@ -112,28 +112,28 @@
   <p:extLst>
     <p:ext uri="{521415D9-36F7-43E2-AB2F-B90AF26B5E84}">
       <p14:sectionLst xmlns:p14="http://schemas.microsoft.com/office/powerpoint/2010/main">
-        <p14:section name="Открытие" id="{a779acbb-6f16-c937-b8a5-9b83eea5844e}">
+        <p14:section name="Открытие" id="{0cdb6f78-eaa5-5b43-978b-6f4434405481}">
           <p14:sldIdLst>
             <p14:sldId id="256"/>
           </p14:sldIdLst>
         </p14:section>
-        <p14:section name="Проблема" id="{0df62fc8-fe19-8e74-965f-c5940a184f03}">
+        <p14:section name="Проблема" id="{2a7baf34-6e5b-c2aa-53a1-3fb24ca2720d}">
           <p14:sldIdLst>
             <p14:sldId id="257"/>
           </p14:sldIdLst>
         </p14:section>
-        <p14:section name="Решение" id="{8e15454b-6080-42eb-d0ce-c50bb0b1a369}">
+        <p14:section name="Решение" id="{47f04cbc-85f8-9a85-cee9-d2b31951bd6c}">
           <p14:sldIdLst>
             <p14:sldId id="258"/>
             <p14:sldId id="259"/>
           </p14:sldIdLst>
         </p14:section>
-        <p14:section name="Рынок" id="{d00cb19a-576b-75c9-96cc-2d878239d93c}">
+        <p14:section name="Рынок" id="{256f5edd-2ff1-863b-71f0-c31f28481675}">
           <p14:sldIdLst>
             <p14:sldId id="260"/>
           </p14:sldIdLst>
         </p14:section>
-        <p14:section name="Итог" id="{4ef2fb38-efb6-4643-15b0-294a0c9c4489}">
+        <p14:section name="Итог" id="{cf7e147e-0d0c-f0f2-870a-9683f0f9756b}">
           <p14:sldIdLst>
             <p14:sldId id="261"/>
           </p14:sldIdLst>
@@ -5871,12 +5871,12 @@
         </p:nvSpPr>
         <p:spPr>
           <a:xfrm>
-            <a:off x="640080" y="2148840"/>
-            <a:ext cx="3413760" cy="1463040"/>
+            <a:off x="640080" y="2194560"/>
+            <a:ext cx="3413760" cy="1554480"/>
           </a:xfrm>
           <a:prstGeom prst="roundRect">
             <a:avLst>
-              <a:gd name="adj" fmla="val 6250"/>
+              <a:gd name="adj" fmla="val 5882"/>
             </a:avLst>
           </a:prstGeom>
           <a:solidFill>
@@ -5884,29 +5884,11 @@
           </a:solidFill>
           <a:ln/>
         </p:spPr>
-      </p:sp>
-      <p:sp>
-        <p:nvSpPr>
-          <p:cNvPr id="4" name="Text 2"/>
-          <p:cNvSpPr txBox="1"/>
-          <p:nvPr/>
-        </p:nvSpPr>
-        <p:spPr>
-          <a:xfrm>
-            <a:off x="868680" y="2331720"/>
-            <a:ext cx="2956560" cy="411480"/>
-          </a:xfrm>
-          <a:prstGeom prst="rect">
-            <a:avLst/>
-          </a:prstGeom>
-          <a:noFill/>
-          <a:ln/>
-        </p:spPr>
-        <p:txBody>
-          <a:bodyPr wrap="square" lIns="0" tIns="0" rIns="0" bIns="0" rtlCol="0" anchor="t"/>
+        <p:txBody>
+          <a:bodyPr wrap="square" lIns="152400" tIns="203200" rIns="203200" bIns="152400" rtlCol="0" anchor="ctr"/>
           <a:lstStyle/>
           <a:p>
-            <a:pPr indent="0" marL="0">
+            <a:pPr algn="l" indent="0" marL="0">
               <a:buNone/>
             </a:pPr>
             <a:r>
@@ -5919,30 +5901,8 @@
             </a:r>
             <a:endParaRPr lang="en-US" sz="1600" dirty="0"/>
           </a:p>
-        </p:txBody>
-      </p:sp>
-      <p:sp>
-        <p:nvSpPr>
-          <p:cNvPr id="5" name="Text 3"/>
-          <p:cNvSpPr txBox="1"/>
-          <p:nvPr/>
-        </p:nvSpPr>
-        <p:spPr>
-          <a:xfrm>
-            <a:off x="868680" y="2761488"/>
-            <a:ext cx="2956560" cy="731520"/>
-          </a:xfrm>
-          <a:prstGeom prst="rect">
-            <a:avLst/>
-          </a:prstGeom>
-          <a:noFill/>
-          <a:ln/>
-        </p:spPr>
-        <p:txBody>
-          <a:bodyPr wrap="square" lIns="0" tIns="0" rIns="0" bIns="0" rtlCol="0" anchor="t"/>
-          <a:lstStyle/>
-          <a:p>
-            <a:pPr indent="0" marL="0">
+          <a:p>
+            <a:pPr algn="l" indent="0" marL="0">
               <a:buNone/>
             </a:pPr>
             <a:r>
@@ -5953,10 +5913,10 @@
               </a:rPr>
               <a:t>добавить проверку</a:t>
             </a:r>
-            <a:endParaRPr lang="en-US" sz="1300" dirty="0"/>
-          </a:p>
-          <a:p>
-            <a:pPr indent="0" marL="0">
+            <a:endParaRPr lang="en-US" sz="1600" dirty="0"/>
+          </a:p>
+          <a:p>
+            <a:pPr algn="l" indent="0" marL="0">
               <a:buNone/>
             </a:pPr>
             <a:r>
@@ -5967,24 +5927,24 @@
               </a:rPr>
               <a:t>по ТР ТС 007/2011</a:t>
             </a:r>
-            <a:endParaRPr lang="en-US" sz="1300" dirty="0"/>
-          </a:p>
-        </p:txBody>
-      </p:sp>
-      <p:sp>
-        <p:nvSpPr>
-          <p:cNvPr id="6" name="план 2"/>
+            <a:endParaRPr lang="en-US" sz="1600" dirty="0"/>
+          </a:p>
+        </p:txBody>
+      </p:sp>
+      <p:sp>
+        <p:nvSpPr>
+          <p:cNvPr id="4" name="план 2"/>
           <p:cNvSpPr/>
           <p:nvPr/>
         </p:nvSpPr>
         <p:spPr>
           <a:xfrm>
-            <a:off x="4373880" y="2148840"/>
-            <a:ext cx="3413760" cy="1463040"/>
+            <a:off x="4373880" y="2194560"/>
+            <a:ext cx="3413760" cy="1554480"/>
           </a:xfrm>
           <a:prstGeom prst="roundRect">
             <a:avLst>
-              <a:gd name="adj" fmla="val 6250"/>
+              <a:gd name="adj" fmla="val 5882"/>
             </a:avLst>
           </a:prstGeom>
           <a:solidFill>
@@ -5992,29 +5952,11 @@
           </a:solidFill>
           <a:ln/>
         </p:spPr>
-      </p:sp>
-      <p:sp>
-        <p:nvSpPr>
-          <p:cNvPr id="7" name="Text 5"/>
-          <p:cNvSpPr txBox="1"/>
-          <p:nvPr/>
-        </p:nvSpPr>
-        <p:spPr>
-          <a:xfrm>
-            <a:off x="4602480" y="2331720"/>
-            <a:ext cx="2956560" cy="411480"/>
-          </a:xfrm>
-          <a:prstGeom prst="rect">
-            <a:avLst/>
-          </a:prstGeom>
-          <a:noFill/>
-          <a:ln/>
-        </p:spPr>
-        <p:txBody>
-          <a:bodyPr wrap="square" lIns="0" tIns="0" rIns="0" bIns="0" rtlCol="0" anchor="t"/>
+        <p:txBody>
+          <a:bodyPr wrap="square" lIns="152400" tIns="203200" rIns="203200" bIns="152400" rtlCol="0" anchor="ctr"/>
           <a:lstStyle/>
           <a:p>
-            <a:pPr indent="0" marL="0">
+            <a:pPr algn="l" indent="0" marL="0">
               <a:buNone/>
             </a:pPr>
             <a:r>
@@ -6027,30 +5969,8 @@
             </a:r>
             <a:endParaRPr lang="en-US" sz="1600" dirty="0"/>
           </a:p>
-        </p:txBody>
-      </p:sp>
-      <p:sp>
-        <p:nvSpPr>
-          <p:cNvPr id="8" name="Text 6"/>
-          <p:cNvSpPr txBox="1"/>
-          <p:nvPr/>
-        </p:nvSpPr>
-        <p:spPr>
-          <a:xfrm>
-            <a:off x="4602480" y="2761488"/>
-            <a:ext cx="2956560" cy="731520"/>
-          </a:xfrm>
-          <a:prstGeom prst="rect">
-            <a:avLst/>
-          </a:prstGeom>
-          <a:noFill/>
-          <a:ln/>
-        </p:spPr>
-        <p:txBody>
-          <a:bodyPr wrap="square" lIns="0" tIns="0" rIns="0" bIns="0" rtlCol="0" anchor="t"/>
-          <a:lstStyle/>
-          <a:p>
-            <a:pPr indent="0" marL="0">
+          <a:p>
+            <a:pPr algn="l" indent="0" marL="0">
               <a:buNone/>
             </a:pPr>
             <a:r>
@@ -6061,10 +5981,10 @@
               </a:rPr>
               <a:t>разбор карточки</a:t>
             </a:r>
-            <a:endParaRPr lang="en-US" sz="1300" dirty="0"/>
-          </a:p>
-          <a:p>
-            <a:pPr indent="0" marL="0">
+            <a:endParaRPr lang="en-US" sz="1600" dirty="0"/>
+          </a:p>
+          <a:p>
+            <a:pPr algn="l" indent="0" marL="0">
               <a:buNone/>
             </a:pPr>
             <a:r>
@@ -6075,24 +5995,24 @@
               </a:rPr>
               <a:t>маркетплейса целиком</a:t>
             </a:r>
-            <a:endParaRPr lang="en-US" sz="1300" dirty="0"/>
-          </a:p>
-        </p:txBody>
-      </p:sp>
-      <p:sp>
-        <p:nvSpPr>
-          <p:cNvPr id="9" name="план 3"/>
+            <a:endParaRPr lang="en-US" sz="1600" dirty="0"/>
+          </a:p>
+        </p:txBody>
+      </p:sp>
+      <p:sp>
+        <p:nvSpPr>
+          <p:cNvPr id="5" name="план 3"/>
           <p:cNvSpPr/>
           <p:nvPr/>
         </p:nvSpPr>
         <p:spPr>
           <a:xfrm>
-            <a:off x="8107680" y="2148840"/>
-            <a:ext cx="3413760" cy="1463040"/>
+            <a:off x="8107680" y="2194560"/>
+            <a:ext cx="3413760" cy="1554480"/>
           </a:xfrm>
           <a:prstGeom prst="roundRect">
             <a:avLst>
-              <a:gd name="adj" fmla="val 6250"/>
+              <a:gd name="adj" fmla="val 5882"/>
             </a:avLst>
           </a:prstGeom>
           <a:solidFill>
@@ -6100,17 +6020,63 @@
           </a:solidFill>
           <a:ln/>
         </p:spPr>
-      </p:sp>
-      <p:sp>
-        <p:nvSpPr>
-          <p:cNvPr id="10" name="Text 8"/>
+        <p:txBody>
+          <a:bodyPr wrap="square" lIns="152400" tIns="203200" rIns="203200" bIns="152400" rtlCol="0" anchor="ctr"/>
+          <a:lstStyle/>
+          <a:p>
+            <a:pPr algn="l" indent="0" marL="0">
+              <a:buNone/>
+            </a:pPr>
+            <a:r>
+              <a:rPr lang="en-US" sz="1600" b="1" dirty="0">
+                <a:solidFill>
+                  <a:srgbClr val="FFFFFF"/>
+                </a:solidFill>
+              </a:rPr>
+              <a:t>Пилот с типографией</a:t>
+            </a:r>
+            <a:endParaRPr lang="en-US" sz="1600" dirty="0"/>
+          </a:p>
+          <a:p>
+            <a:pPr algn="l" indent="0" marL="0">
+              <a:buNone/>
+            </a:pPr>
+            <a:r>
+              <a:rPr lang="en-US" sz="1300" dirty="0">
+                <a:solidFill>
+                  <a:srgbClr val="C6CDE4"/>
+                </a:solidFill>
+              </a:rPr>
+              <a:t>первые клиенты</a:t>
+            </a:r>
+            <a:endParaRPr lang="en-US" sz="1600" dirty="0"/>
+          </a:p>
+          <a:p>
+            <a:pPr algn="l" indent="0" marL="0">
+              <a:buNone/>
+            </a:pPr>
+            <a:r>
+              <a:rPr lang="en-US" sz="1300" dirty="0">
+                <a:solidFill>
+                  <a:srgbClr val="C6CDE4"/>
+                </a:solidFill>
+              </a:rPr>
+              <a:t>в Казани</a:t>
+            </a:r>
+            <a:endParaRPr lang="en-US" sz="1600" dirty="0"/>
+          </a:p>
+        </p:txBody>
+      </p:sp>
+      <p:sp>
+        <p:nvSpPr>
+          <p:cNvPr id="6" name="Text 4"/>
           <p:cNvSpPr txBox="1"/>
           <p:nvPr/>
         </p:nvSpPr>
         <p:spPr>
           <a:xfrm>
-            <a:off x="8336280" y="2331720"/>
-            <a:ext cx="2956560" cy="411480"/>
+            <a:off x="640080" y="4023360"/>
+            <a:ext cx="10881360" cy="731520"/>
           </a:xfrm>
           <a:prstGeom prst="rect">
             <a:avLst/>
@@ -6126,27 +6092,27 @@
               <a:buNone/>
             </a:pPr>
             <a:r>
-              <a:rPr lang="en-US" sz="1600" b="1" dirty="0">
-                <a:solidFill>
-                  <a:srgbClr val="FFFFFF"/>
+              <a:rPr lang="en-US" sz="1500" i="1" dirty="0">
+                <a:solidFill>
+                  <a:srgbClr val="D9DDE3"/>
                 </a:solidFill>
               </a:rPr>
-              <a:t>Пилот с типографией</a:t>
-            </a:r>
-            <a:endParaRPr lang="en-US" sz="1600" dirty="0"/>
-          </a:p>
-        </p:txBody>
-      </p:sp>
-      <p:sp>
-        <p:nvSpPr>
-          <p:cNvPr id="11" name="Text 9"/>
+              <a:t>С марта 2027 года проверка карточек на маркетплейсах становится обязательной — предварительная самопроверка нужна продавцу уже сейчас</a:t>
+            </a:r>
+            <a:endParaRPr lang="en-US" sz="1500" dirty="0"/>
+          </a:p>
+        </p:txBody>
+      </p:sp>
+      <p:sp>
+        <p:nvSpPr>
+          <p:cNvPr id="7" name="подпись"/>
           <p:cNvSpPr txBox="1"/>
           <p:nvPr/>
         </p:nvSpPr>
         <p:spPr>
           <a:xfrm>
-            <a:off x="8336280" y="2761488"/>
-            <a:ext cx="2956560" cy="731520"/>
+            <a:off x="640080" y="4892040"/>
+            <a:ext cx="9144000" cy="1463040"/>
           </a:xfrm>
           <a:prstGeom prst="rect">
             <a:avLst/>
@@ -6162,186 +6128,56 @@
               <a:buNone/>
             </a:pPr>
             <a:r>
-              <a:rPr lang="en-US" sz="1300" dirty="0">
-                <a:solidFill>
-                  <a:srgbClr val="C6CDE4"/>
+              <a:rPr lang="en-US" sz="2200" b="1" dirty="0">
+                <a:solidFill>
+                  <a:srgbClr val="1F7A4D"/>
                 </a:solidFill>
               </a:rPr>
-              <a:t>первые клиенты</a:t>
-            </a:r>
-            <a:endParaRPr lang="en-US" sz="1300" dirty="0"/>
+              <a:t>birka.tatnet.app</a:t>
+            </a:r>
+            <a:endParaRPr lang="en-US" sz="2200" dirty="0"/>
           </a:p>
           <a:p>
             <a:pPr indent="0" marL="0">
               <a:buNone/>
             </a:pPr>
             <a:r>
-              <a:rPr lang="en-US" sz="1300" dirty="0">
-                <a:solidFill>
-                  <a:srgbClr val="C6CDE4"/>
+              <a:rPr lang="en-US" sz="1500" dirty="0">
+                <a:solidFill>
+                  <a:srgbClr val="AEB6C9"/>
                 </a:solidFill>
               </a:rPr>
-              <a:t>в Казани</a:t>
-            </a:r>
-            <a:endParaRPr lang="en-US" sz="1300" dirty="0"/>
-          </a:p>
-        </p:txBody>
-      </p:sp>
-      <p:sp>
-        <p:nvSpPr>
-          <p:cNvPr id="12" name="Text 10"/>
-          <p:cNvSpPr txBox="1"/>
-          <p:nvPr/>
-        </p:nvSpPr>
-        <p:spPr>
-          <a:xfrm>
-            <a:off x="640080" y="3886200"/>
-            <a:ext cx="10881360" cy="685800"/>
-          </a:xfrm>
-          <a:prstGeom prst="rect">
-            <a:avLst/>
-          </a:prstGeom>
-          <a:noFill/>
-          <a:ln/>
-        </p:spPr>
-        <p:txBody>
-          <a:bodyPr wrap="square" lIns="0" tIns="0" rIns="0" bIns="0" rtlCol="0" anchor="t"/>
-          <a:lstStyle/>
+              <a:t>Спасибо. Готов ответить на вопросы</a:t>
+            </a:r>
+            <a:endParaRPr lang="en-US" sz="2200" dirty="0"/>
+          </a:p>
           <a:p>
             <a:pPr indent="0" marL="0">
               <a:buNone/>
             </a:pPr>
             <a:r>
-              <a:rPr lang="en-US" sz="1500" i="1" dirty="0">
-                <a:solidFill>
-                  <a:srgbClr val="D9DDE3"/>
+              <a:rPr lang="en-US" sz="800" dirty="0">
+                <a:solidFill>
+                  <a:srgbClr val="000000"/>
                 </a:solidFill>
               </a:rPr>
-              <a:t>С марта 2027 года проверка карточек на маркетплейсах становится обязательной — предварительная самопроверка нужна продавцу уже сейчас</a:t>
-            </a:r>
-            <a:endParaRPr lang="en-US" sz="1500" dirty="0"/>
-          </a:p>
-        </p:txBody>
-      </p:sp>
-      <p:sp>
-        <p:nvSpPr>
-          <p:cNvPr id="13" name="Text 11"/>
-          <p:cNvSpPr txBox="1"/>
-          <p:nvPr/>
-        </p:nvSpPr>
-        <p:spPr>
-          <a:xfrm>
-            <a:off x="640080" y="4846320"/>
-            <a:ext cx="6400800" cy="457200"/>
-          </a:xfrm>
-          <a:prstGeom prst="rect">
-            <a:avLst/>
-          </a:prstGeom>
-          <a:noFill/>
-          <a:ln/>
-        </p:spPr>
-        <p:txBody>
-          <a:bodyPr wrap="square" lIns="0" tIns="0" rIns="0" bIns="0" rtlCol="0" anchor="ctr"/>
-          <a:lstStyle/>
+              <a:t> </a:t>
+            </a:r>
+            <a:endParaRPr lang="en-US" sz="2200" dirty="0"/>
+          </a:p>
           <a:p>
             <a:pPr indent="0" marL="0">
               <a:buNone/>
             </a:pPr>
             <a:r>
-              <a:rPr lang="en-US" sz="2200" b="1" dirty="0">
-                <a:solidFill>
-                  <a:srgbClr val="1F7A4D"/>
+              <a:rPr lang="en-US" sz="1300" dirty="0">
+                <a:solidFill>
+                  <a:srgbClr val="8E97B5"/>
                 </a:solidFill>
               </a:rPr>
-              <a:t>birka.tatnet.app</a:t>
+              <a:t>Фазуллин Амир · Лицей-интернат имени Мустафы Онджеля</a:t>
             </a:r>
             <a:endParaRPr lang="en-US" sz="2200" dirty="0"/>
-          </a:p>
-        </p:txBody>
-      </p:sp>
-      <p:sp>
-        <p:nvSpPr>
-          <p:cNvPr id="14" name="Text 12"/>
-          <p:cNvSpPr txBox="1"/>
-          <p:nvPr/>
-        </p:nvSpPr>
-        <p:spPr>
-          <a:xfrm>
-            <a:off x="640080" y="5349240"/>
-            <a:ext cx="6400800" cy="365760"/>
-          </a:xfrm>
-          <a:prstGeom prst="rect">
-            <a:avLst/>
-          </a:prstGeom>
-          <a:noFill/>
-          <a:ln/>
-        </p:spPr>
-        <p:txBody>
-          <a:bodyPr wrap="square" lIns="0" tIns="0" rIns="0" bIns="0" rtlCol="0" anchor="ctr"/>
-          <a:lstStyle/>
-          <a:p>
-            <a:pPr indent="0" marL="0">
-              <a:buNone/>
-            </a:pPr>
-            <a:r>
-              <a:rPr lang="en-US" sz="1500" dirty="0">
-                <a:solidFill>
-                  <a:srgbClr val="AEB6C9"/>
-                </a:solidFill>
-              </a:rPr>
-              <a:t>Спасибо. Готов ответить на вопросы</a:t>
-            </a:r>
-            <a:endParaRPr lang="en-US" sz="1500" dirty="0"/>
-          </a:p>
-        </p:txBody>
-      </p:sp>
-      <p:sp>
-        <p:nvSpPr>
-          <p:cNvPr id="15" name="Text 13"/>
-          <p:cNvSpPr txBox="1"/>
-          <p:nvPr/>
-        </p:nvSpPr>
-        <p:spPr>
-          <a:xfrm>
-            <a:off x="640080" y="5806440"/>
-            <a:ext cx="8229600" cy="640080"/>
-          </a:xfrm>
-          <a:prstGeom prst="rect">
-            <a:avLst/>
-          </a:prstGeom>
-          <a:noFill/>
-          <a:ln/>
-        </p:spPr>
-        <p:txBody>
-          <a:bodyPr wrap="square" lIns="0" tIns="0" rIns="0" bIns="0" rtlCol="0" anchor="t"/>
-          <a:lstStyle/>
-          <a:p>
-            <a:pPr indent="0" marL="0">
-              <a:buNone/>
-            </a:pPr>
-            <a:r>
-              <a:rPr lang="en-US" sz="1300" dirty="0">
-                <a:solidFill>
-                  <a:srgbClr val="8E97B5"/>
-                </a:solidFill>
-              </a:rPr>
-              <a:t>Фазуллин Амир</a:t>
-            </a:r>
-            <a:endParaRPr lang="en-US" sz="1300" dirty="0"/>
-          </a:p>
-          <a:p>
-            <a:pPr indent="0" marL="0">
-              <a:buNone/>
-            </a:pPr>
-            <a:r>
-              <a:rPr lang="en-US" sz="1300" dirty="0">
-                <a:solidFill>
-                  <a:srgbClr val="8E97B5"/>
-                </a:solidFill>
-              </a:rPr>
-              <a:t>Лицей-интернат имени Мустафы Онджеля</a:t>
-            </a:r>
-            <a:endParaRPr lang="en-US" sz="1300" dirty="0"/>
           </a:p>
         </p:txBody>
       </p:sp>

--- a/deck/Бирка.pptx
+++ b/deck/Бирка.pptx
@@ -112,28 +112,28 @@
   <p:extLst>
     <p:ext uri="{521415D9-36F7-43E2-AB2F-B90AF26B5E84}">
       <p14:sectionLst xmlns:p14="http://schemas.microsoft.com/office/powerpoint/2010/main">
-        <p14:section name="Открытие" id="{0cdb6f78-eaa5-5b43-978b-6f4434405481}">
+        <p14:section name="Открытие" id="{7230f00e-9200-9dbd-a8f3-d0b88d8d77c3}">
           <p14:sldIdLst>
             <p14:sldId id="256"/>
           </p14:sldIdLst>
         </p14:section>
-        <p14:section name="Проблема" id="{2a7baf34-6e5b-c2aa-53a1-3fb24ca2720d}">
+        <p14:section name="Проблема" id="{d202595b-7a1a-3c09-505e-e20c53f42d5f}">
           <p14:sldIdLst>
             <p14:sldId id="257"/>
           </p14:sldIdLst>
         </p14:section>
-        <p14:section name="Решение" id="{47f04cbc-85f8-9a85-cee9-d2b31951bd6c}">
+        <p14:section name="Решение" id="{f0a4a73b-51a8-e2bd-7ae2-af43ae300adb}">
           <p14:sldIdLst>
             <p14:sldId id="258"/>
             <p14:sldId id="259"/>
           </p14:sldIdLst>
         </p14:section>
-        <p14:section name="Рынок" id="{256f5edd-2ff1-863b-71f0-c31f28481675}">
+        <p14:section name="Рынок" id="{5f7d377d-78e4-8882-86dd-82502b313c59}">
           <p14:sldIdLst>
             <p14:sldId id="260"/>
           </p14:sldIdLst>
         </p14:section>
-        <p14:section name="Итог" id="{cf7e147e-0d0c-f0f2-870a-9683f0f9756b}">
+        <p14:section name="Итог" id="{2a3a163c-c347-a22d-0b61-ffc98d67ff1b}">
           <p14:sldIdLst>
             <p14:sldId id="261"/>
           </p14:sldIdLst>
@@ -3559,6 +3559,154 @@
       <p:sp>
         <p:nvSpPr>
           <p:cNvPr id="2" name="Text 0"/>
+          <p:cNvSpPr txBox="1"/>
+          <p:nvPr/>
+        </p:nvSpPr>
+        <p:spPr>
+          <a:xfrm>
+            <a:off x="640080" y="914400"/>
+            <a:ext cx="10881360" cy="914400"/>
+          </a:xfrm>
+          <a:prstGeom prst="rect">
+            <a:avLst/>
+          </a:prstGeom>
+          <a:noFill/>
+          <a:ln/>
+        </p:spPr>
+        <p:txBody>
+          <a:bodyPr wrap="square" lIns="0" tIns="0" rIns="0" bIns="0" rtlCol="0" anchor="ctr"/>
+          <a:lstStyle/>
+          <a:p>
+            <a:pPr algn="l" indent="0" marL="0">
+              <a:buNone/>
+            </a:pPr>
+            <a:r>
+              <a:rPr lang="en-US" sz="4000" b="1" dirty="0">
+                <a:solidFill>
+                  <a:srgbClr val="FFFFFF"/>
+                </a:solidFill>
+              </a:rPr>
+              <a:t>Проверим прямо сейчас</a:t>
+            </a:r>
+            <a:endParaRPr lang="en-US" sz="4000" dirty="0"/>
+          </a:p>
+        </p:txBody>
+      </p:sp>
+      <p:sp>
+        <p:nvSpPr>
+          <p:cNvPr id="3" name="Text 1"/>
+          <p:cNvSpPr txBox="1"/>
+          <p:nvPr/>
+        </p:nvSpPr>
+        <p:spPr>
+          <a:xfrm>
+            <a:off x="640080" y="2240280"/>
+            <a:ext cx="8686800" cy="822960"/>
+          </a:xfrm>
+          <a:prstGeom prst="rect">
+            <a:avLst/>
+          </a:prstGeom>
+          <a:noFill/>
+          <a:ln/>
+        </p:spPr>
+        <p:txBody>
+          <a:bodyPr wrap="square" lIns="0" tIns="0" rIns="0" bIns="0" rtlCol="0" anchor="t"/>
+          <a:lstStyle/>
+          <a:p>
+            <a:pPr indent="0" marL="0">
+              <a:buNone/>
+            </a:pPr>
+            <a:r>
+              <a:rPr lang="en-US" sz="2000" dirty="0">
+                <a:solidFill>
+                  <a:srgbClr val="D9DDE3"/>
+                </a:solidFill>
+              </a:rPr>
+              <a:t>Дайте любой товар в упаковке — через минуту вы увидите, чего не хватает на его этикетке</a:t>
+            </a:r>
+            <a:endParaRPr lang="en-US" sz="2000" dirty="0"/>
+          </a:p>
+        </p:txBody>
+      </p:sp>
+      <p:sp>
+        <p:nvSpPr>
+          <p:cNvPr id="4" name="адрес сайта"/>
+          <p:cNvSpPr/>
+          <p:nvPr/>
+        </p:nvSpPr>
+        <p:spPr>
+          <a:xfrm>
+            <a:off x="640080" y="3429000"/>
+            <a:ext cx="5120640" cy="914400"/>
+          </a:xfrm>
+          <a:prstGeom prst="roundRect">
+            <a:avLst>
+              <a:gd name="adj" fmla="val 12000"/>
+            </a:avLst>
+          </a:prstGeom>
+          <a:solidFill>
+            <a:srgbClr val="1F7A4D"/>
+          </a:solidFill>
+          <a:ln/>
+        </p:spPr>
+        <p:txBody>
+          <a:bodyPr wrap="square" rtlCol="0" anchor="ctr"/>
+          <a:lstStyle/>
+          <a:p>
+            <a:pPr algn="ctr" indent="0" marL="0">
+              <a:buNone/>
+            </a:pPr>
+            <a:r>
+              <a:rPr lang="en-US" sz="2400" b="1" dirty="0">
+                <a:solidFill>
+                  <a:srgbClr val="FFFFFF"/>
+                </a:solidFill>
+              </a:rPr>
+              <a:t>birka.tatnet.app</a:t>
+            </a:r>
+            <a:endParaRPr lang="en-US" sz="2400" dirty="0"/>
+          </a:p>
+        </p:txBody>
+      </p:sp>
+      <p:sp>
+        <p:nvSpPr>
+          <p:cNvPr id="5" name="Text 3"/>
+          <p:cNvSpPr txBox="1"/>
+          <p:nvPr/>
+        </p:nvSpPr>
+        <p:spPr>
+          <a:xfrm>
+            <a:off x="640080" y="4572000"/>
+            <a:ext cx="8686800" cy="365760"/>
+          </a:xfrm>
+          <a:prstGeom prst="rect">
+            <a:avLst/>
+          </a:prstGeom>
+          <a:noFill/>
+          <a:ln/>
+        </p:spPr>
+        <p:txBody>
+          <a:bodyPr wrap="square" lIns="0" tIns="0" rIns="0" bIns="0" rtlCol="0" anchor="t"/>
+          <a:lstStyle/>
+          <a:p>
+            <a:pPr indent="0" marL="0">
+              <a:buNone/>
+            </a:pPr>
+            <a:r>
+              <a:rPr lang="en-US" sz="1400" dirty="0">
+                <a:solidFill>
+                  <a:srgbClr val="AEB6C9"/>
+                </a:solidFill>
+              </a:rPr>
+              <a:t>Работает в браузере телефона. Ничего не нужно устанавливать.</a:t>
+            </a:r>
+            <a:endParaRPr lang="en-US" sz="1400" dirty="0"/>
+          </a:p>
+        </p:txBody>
+      </p:sp>
+      <p:sp>
+        <p:nvSpPr>
+          <p:cNvPr id="7" name="Text 0"/>
           <p:cNvSpPr/>
           <p:nvPr>
             <p:ph idx="100" type="title" hasCustomPrompt="1"/>
@@ -3582,127 +3730,7 @@
             <a:pPr algn="l" indent="0" marL="0">
               <a:buNone/>
             </a:pPr>
-            <a:r>
-              <a:rPr lang="en-US" sz="4000" b="1" dirty="0">
-                <a:solidFill>
-                  <a:schemeClr val="bg1"/>
-                </a:solidFill>
-              </a:rPr>
-              <a:t>Проверим прямо сейчас</a:t>
-            </a:r>
             <a:endParaRPr lang="en-US" sz="4000" dirty="0"/>
-          </a:p>
-        </p:txBody>
-      </p:sp>
-      <p:sp>
-        <p:nvSpPr>
-          <p:cNvPr id="3" name="Text 1"/>
-          <p:cNvSpPr txBox="1"/>
-          <p:nvPr/>
-        </p:nvSpPr>
-        <p:spPr>
-          <a:xfrm>
-            <a:off x="640080" y="2240280"/>
-            <a:ext cx="8686800" cy="822960"/>
-          </a:xfrm>
-          <a:prstGeom prst="rect">
-            <a:avLst/>
-          </a:prstGeom>
-          <a:noFill/>
-          <a:ln/>
-        </p:spPr>
-        <p:txBody>
-          <a:bodyPr wrap="square" lIns="0" tIns="0" rIns="0" bIns="0" rtlCol="0" anchor="t"/>
-          <a:lstStyle/>
-          <a:p>
-            <a:pPr indent="0" marL="0">
-              <a:buNone/>
-            </a:pPr>
-            <a:r>
-              <a:rPr lang="en-US" sz="2000" dirty="0">
-                <a:solidFill>
-                  <a:srgbClr val="D9DDE3"/>
-                </a:solidFill>
-              </a:rPr>
-              <a:t>Дайте любой товар в упаковке — через минуту вы увидите, чего не хватает на его этикетке</a:t>
-            </a:r>
-            <a:endParaRPr lang="en-US" sz="2000" dirty="0"/>
-          </a:p>
-        </p:txBody>
-      </p:sp>
-      <p:sp>
-        <p:nvSpPr>
-          <p:cNvPr id="4" name="адрес сайта"/>
-          <p:cNvSpPr/>
-          <p:nvPr/>
-        </p:nvSpPr>
-        <p:spPr>
-          <a:xfrm>
-            <a:off x="640080" y="3429000"/>
-            <a:ext cx="5120640" cy="914400"/>
-          </a:xfrm>
-          <a:prstGeom prst="roundRect">
-            <a:avLst>
-              <a:gd name="adj" fmla="val 12000"/>
-            </a:avLst>
-          </a:prstGeom>
-          <a:solidFill>
-            <a:srgbClr val="1F7A4D"/>
-          </a:solidFill>
-          <a:ln/>
-        </p:spPr>
-        <p:txBody>
-          <a:bodyPr wrap="square" rtlCol="0" anchor="ctr"/>
-          <a:lstStyle/>
-          <a:p>
-            <a:pPr algn="ctr" indent="0" marL="0">
-              <a:buNone/>
-            </a:pPr>
-            <a:r>
-              <a:rPr lang="en-US" sz="2400" b="1" dirty="0">
-                <a:solidFill>
-                  <a:srgbClr val="FFFFFF"/>
-                </a:solidFill>
-              </a:rPr>
-              <a:t>birka.tatnet.app</a:t>
-            </a:r>
-            <a:endParaRPr lang="en-US" sz="2400" dirty="0"/>
-          </a:p>
-        </p:txBody>
-      </p:sp>
-      <p:sp>
-        <p:nvSpPr>
-          <p:cNvPr id="5" name="Text 3"/>
-          <p:cNvSpPr txBox="1"/>
-          <p:nvPr/>
-        </p:nvSpPr>
-        <p:spPr>
-          <a:xfrm>
-            <a:off x="640080" y="4572000"/>
-            <a:ext cx="8686800" cy="365760"/>
-          </a:xfrm>
-          <a:prstGeom prst="rect">
-            <a:avLst/>
-          </a:prstGeom>
-          <a:noFill/>
-          <a:ln/>
-        </p:spPr>
-        <p:txBody>
-          <a:bodyPr wrap="square" lIns="0" tIns="0" rIns="0" bIns="0" rtlCol="0" anchor="t"/>
-          <a:lstStyle/>
-          <a:p>
-            <a:pPr indent="0" marL="0">
-              <a:buNone/>
-            </a:pPr>
-            <a:r>
-              <a:rPr lang="en-US" sz="1400" dirty="0">
-                <a:solidFill>
-                  <a:srgbClr val="AEB6C9"/>
-                </a:solidFill>
-              </a:rPr>
-              <a:t>Работает в браузере телефона. Ничего не нужно устанавливать.</a:t>
-            </a:r>
-            <a:endParaRPr lang="en-US" sz="1400" dirty="0"/>
           </a:p>
         </p:txBody>
       </p:sp>
@@ -5828,6 +5856,360 @@
       <p:sp>
         <p:nvSpPr>
           <p:cNvPr id="2" name="Text 0"/>
+          <p:cNvSpPr txBox="1"/>
+          <p:nvPr/>
+        </p:nvSpPr>
+        <p:spPr>
+          <a:xfrm>
+            <a:off x="640080" y="914400"/>
+            <a:ext cx="10881360" cy="914400"/>
+          </a:xfrm>
+          <a:prstGeom prst="rect">
+            <a:avLst/>
+          </a:prstGeom>
+          <a:noFill/>
+          <a:ln/>
+        </p:spPr>
+        <p:txBody>
+          <a:bodyPr wrap="square" lIns="0" tIns="0" rIns="0" bIns="0" rtlCol="0" anchor="ctr"/>
+          <a:lstStyle/>
+          <a:p>
+            <a:pPr algn="l" indent="0" marL="0">
+              <a:buNone/>
+            </a:pPr>
+            <a:r>
+              <a:rPr lang="en-US" sz="4000" b="1" dirty="0">
+                <a:solidFill>
+                  <a:srgbClr val="FFFFFF"/>
+                </a:solidFill>
+              </a:rPr>
+              <a:t>Что дальше</a:t>
+            </a:r>
+            <a:endParaRPr lang="en-US" sz="4000" dirty="0"/>
+          </a:p>
+        </p:txBody>
+      </p:sp>
+      <p:sp>
+        <p:nvSpPr>
+          <p:cNvPr id="3" name="план 1"/>
+          <p:cNvSpPr/>
+          <p:nvPr/>
+        </p:nvSpPr>
+        <p:spPr>
+          <a:xfrm>
+            <a:off x="640080" y="2194560"/>
+            <a:ext cx="3413760" cy="1554480"/>
+          </a:xfrm>
+          <a:prstGeom prst="roundRect">
+            <a:avLst>
+              <a:gd name="adj" fmla="val 5882"/>
+            </a:avLst>
+          </a:prstGeom>
+          <a:solidFill>
+            <a:srgbClr val="3E4C94"/>
+          </a:solidFill>
+          <a:ln/>
+        </p:spPr>
+        <p:txBody>
+          <a:bodyPr wrap="square" lIns="152400" tIns="203200" rIns="203200" bIns="152400" rtlCol="0" anchor="ctr"/>
+          <a:lstStyle/>
+          <a:p>
+            <a:pPr algn="l" indent="0" marL="0">
+              <a:buNone/>
+            </a:pPr>
+            <a:r>
+              <a:rPr lang="en-US" sz="1600" b="1" dirty="0">
+                <a:solidFill>
+                  <a:srgbClr val="FFFFFF"/>
+                </a:solidFill>
+              </a:rPr>
+              <a:t>Детские товары</a:t>
+            </a:r>
+            <a:endParaRPr lang="en-US" sz="1600" dirty="0"/>
+          </a:p>
+          <a:p>
+            <a:pPr algn="l" indent="0" marL="0">
+              <a:buNone/>
+            </a:pPr>
+            <a:r>
+              <a:rPr lang="en-US" sz="1300" dirty="0">
+                <a:solidFill>
+                  <a:srgbClr val="C6CDE4"/>
+                </a:solidFill>
+              </a:rPr>
+              <a:t>добавить проверку</a:t>
+            </a:r>
+            <a:endParaRPr lang="en-US" sz="1600" dirty="0"/>
+          </a:p>
+          <a:p>
+            <a:pPr algn="l" indent="0" marL="0">
+              <a:buNone/>
+            </a:pPr>
+            <a:r>
+              <a:rPr lang="en-US" sz="1300" dirty="0">
+                <a:solidFill>
+                  <a:srgbClr val="C6CDE4"/>
+                </a:solidFill>
+              </a:rPr>
+              <a:t>по ТР ТС 007/2011</a:t>
+            </a:r>
+            <a:endParaRPr lang="en-US" sz="1600" dirty="0"/>
+          </a:p>
+        </p:txBody>
+      </p:sp>
+      <p:sp>
+        <p:nvSpPr>
+          <p:cNvPr id="4" name="план 2"/>
+          <p:cNvSpPr/>
+          <p:nvPr/>
+        </p:nvSpPr>
+        <p:spPr>
+          <a:xfrm>
+            <a:off x="4373880" y="2194560"/>
+            <a:ext cx="3413760" cy="1554480"/>
+          </a:xfrm>
+          <a:prstGeom prst="roundRect">
+            <a:avLst>
+              <a:gd name="adj" fmla="val 5882"/>
+            </a:avLst>
+          </a:prstGeom>
+          <a:solidFill>
+            <a:srgbClr val="3E4C94"/>
+          </a:solidFill>
+          <a:ln/>
+        </p:spPr>
+        <p:txBody>
+          <a:bodyPr wrap="square" lIns="152400" tIns="203200" rIns="203200" bIns="152400" rtlCol="0" anchor="ctr"/>
+          <a:lstStyle/>
+          <a:p>
+            <a:pPr algn="l" indent="0" marL="0">
+              <a:buNone/>
+            </a:pPr>
+            <a:r>
+              <a:rPr lang="en-US" sz="1600" b="1" dirty="0">
+                <a:solidFill>
+                  <a:srgbClr val="FFFFFF"/>
+                </a:solidFill>
+              </a:rPr>
+              <a:t>Проверка по ссылке</a:t>
+            </a:r>
+            <a:endParaRPr lang="en-US" sz="1600" dirty="0"/>
+          </a:p>
+          <a:p>
+            <a:pPr algn="l" indent="0" marL="0">
+              <a:buNone/>
+            </a:pPr>
+            <a:r>
+              <a:rPr lang="en-US" sz="1300" dirty="0">
+                <a:solidFill>
+                  <a:srgbClr val="C6CDE4"/>
+                </a:solidFill>
+              </a:rPr>
+              <a:t>разбор карточки</a:t>
+            </a:r>
+            <a:endParaRPr lang="en-US" sz="1600" dirty="0"/>
+          </a:p>
+          <a:p>
+            <a:pPr algn="l" indent="0" marL="0">
+              <a:buNone/>
+            </a:pPr>
+            <a:r>
+              <a:rPr lang="en-US" sz="1300" dirty="0">
+                <a:solidFill>
+                  <a:srgbClr val="C6CDE4"/>
+                </a:solidFill>
+              </a:rPr>
+              <a:t>маркетплейса целиком</a:t>
+            </a:r>
+            <a:endParaRPr lang="en-US" sz="1600" dirty="0"/>
+          </a:p>
+        </p:txBody>
+      </p:sp>
+      <p:sp>
+        <p:nvSpPr>
+          <p:cNvPr id="5" name="план 3"/>
+          <p:cNvSpPr/>
+          <p:nvPr/>
+        </p:nvSpPr>
+        <p:spPr>
+          <a:xfrm>
+            <a:off x="8107680" y="2194560"/>
+            <a:ext cx="3413760" cy="1554480"/>
+          </a:xfrm>
+          <a:prstGeom prst="roundRect">
+            <a:avLst>
+              <a:gd name="adj" fmla="val 5882"/>
+            </a:avLst>
+          </a:prstGeom>
+          <a:solidFill>
+            <a:srgbClr val="3E4C94"/>
+          </a:solidFill>
+          <a:ln/>
+        </p:spPr>
+        <p:txBody>
+          <a:bodyPr wrap="square" lIns="152400" tIns="203200" rIns="203200" bIns="152400" rtlCol="0" anchor="ctr"/>
+          <a:lstStyle/>
+          <a:p>
+            <a:pPr algn="l" indent="0" marL="0">
+              <a:buNone/>
+            </a:pPr>
+            <a:r>
+              <a:rPr lang="en-US" sz="1600" b="1" dirty="0">
+                <a:solidFill>
+                  <a:srgbClr val="FFFFFF"/>
+                </a:solidFill>
+              </a:rPr>
+              <a:t>Пилот с типографией</a:t>
+            </a:r>
+            <a:endParaRPr lang="en-US" sz="1600" dirty="0"/>
+          </a:p>
+          <a:p>
+            <a:pPr algn="l" indent="0" marL="0">
+              <a:buNone/>
+            </a:pPr>
+            <a:r>
+              <a:rPr lang="en-US" sz="1300" dirty="0">
+                <a:solidFill>
+                  <a:srgbClr val="C6CDE4"/>
+                </a:solidFill>
+              </a:rPr>
+              <a:t>первые клиенты</a:t>
+            </a:r>
+            <a:endParaRPr lang="en-US" sz="1600" dirty="0"/>
+          </a:p>
+          <a:p>
+            <a:pPr algn="l" indent="0" marL="0">
+              <a:buNone/>
+            </a:pPr>
+            <a:r>
+              <a:rPr lang="en-US" sz="1300" dirty="0">
+                <a:solidFill>
+                  <a:srgbClr val="C6CDE4"/>
+                </a:solidFill>
+              </a:rPr>
+              <a:t>в Казани</a:t>
+            </a:r>
+            <a:endParaRPr lang="en-US" sz="1600" dirty="0"/>
+          </a:p>
+        </p:txBody>
+      </p:sp>
+      <p:sp>
+        <p:nvSpPr>
+          <p:cNvPr id="6" name="Text 4"/>
+          <p:cNvSpPr txBox="1"/>
+          <p:nvPr/>
+        </p:nvSpPr>
+        <p:spPr>
+          <a:xfrm>
+            <a:off x="640080" y="4023360"/>
+            <a:ext cx="10881360" cy="731520"/>
+          </a:xfrm>
+          <a:prstGeom prst="rect">
+            <a:avLst/>
+          </a:prstGeom>
+          <a:noFill/>
+          <a:ln/>
+        </p:spPr>
+        <p:txBody>
+          <a:bodyPr wrap="square" lIns="0" tIns="0" rIns="0" bIns="0" rtlCol="0" anchor="t"/>
+          <a:lstStyle/>
+          <a:p>
+            <a:pPr indent="0" marL="0">
+              <a:buNone/>
+            </a:pPr>
+            <a:r>
+              <a:rPr lang="en-US" sz="1500" i="1" dirty="0">
+                <a:solidFill>
+                  <a:srgbClr val="D9DDE3"/>
+                </a:solidFill>
+              </a:rPr>
+              <a:t>С марта 2027 года проверка карточек на маркетплейсах становится обязательной — предварительная самопроверка нужна продавцу уже сейчас</a:t>
+            </a:r>
+            <a:endParaRPr lang="en-US" sz="1500" dirty="0"/>
+          </a:p>
+        </p:txBody>
+      </p:sp>
+      <p:sp>
+        <p:nvSpPr>
+          <p:cNvPr id="7" name="подпись"/>
+          <p:cNvSpPr txBox="1"/>
+          <p:nvPr/>
+        </p:nvSpPr>
+        <p:spPr>
+          <a:xfrm>
+            <a:off x="640080" y="4892040"/>
+            <a:ext cx="9144000" cy="1463040"/>
+          </a:xfrm>
+          <a:prstGeom prst="rect">
+            <a:avLst/>
+          </a:prstGeom>
+          <a:noFill/>
+          <a:ln/>
+        </p:spPr>
+        <p:txBody>
+          <a:bodyPr wrap="square" lIns="0" tIns="0" rIns="0" bIns="0" rtlCol="0" anchor="t"/>
+          <a:lstStyle/>
+          <a:p>
+            <a:pPr indent="0" marL="0">
+              <a:buNone/>
+            </a:pPr>
+            <a:r>
+              <a:rPr lang="en-US" sz="2200" b="1" dirty="0">
+                <a:solidFill>
+                  <a:srgbClr val="1F7A4D"/>
+                </a:solidFill>
+              </a:rPr>
+              <a:t>birka.tatnet.app</a:t>
+            </a:r>
+            <a:endParaRPr lang="en-US" sz="2200" dirty="0"/>
+          </a:p>
+          <a:p>
+            <a:pPr indent="0" marL="0">
+              <a:buNone/>
+            </a:pPr>
+            <a:r>
+              <a:rPr lang="en-US" sz="1500" dirty="0">
+                <a:solidFill>
+                  <a:srgbClr val="AEB6C9"/>
+                </a:solidFill>
+              </a:rPr>
+              <a:t>Спасибо. Готов ответить на вопросы</a:t>
+            </a:r>
+            <a:endParaRPr lang="en-US" sz="2200" dirty="0"/>
+          </a:p>
+          <a:p>
+            <a:pPr indent="0" marL="0">
+              <a:buNone/>
+            </a:pPr>
+            <a:r>
+              <a:rPr lang="en-US" sz="800" dirty="0">
+                <a:solidFill>
+                  <a:srgbClr val="000000"/>
+                </a:solidFill>
+              </a:rPr>
+              <a:t> </a:t>
+            </a:r>
+            <a:endParaRPr lang="en-US" sz="2200" dirty="0"/>
+          </a:p>
+          <a:p>
+            <a:pPr indent="0" marL="0">
+              <a:buNone/>
+            </a:pPr>
+            <a:r>
+              <a:rPr lang="en-US" sz="1300" dirty="0">
+                <a:solidFill>
+                  <a:srgbClr val="8E97B5"/>
+                </a:solidFill>
+              </a:rPr>
+              <a:t>Фазуллин Амир · Лицей-интернат имени Мустафы Онджеля</a:t>
+            </a:r>
+            <a:endParaRPr lang="en-US" sz="2200" dirty="0"/>
+          </a:p>
+        </p:txBody>
+      </p:sp>
+      <p:sp>
+        <p:nvSpPr>
+          <p:cNvPr id="9" name="Text 0"/>
           <p:cNvSpPr/>
           <p:nvPr>
             <p:ph idx="100" type="title" hasCustomPrompt="1"/>
@@ -5851,333 +6233,7 @@
             <a:pPr algn="l" indent="0" marL="0">
               <a:buNone/>
             </a:pPr>
-            <a:r>
-              <a:rPr lang="en-US" sz="4000" b="1" dirty="0">
-                <a:solidFill>
-                  <a:schemeClr val="bg1"/>
-                </a:solidFill>
-              </a:rPr>
-              <a:t>Что дальше</a:t>
-            </a:r>
             <a:endParaRPr lang="en-US" sz="4000" dirty="0"/>
-          </a:p>
-        </p:txBody>
-      </p:sp>
-      <p:sp>
-        <p:nvSpPr>
-          <p:cNvPr id="3" name="план 1"/>
-          <p:cNvSpPr/>
-          <p:nvPr/>
-        </p:nvSpPr>
-        <p:spPr>
-          <a:xfrm>
-            <a:off x="640080" y="2194560"/>
-            <a:ext cx="3413760" cy="1554480"/>
-          </a:xfrm>
-          <a:prstGeom prst="roundRect">
-            <a:avLst>
-              <a:gd name="adj" fmla="val 5882"/>
-            </a:avLst>
-          </a:prstGeom>
-          <a:solidFill>
-            <a:srgbClr val="3E4C94"/>
-          </a:solidFill>
-          <a:ln/>
-        </p:spPr>
-        <p:txBody>
-          <a:bodyPr wrap="square" lIns="152400" tIns="203200" rIns="203200" bIns="152400" rtlCol="0" anchor="ctr"/>
-          <a:lstStyle/>
-          <a:p>
-            <a:pPr algn="l" indent="0" marL="0">
-              <a:buNone/>
-            </a:pPr>
-            <a:r>
-              <a:rPr lang="en-US" sz="1600" b="1" dirty="0">
-                <a:solidFill>
-                  <a:srgbClr val="FFFFFF"/>
-                </a:solidFill>
-              </a:rPr>
-              <a:t>Детские товары</a:t>
-            </a:r>
-            <a:endParaRPr lang="en-US" sz="1600" dirty="0"/>
-          </a:p>
-          <a:p>
-            <a:pPr algn="l" indent="0" marL="0">
-              <a:buNone/>
-            </a:pPr>
-            <a:r>
-              <a:rPr lang="en-US" sz="1300" dirty="0">
-                <a:solidFill>
-                  <a:srgbClr val="C6CDE4"/>
-                </a:solidFill>
-              </a:rPr>
-              <a:t>добавить проверку</a:t>
-            </a:r>
-            <a:endParaRPr lang="en-US" sz="1600" dirty="0"/>
-          </a:p>
-          <a:p>
-            <a:pPr algn="l" indent="0" marL="0">
-              <a:buNone/>
-            </a:pPr>
-            <a:r>
-              <a:rPr lang="en-US" sz="1300" dirty="0">
-                <a:solidFill>
-                  <a:srgbClr val="C6CDE4"/>
-                </a:solidFill>
-              </a:rPr>
-              <a:t>по ТР ТС 007/2011</a:t>
-            </a:r>
-            <a:endParaRPr lang="en-US" sz="1600" dirty="0"/>
-          </a:p>
-        </p:txBody>
-      </p:sp>
-      <p:sp>
-        <p:nvSpPr>
-          <p:cNvPr id="4" name="план 2"/>
-          <p:cNvSpPr/>
-          <p:nvPr/>
-        </p:nvSpPr>
-        <p:spPr>
-          <a:xfrm>
-            <a:off x="4373880" y="2194560"/>
-            <a:ext cx="3413760" cy="1554480"/>
-          </a:xfrm>
-          <a:prstGeom prst="roundRect">
-            <a:avLst>
-              <a:gd name="adj" fmla="val 5882"/>
-            </a:avLst>
-          </a:prstGeom>
-          <a:solidFill>
-            <a:srgbClr val="3E4C94"/>
-          </a:solidFill>
-          <a:ln/>
-        </p:spPr>
-        <p:txBody>
-          <a:bodyPr wrap="square" lIns="152400" tIns="203200" rIns="203200" bIns="152400" rtlCol="0" anchor="ctr"/>
-          <a:lstStyle/>
-          <a:p>
-            <a:pPr algn="l" indent="0" marL="0">
-              <a:buNone/>
-            </a:pPr>
-            <a:r>
-              <a:rPr lang="en-US" sz="1600" b="1" dirty="0">
-                <a:solidFill>
-                  <a:srgbClr val="FFFFFF"/>
-                </a:solidFill>
-              </a:rPr>
-              <a:t>Проверка по ссылке</a:t>
-            </a:r>
-            <a:endParaRPr lang="en-US" sz="1600" dirty="0"/>
-          </a:p>
-          <a:p>
-            <a:pPr algn="l" indent="0" marL="0">
-              <a:buNone/>
-            </a:pPr>
-            <a:r>
-              <a:rPr lang="en-US" sz="1300" dirty="0">
-                <a:solidFill>
-                  <a:srgbClr val="C6CDE4"/>
-                </a:solidFill>
-              </a:rPr>
-              <a:t>разбор карточки</a:t>
-            </a:r>
-            <a:endParaRPr lang="en-US" sz="1600" dirty="0"/>
-          </a:p>
-          <a:p>
-            <a:pPr algn="l" indent="0" marL="0">
-              <a:buNone/>
-            </a:pPr>
-            <a:r>
-              <a:rPr lang="en-US" sz="1300" dirty="0">
-                <a:solidFill>
-                  <a:srgbClr val="C6CDE4"/>
-                </a:solidFill>
-              </a:rPr>
-              <a:t>маркетплейса целиком</a:t>
-            </a:r>
-            <a:endParaRPr lang="en-US" sz="1600" dirty="0"/>
-          </a:p>
-        </p:txBody>
-      </p:sp>
-      <p:sp>
-        <p:nvSpPr>
-          <p:cNvPr id="5" name="план 3"/>
-          <p:cNvSpPr/>
-          <p:nvPr/>
-        </p:nvSpPr>
-        <p:spPr>
-          <a:xfrm>
-            <a:off x="8107680" y="2194560"/>
-            <a:ext cx="3413760" cy="1554480"/>
-          </a:xfrm>
-          <a:prstGeom prst="roundRect">
-            <a:avLst>
-              <a:gd name="adj" fmla="val 5882"/>
-            </a:avLst>
-          </a:prstGeom>
-          <a:solidFill>
-            <a:srgbClr val="3E4C94"/>
-          </a:solidFill>
-          <a:ln/>
-        </p:spPr>
-        <p:txBody>
-          <a:bodyPr wrap="square" lIns="152400" tIns="203200" rIns="203200" bIns="152400" rtlCol="0" anchor="ctr"/>
-          <a:lstStyle/>
-          <a:p>
-            <a:pPr algn="l" indent="0" marL="0">
-              <a:buNone/>
-            </a:pPr>
-            <a:r>
-              <a:rPr lang="en-US" sz="1600" b="1" dirty="0">
-                <a:solidFill>
-                  <a:srgbClr val="FFFFFF"/>
-                </a:solidFill>
-              </a:rPr>
-              <a:t>Пилот с типографией</a:t>
-            </a:r>
-            <a:endParaRPr lang="en-US" sz="1600" dirty="0"/>
-          </a:p>
-          <a:p>
-            <a:pPr algn="l" indent="0" marL="0">
-              <a:buNone/>
-            </a:pPr>
-            <a:r>
-              <a:rPr lang="en-US" sz="1300" dirty="0">
-                <a:solidFill>
-                  <a:srgbClr val="C6CDE4"/>
-                </a:solidFill>
-              </a:rPr>
-              <a:t>первые клиенты</a:t>
-            </a:r>
-            <a:endParaRPr lang="en-US" sz="1600" dirty="0"/>
-          </a:p>
-          <a:p>
-            <a:pPr algn="l" indent="0" marL="0">
-              <a:buNone/>
-            </a:pPr>
-            <a:r>
-              <a:rPr lang="en-US" sz="1300" dirty="0">
-                <a:solidFill>
-                  <a:srgbClr val="C6CDE4"/>
-                </a:solidFill>
-              </a:rPr>
-              <a:t>в Казани</a:t>
-            </a:r>
-            <a:endParaRPr lang="en-US" sz="1600" dirty="0"/>
-          </a:p>
-        </p:txBody>
-      </p:sp>
-      <p:sp>
-        <p:nvSpPr>
-          <p:cNvPr id="6" name="Text 4"/>
-          <p:cNvSpPr txBox="1"/>
-          <p:nvPr/>
-        </p:nvSpPr>
-        <p:spPr>
-          <a:xfrm>
-            <a:off x="640080" y="4023360"/>
-            <a:ext cx="10881360" cy="731520"/>
-          </a:xfrm>
-          <a:prstGeom prst="rect">
-            <a:avLst/>
-          </a:prstGeom>
-          <a:noFill/>
-          <a:ln/>
-        </p:spPr>
-        <p:txBody>
-          <a:bodyPr wrap="square" lIns="0" tIns="0" rIns="0" bIns="0" rtlCol="0" anchor="t"/>
-          <a:lstStyle/>
-          <a:p>
-            <a:pPr indent="0" marL="0">
-              <a:buNone/>
-            </a:pPr>
-            <a:r>
-              <a:rPr lang="en-US" sz="1500" i="1" dirty="0">
-                <a:solidFill>
-                  <a:srgbClr val="D9DDE3"/>
-                </a:solidFill>
-              </a:rPr>
-              <a:t>С марта 2027 года проверка карточек на маркетплейсах становится обязательной — предварительная самопроверка нужна продавцу уже сейчас</a:t>
-            </a:r>
-            <a:endParaRPr lang="en-US" sz="1500" dirty="0"/>
-          </a:p>
-        </p:txBody>
-      </p:sp>
-      <p:sp>
-        <p:nvSpPr>
-          <p:cNvPr id="7" name="подпись"/>
-          <p:cNvSpPr txBox="1"/>
-          <p:nvPr/>
-        </p:nvSpPr>
-        <p:spPr>
-          <a:xfrm>
-            <a:off x="640080" y="4892040"/>
-            <a:ext cx="9144000" cy="1463040"/>
-          </a:xfrm>
-          <a:prstGeom prst="rect">
-            <a:avLst/>
-          </a:prstGeom>
-          <a:noFill/>
-          <a:ln/>
-        </p:spPr>
-        <p:txBody>
-          <a:bodyPr wrap="square" lIns="0" tIns="0" rIns="0" bIns="0" rtlCol="0" anchor="t"/>
-          <a:lstStyle/>
-          <a:p>
-            <a:pPr indent="0" marL="0">
-              <a:buNone/>
-            </a:pPr>
-            <a:r>
-              <a:rPr lang="en-US" sz="2200" b="1" dirty="0">
-                <a:solidFill>
-                  <a:srgbClr val="1F7A4D"/>
-                </a:solidFill>
-              </a:rPr>
-              <a:t>birka.tatnet.app</a:t>
-            </a:r>
-            <a:endParaRPr lang="en-US" sz="2200" dirty="0"/>
-          </a:p>
-          <a:p>
-            <a:pPr indent="0" marL="0">
-              <a:buNone/>
-            </a:pPr>
-            <a:r>
-              <a:rPr lang="en-US" sz="1500" dirty="0">
-                <a:solidFill>
-                  <a:srgbClr val="AEB6C9"/>
-                </a:solidFill>
-              </a:rPr>
-              <a:t>Спасибо. Готов ответить на вопросы</a:t>
-            </a:r>
-            <a:endParaRPr lang="en-US" sz="2200" dirty="0"/>
-          </a:p>
-          <a:p>
-            <a:pPr indent="0" marL="0">
-              <a:buNone/>
-            </a:pPr>
-            <a:r>
-              <a:rPr lang="en-US" sz="800" dirty="0">
-                <a:solidFill>
-                  <a:srgbClr val="000000"/>
-                </a:solidFill>
-              </a:rPr>
-              <a:t> </a:t>
-            </a:r>
-            <a:endParaRPr lang="en-US" sz="2200" dirty="0"/>
-          </a:p>
-          <a:p>
-            <a:pPr indent="0" marL="0">
-              <a:buNone/>
-            </a:pPr>
-            <a:r>
-              <a:rPr lang="en-US" sz="1300" dirty="0">
-                <a:solidFill>
-                  <a:srgbClr val="8E97B5"/>
-                </a:solidFill>
-              </a:rPr>
-              <a:t>Фазуллин Амир · Лицей-интернат имени Мустафы Онджеля</a:t>
-            </a:r>
-            <a:endParaRPr lang="en-US" sz="2200" dirty="0"/>
           </a:p>
         </p:txBody>
       </p:sp>
